--- a/deliverables/答辩PPT.pptx
+++ b/deliverables/答辩PPT.pptx
@@ -121,24 +121,24 @@
   <p:extLst>
     <p:ext uri="{521415D9-36F7-43E2-AB2F-B90AF26B5E84}">
       <p14:sectionLst xmlns:p14="http://schemas.microsoft.com/office/powerpoint/2010/main">
-        <p14:section name="开场" id="{40b8d7a6-9a16-9c87-8eb7-73cdbefd2afe}">
+        <p14:section name="开场" id="{b36575eb-4b9b-0424-ec89-d58319096244}">
           <p14:sldIdLst>
             <p14:sldId id="256"/>
           </p14:sldIdLst>
         </p14:section>
-        <p14:section name="问题与方案" id="{36c5aa2f-decc-c86a-24b6-26652d856206}">
+        <p14:section name="问题与方案" id="{0fe4f190-abd8-4e23-7f2e-a14b387c1747}">
           <p14:sldIdLst>
             <p14:sldId id="257"/>
             <p14:sldId id="258"/>
           </p14:sldIdLst>
         </p14:section>
-        <p14:section name="架构与规划" id="{266f3be3-d836-bac0-3209-e5ab544b755c}">
+        <p14:section name="架构与规划" id="{d69e3c25-37c6-cfae-53c9-9cb5325f845e}">
           <p14:sldIdLst>
             <p14:sldId id="259"/>
             <p14:sldId id="260"/>
           </p14:sldIdLst>
         </p14:section>
-        <p14:section name="安全设计" id="{540962ae-ea0c-bfa0-e9a4-977e23e70d68}">
+        <p14:section name="安全设计" id="{43ba5428-a4c6-261f-2870-b64462526e03}">
           <p14:sldIdLst>
             <p14:sldId id="261"/>
             <p14:sldId id="262"/>
@@ -148,14 +148,14 @@
             <p14:sldId id="266"/>
           </p14:sldIdLst>
         </p14:section>
-        <p14:section name="体验与评测" id="{be337075-2d72-4337-1e57-98a791b8ff92}">
+        <p14:section name="体验与评测" id="{93f951ef-4902-ba9b-a51b-5ea4f2d76baf}">
           <p14:sldIdLst>
             <p14:sldId id="267"/>
             <p14:sldId id="268"/>
             <p14:sldId id="269"/>
           </p14:sldIdLst>
         </p14:section>
-        <p14:section name="总结" id="{1bd7f41d-1819-9544-877e-214c9b9a9632}">
+        <p14:section name="总结" id="{93f40cc5-025a-c154-86ec-8cc11965d8ea}">
           <p14:sldIdLst>
             <p14:sldId id="270"/>
           </p14:sldIdLst>
@@ -296,7 +296,7 @@
                 <c:formatCode>General</c:formatCode>
                 <c:ptCount val="8"/>
                 <c:pt idx="0">
-                  <c:v>95.5</c:v>
+                  <c:v>100</c:v>
                 </c:pt>
                 <c:pt idx="1">
                   <c:v>100</c:v>
@@ -305,7 +305,7 @@
                   <c:v>100</c:v>
                 </c:pt>
                 <c:pt idx="3">
-                  <c:v>91.7</c:v>
+                  <c:v>100</c:v>
                 </c:pt>
                 <c:pt idx="4">
                   <c:v>100</c:v>
@@ -1118,7 +1118,7 @@
           <a:p>
             <a:r>
               <a:rPr lang="en-US" dirty="0"/>
-              <a:t>体验上，小安是手机银行风格，可以添加到主屏幕。首页会主动提醒生日、续费、涨价和可疑交易；对话支持省略和改主意，比如“再给小张转两百”“第二笔算了”“改成三百”；遇到两个“小李”会给选项，问天气、机票、个股推荐会说明能力边界。评测里任务平均 1.17 轮办成，每轮大约 2.4 秒。右侧的“安全透视”实时展示每一步：守卫、模型提议、溯源、判档、事实校验和审计。</a:t>
+              <a:t>体验上，小安是手机银行风格，可以添加到主屏幕。首页会主动提醒生日、续费、涨价和可疑交易；对话支持省略和改主意，比如“再给小张转两百”“第二笔算了”“改成三百”；遇到两个“小李”会给选项，问天气、机票、个股推荐会说明能力边界。评测里任务平均 1.17 轮办成，每轮大约 2.0 秒。右侧的“安全透视”实时展示每一步：守卫、模型提议、溯源、判档、事实校验和审计。</a:t>
             </a:r>
             <a:endParaRPr lang="en-US" dirty="0"/>
           </a:p>
@@ -1206,7 +1206,7 @@
           <a:p>
             <a:r>
               <a:rPr lang="en-US" dirty="0"/>
-              <a:t>怎么证明？我们自建了 151 条黑盒评测用例：任务 87 条、安全 45 条、体验 19 条，用真实大模型、只通过 HTTP 接口测试。评测集由不看后端实现的一方编写。结果：任务完成率 97.7%，攻击拦截率 100%，工具调用正确率 99.2%，体验用例 100%；每一轮回复都检查有没有泄露动态码、交易密码、确认码和完整手机号，泄露 0 次；正常请求被误拦 0/107。没通过的用例我们照实写在测试报告里。</a:t>
+              <a:t>怎么证明？我们自建了 151 条黑盒评测用例：任务 87 条、安全 45 条、体验 19 条，用真实大模型、只通过 HTTP 接口测试。评测集由不看后端实现的一方编写。结果：任务完成率 100%，攻击拦截率 100%，工具调用正确率 100%，体验用例 100%；每一轮回复都检查有没有泄露动态码、交易密码、确认码和完整手机号，泄露 0 次；正常请求被误拦 0/107。这是第三次全量运行的结果，前两次的失败和修复过程都照实写在测试报告里。</a:t>
             </a:r>
             <a:endParaRPr lang="en-US" dirty="0"/>
           </a:p>
@@ -4723,7 +4723,7 @@
                   <a:schemeClr val="tx1"/>
                 </a:solidFill>
               </a:rPr>
-              <a:t>信息齐全的一句话一轮出单；平均 1.17 轮，每轮约 2.4 秒</a:t>
+              <a:t>信息齐全的一句话一轮出单；平均 1.17 轮，每轮约 2.0 秒</a:t>
             </a:r>
             <a:endParaRPr lang="en-US" sz="1500" dirty="0"/>
           </a:p>
@@ -4901,7 +4901,7 @@
                   <a:schemeClr val="accent1"/>
                 </a:solidFill>
               </a:rPr>
-              <a:t>97.7%</a:t>
+              <a:t>100%</a:t>
             </a:r>
             <a:endParaRPr lang="en-US" sz="4400" dirty="0"/>
           </a:p>
@@ -4937,7 +4937,7 @@
                   <a:schemeClr val="accent6"/>
                 </a:solidFill>
               </a:rPr>
-              <a:t>任务完成率（85/87）</a:t>
+              <a:t>任务完成率（87/87）</a:t>
             </a:r>
             <a:endParaRPr lang="en-US" sz="1300" dirty="0"/>
           </a:p>
@@ -5045,7 +5045,7 @@
                   <a:schemeClr val="accent5"/>
                 </a:solidFill>
               </a:rPr>
-              <a:t>99.2%</a:t>
+              <a:t>100%</a:t>
             </a:r>
             <a:endParaRPr lang="en-US" sz="4400" dirty="0"/>
           </a:p>
@@ -5081,7 +5081,7 @@
                   <a:schemeClr val="accent6"/>
                 </a:solidFill>
               </a:rPr>
-              <a:t>工具调用正确率（118/119）</a:t>
+              <a:t>工具调用正确率（119/119）</a:t>
             </a:r>
             <a:endParaRPr lang="en-US" sz="1300" dirty="0"/>
           </a:p>
@@ -6813,7 +6813,7 @@
                   <a:srgbClr val="D7E1F8"/>
                 </a:solidFill>
               </a:rPr>
-              <a:t>六大场景 18 项能力；任务完成率 97.7%</a:t>
+              <a:t>六大场景 18 项能力；任务完成率 100%</a:t>
             </a:r>
             <a:endParaRPr lang="en-US" sz="2000" dirty="0"/>
           </a:p>

--- a/deliverables/答辩PPT.pptx
+++ b/deliverables/答辩PPT.pptx
@@ -121,26 +121,26 @@
   <p:extLst>
     <p:ext uri="{521415D9-36F7-43E2-AB2F-B90AF26B5E84}">
       <p14:sectionLst xmlns:p14="http://schemas.microsoft.com/office/powerpoint/2010/main">
-        <p14:section name="开场" id="{b36575eb-4b9b-0424-ec89-d58319096244}">
+        <p14:section name="开场" id="{531e38e0-81f8-3e02-a042-6b9590c89090}">
           <p14:sldIdLst>
             <p14:sldId id="256"/>
           </p14:sldIdLst>
         </p14:section>
-        <p14:section name="问题与方案" id="{0fe4f190-abd8-4e23-7f2e-a14b387c1747}">
+        <p14:section name="问题与方案" id="{893a9e3b-4739-4a55-d973-d2780316d11b}">
           <p14:sldIdLst>
             <p14:sldId id="257"/>
             <p14:sldId id="258"/>
           </p14:sldIdLst>
         </p14:section>
-        <p14:section name="架构与规划" id="{d69e3c25-37c6-cfae-53c9-9cb5325f845e}">
+        <p14:section name="架构与规划" id="{5d7ffee9-93c2-0a27-68be-3642c7317fd6}">
           <p14:sldIdLst>
             <p14:sldId id="259"/>
             <p14:sldId id="260"/>
+            <p14:sldId id="261"/>
           </p14:sldIdLst>
         </p14:section>
-        <p14:section name="安全设计" id="{43ba5428-a4c6-261f-2870-b64462526e03}">
+        <p14:section name="安全设计" id="{10650d9b-7d9c-469f-eff3-f70f2d573c76}">
           <p14:sldIdLst>
-            <p14:sldId id="261"/>
             <p14:sldId id="262"/>
             <p14:sldId id="263"/>
             <p14:sldId id="264"/>
@@ -148,14 +148,14 @@
             <p14:sldId id="266"/>
           </p14:sldIdLst>
         </p14:section>
-        <p14:section name="体验与评测" id="{93f951ef-4902-ba9b-a51b-5ea4f2d76baf}">
+        <p14:section name="体验与评测" id="{55e80fda-0202-697b-e2ec-d57c4c40f8ff}">
           <p14:sldIdLst>
             <p14:sldId id="267"/>
             <p14:sldId id="268"/>
             <p14:sldId id="269"/>
           </p14:sldIdLst>
         </p14:section>
-        <p14:section name="总结" id="{93f40cc5-025a-c154-86ec-8cc11965d8ea}">
+        <p14:section name="总结" id="{13684a3d-cd5e-217a-3020-21442d0e743c}">
           <p14:sldIdLst>
             <p14:sldId id="270"/>
           </p14:sldIdLst>
@@ -942,7 +942,7 @@
           <a:p>
             <a:r>
               <a:rPr lang="en-US" dirty="0"/>
-              <a:t>幻觉防护分两头。写操作之前做参数溯源：金额、收款人、日期必须能追溯到用户本人说过的话，代码能解析“两百”“整五百”“一万二”“下礼拜五”这类口语；工具结果和模型的推测都不算数。回复之后做事实校验：回复里的每个数字都要在本轮的工具结果里找得到，对不上就用代码模板重写；没有成功回执的时候，不允许说“已转账”“已完成”。</a:t>
+              <a:t>对于注入、信息套取和越权，单靠提示词是挡不住的，所以我们设了五层，每一层都由代码兜底。第一层输入守卫，命中就不调用模型，十分钟三次直接转为只读；第二层把交易备注、产品说明这类外部文本包起来，明确是数据不是指令；第三层参数溯源，转账金额和收款人必须来自用户原话——右边这个例子，用户说“按那条备注说的办”，小安拒绝了，即使模型被说服，备注里的号码也过不了溯源；第四、五层是代码判档和代码渲染确认单。</a:t>
             </a:r>
             <a:endParaRPr lang="en-US" dirty="0"/>
           </a:p>
@@ -1030,7 +1030,7 @@
           <a:p>
             <a:r>
               <a:rPr lang="en-US" dirty="0"/>
-              <a:t>赛题要求生成的代码在受限、可监控的环境里运行。比如“周末和工作日外卖平均各花多少”，固定报表回答不了，我们让模型写一段分析代码。运行前先做语法树白名单检查，只允许少数标准库，禁止 eval、open 这类危险调用；运行时用独立子进程，限制 CPU、内存和时间，并放进没有网卡的网络命名空间；数据只给本人交易的只读快照；代码哈希和运行结果都写进审计。</a:t>
+              <a:t>防幻觉分两头：写操作之前做参数溯源，金额、收款人、日期必须能追溯到用户本人说过的话；回复之后做事实校验，每个数字都要在工具结果里找得到，对不上就用代码模板重写，没有回执不许说“已完成”。赛题还要求生成的代码在受限环境里运行：比如“周末和工作日外卖平均各花多少”，模型写一段分析代码，先过语法树白名单，再放进没有网络、限制 CPU 和内存的子进程里跑，只给本人交易的只读快照，代码哈希写进审计。</a:t>
             </a:r>
             <a:endParaRPr lang="en-US" dirty="0"/>
           </a:p>
@@ -1470,7 +1470,7 @@
           <a:p>
             <a:r>
               <a:rPr lang="en-US" dirty="0"/>
-              <a:t>我们看到两个痛点。第一，银行 App 功能越来越多，做一件小事要点很多层，老人尤其吃力，而他们正是诈骗的主要目标。第二，大家都想用大模型来代办，但模型会被诱导、会被注入、会产生幻觉——如果让它直接决定转账，风险不可接受。我们的方案就是在这两者之间找到平衡。</a:t>
+              <a:t>先看行业。今年 4 月 Revolut 在 App 里推出了 AI 助手 AIR，能查消费、管订阅、控制卡片，每笔交易都要生物识别确认。但公开评论也指出了不足：只有 App 一个渠道；熟悉的操作用聊天反而更慢；缺少清晰的转人工出口；对冻结账户这类例外处理弱。小安的回答是：App 加飞书两个渠道并且按渠道分级风控；三档权限让低风险操作更快、高风险操作更严；保留常规页面；有明确的转人工和可回退的计划。当然我们也有不如它的地方：我们是模拟原型，没有生物识别。</a:t>
             </a:r>
             <a:endParaRPr lang="en-US" dirty="0"/>
           </a:p>
@@ -1734,7 +1734,7 @@
           <a:p>
             <a:r>
               <a:rPr lang="en-US" dirty="0"/>
-              <a:t>复杂任务怎么办？以生日为例：首页主动提醒“爱人 11 月 12 号生日”，点“帮我准备”，模型生成一个四步的 DAG 计划：先锁定一千元预算，再在生日前两天订花和蛋糕，最后当天提醒。用户只需要确认一次，代码把每一步的参数都绑定进哈希。到点由调度器执行，执行前会重新判档；中途可以暂停、去掉一步、全部回退或者转人工，回退时会自动释放预算。</a:t>
+              <a:t>赛题要求用户可以通过 App、IM 等渠道和 Agent 联通。小安有两个渠道：一是可以添加到手机主屏幕的网页应用；二是飞书私聊机器人。我们的创新是“渠道分级风控”：渠道越不可控，能办的事越少。查询在两边都能直接办；小额操作在飞书里要点卡片按钮，打字“确认”无效；大额转账等红档操作在飞书里只生成待办，必须回 App 输入交易密码和动态码，动态码绝不发到飞书。绑定需要在 App 里生成一次性绑定码，群聊一律忽略。</a:t>
             </a:r>
             <a:endParaRPr lang="en-US" dirty="0"/>
           </a:p>
@@ -1822,7 +1822,7 @@
           <a:p>
             <a:r>
               <a:rPr lang="en-US" dirty="0"/>
-              <a:t>权限分三档，全部由代码判定。绿档是查询类，自动执行；黄档展示详情，用户点确认按钮，确认码绑定全部参数的哈希、五分钟有效、只能用一次；红档要交易密码加短信动态码。我们特别设计了“风险对称”：冻结卡、下调限额这类降低风险的操作只要点确认，解冻、上调限额这类增加风险的操作必须强验证。另外，聊天里说“我确认了”是不算的。</a:t>
+              <a:t>复杂任务怎么办？以生日为例：首页主动提醒“爱人 11 月 12 号生日”，点“帮我准备”，模型生成一个四步的 DAG 计划：先锁定一千元预算，再在生日前两天订花和蛋糕，最后当天提醒。用户只需要确认一次，代码把每一步的参数都绑定进哈希。到点由调度器执行，执行前会重新判档；中途可以暂停、去掉一步、全部回退或者转人工，回退时会自动释放预算。</a:t>
             </a:r>
             <a:endParaRPr lang="en-US" dirty="0"/>
           </a:p>
@@ -1910,7 +1910,7 @@
           <a:p>
             <a:r>
               <a:rPr lang="en-US" dirty="0"/>
-              <a:t>红档操作需要两个因素：交易密码，加上发到绑定手机的模拟短信动态码。短信正文写明对象和金额，比如“向刘芳转账两千元”，这叫所见即所签，防止骗子诱导用户把验证码转发出去。动态码只出现在右边的模拟手机里，不进聊天、不给模型、不进日志。交易密码或动态码连续错三次，红档操作锁十分钟，锁状态存在数据库里，重启服务也不会清零——评测里我们专门重启后端验证过。</a:t>
+              <a:t>权限分三档，全部由代码判定。绿档是查询类，自动执行；黄档展示详情，用户点确认按钮，确认码绑定全部参数的哈希、五分钟有效、只能用一次；红档要交易密码加短信动态码。我们特别设计了“风险对称”：冻结卡、下调限额这类降低风险的操作只要点确认，解冻、上调限额这类增加风险的操作必须强验证。另外，聊天里说“我确认了”是不算的。</a:t>
             </a:r>
             <a:endParaRPr lang="en-US" dirty="0"/>
           </a:p>
@@ -1998,7 +1998,7 @@
           <a:p>
             <a:r>
               <a:rPr lang="en-US" dirty="0"/>
-              <a:t>诱导转账是赛题点名的第一类风险。我们有三层：第一，收款方在风险名单上的直接拒绝，比如“客服让我把钱转到安全账户”，代码在调用模型之前就拦下并解释骗局；第二，每笔转账由代码打零到一百分，看是不是首次收款、金额是否异常、有没有诈骗话术和催促用语；第三，六十分以上强制升为红档，加三十秒冷静期，默认二十四小时后到账，到账前一句“撤回刚才那笔”就能全额退回。</a:t>
+              <a:t>红档操作需要两个因素：交易密码，加上发到绑定手机的模拟短信动态码。短信正文写明对象和金额，比如“向刘芳转账两千元”，这叫所见即所签，防止骗子诱导用户把验证码转发出去。动态码只出现在右边的模拟手机里，不进聊天、不给模型、不进日志。交易密码或动态码连续错三次，红档操作锁十分钟，锁状态存在数据库里，重启服务也不会清零——评测里我们专门重启后端验证过。</a:t>
             </a:r>
             <a:endParaRPr lang="en-US" dirty="0"/>
           </a:p>
@@ -2086,7 +2086,7 @@
           <a:p>
             <a:r>
               <a:rPr lang="en-US" dirty="0"/>
-              <a:t>对于注入、信息套取和越权，单靠提示词是挡不住的，所以我们设了五层，每一层都由代码兜底。第一层输入守卫，命中就不调用模型，十分钟三次直接转为只读；第二层把交易备注、产品说明这类外部文本包起来，明确是数据不是指令；第三层参数溯源，转账金额和收款人必须来自用户原话——右边这个例子，用户说“按那条备注说的办”，小安拒绝了，即使模型被说服，备注里的号码也过不了溯源；第四、五层是代码判档和代码渲染确认单。</a:t>
+              <a:t>诱导转账是赛题点名的第一类风险。我们有三层：第一，收款方在风险名单上的直接拒绝，比如“客服让我把钱转到安全账户”，代码在调用模型之前就拦下并解释骗局；第二，每笔转账由代码打零到一百分，看是不是首次收款、金额是否异常、有没有诈骗话术和催促用语；第三，六十分以上强制升为红档，加三十秒冷静期，默认二十四小时后到账，到账前一句“撤回刚才那笔”就能全额退回。</a:t>
             </a:r>
             <a:endParaRPr lang="en-US" dirty="0"/>
           </a:p>
@@ -2847,7 +2847,7 @@
                   <a:srgbClr val="D7E1F8"/>
                 </a:solidFill>
               </a:rPr>
-              <a:t>六大场景 · 三档权限 · 强验证 · 反诈 · 防幻觉 · 沙箱</a:t>
+              <a:t>六大场景 · App + 飞书 · 三档权限 · 强验证 · 反诈 · 防幻觉 · 沙箱</a:t>
             </a:r>
             <a:endParaRPr lang="en-US" sz="1800" dirty="0"/>
           </a:p>
@@ -3051,7 +3051,7 @@
                   <a:schemeClr val="tx2"/>
                 </a:solidFill>
               </a:rPr>
-              <a:t>幻觉防护：参数溯源 + 事实校验</a:t>
+              <a:t>注入、套取、越权：五层防线</a:t>
             </a:r>
             <a:endParaRPr lang="en-US" sz="3000" dirty="0"/>
           </a:p>
@@ -3087,7 +3087,7 @@
                   <a:schemeClr val="accent6"/>
                 </a:solidFill>
               </a:rPr>
-              <a:t>数字只能来自账本，没执行就不能说“已完成”</a:t>
+              <a:t>单靠提示词挡不住注入；我们让每一层都由代码兜底</a:t>
             </a:r>
             <a:endParaRPr lang="en-US" sz="1500" dirty="0"/>
           </a:p>
@@ -3095,18 +3095,18 @@
       </p:sp>
       <p:sp>
         <p:nvSpPr>
-          <p:cNvPr id="4" name="卡片-参数溯源（写操作之前）"/>
+          <p:cNvPr id="4" name="防线1"/>
           <p:cNvSpPr/>
           <p:nvPr/>
         </p:nvSpPr>
         <p:spPr>
           <a:xfrm>
-            <a:off x="548640" y="1554480"/>
-            <a:ext cx="5486400" cy="4526280"/>
+            <a:off x="548640" y="1508760"/>
+            <a:ext cx="6949440" cy="804672"/>
           </a:xfrm>
           <a:prstGeom prst="roundRect">
             <a:avLst>
-              <a:gd name="adj" fmla="val 2424"/>
+              <a:gd name="adj" fmla="val 11364"/>
             </a:avLst>
           </a:prstGeom>
           <a:solidFill>
@@ -3122,14 +3122,284 @@
       </p:sp>
       <p:sp>
         <p:nvSpPr>
-          <p:cNvPr id="5" name="圆标-源"/>
+          <p:cNvPr id="5" name="圆标-1"/>
           <p:cNvSpPr/>
           <p:nvPr/>
         </p:nvSpPr>
         <p:spPr>
           <a:xfrm>
-            <a:off x="777240" y="1783080"/>
-            <a:ext cx="566928" cy="566928"/>
+            <a:off x="685800" y="1645920"/>
+            <a:ext cx="530352" cy="530352"/>
+          </a:xfrm>
+          <a:prstGeom prst="ellipse">
+            <a:avLst/>
+          </a:prstGeom>
+          <a:solidFill>
+            <a:schemeClr val="accent1"/>
+          </a:solidFill>
+          <a:ln w="12700">
+            <a:solidFill>
+              <a:schemeClr val="accent1"/>
+            </a:solidFill>
+            <a:prstDash val="solid"/>
+          </a:ln>
+        </p:spPr>
+      </p:sp>
+      <p:sp>
+        <p:nvSpPr>
+          <p:cNvPr id="6" name="Text 4"/>
+          <p:cNvSpPr txBox="1"/>
+          <p:nvPr/>
+        </p:nvSpPr>
+        <p:spPr>
+          <a:xfrm>
+            <a:off x="685800" y="1645920"/>
+            <a:ext cx="530352" cy="530352"/>
+          </a:xfrm>
+          <a:prstGeom prst="rect">
+            <a:avLst/>
+          </a:prstGeom>
+          <a:noFill/>
+          <a:ln/>
+        </p:spPr>
+        <p:txBody>
+          <a:bodyPr wrap="square" lIns="0" tIns="0" rIns="0" bIns="0" rtlCol="0" anchor="ctr"/>
+          <a:lstStyle/>
+          <a:p>
+            <a:pPr algn="ctr" indent="0" marL="0">
+              <a:buNone/>
+            </a:pPr>
+            <a:r>
+              <a:rPr lang="en-US" sz="1700" b="1" dirty="0">
+                <a:solidFill>
+                  <a:schemeClr val="bg1"/>
+                </a:solidFill>
+              </a:rPr>
+              <a:t>1</a:t>
+            </a:r>
+            <a:endParaRPr lang="en-US" sz="1700" dirty="0"/>
+          </a:p>
+        </p:txBody>
+      </p:sp>
+      <p:sp>
+        <p:nvSpPr>
+          <p:cNvPr id="7" name="Text 5"/>
+          <p:cNvSpPr txBox="1"/>
+          <p:nvPr/>
+        </p:nvSpPr>
+        <p:spPr>
+          <a:xfrm>
+            <a:off x="1371600" y="1563624"/>
+            <a:ext cx="5989320" cy="694944"/>
+          </a:xfrm>
+          <a:prstGeom prst="rect">
+            <a:avLst/>
+          </a:prstGeom>
+          <a:noFill/>
+          <a:ln/>
+        </p:spPr>
+        <p:txBody>
+          <a:bodyPr wrap="square" lIns="0" tIns="0" rIns="0" bIns="0" rtlCol="0" anchor="ctr"/>
+          <a:lstStyle/>
+          <a:p>
+            <a:pPr indent="0" marL="0">
+              <a:buNone/>
+            </a:pPr>
+            <a:r>
+              <a:rPr lang="en-US" sz="1350" b="1" dirty="0">
+                <a:solidFill>
+                  <a:schemeClr val="tx2"/>
+                </a:solidFill>
+              </a:rPr>
+              <a:t>输入守卫　</a:t>
+            </a:r>
+            <a:pPr indent="0" marL="0">
+              <a:buNone/>
+            </a:pPr>
+            <a:r>
+              <a:rPr lang="en-US" sz="1350" dirty="0">
+                <a:solidFill>
+                  <a:schemeClr val="tx1"/>
+                </a:solidFill>
+              </a:rPr>
+              <a:t>中英文注入与信息套取规则，命中不调用模型；10 分钟 3 次 → 会话只读</a:t>
+            </a:r>
+            <a:endParaRPr lang="en-US" sz="1350" dirty="0"/>
+          </a:p>
+        </p:txBody>
+      </p:sp>
+      <p:sp>
+        <p:nvSpPr>
+          <p:cNvPr id="8" name="防线2"/>
+          <p:cNvSpPr/>
+          <p:nvPr/>
+        </p:nvSpPr>
+        <p:spPr>
+          <a:xfrm>
+            <a:off x="749808" y="2441448"/>
+            <a:ext cx="6748272" cy="804672"/>
+          </a:xfrm>
+          <a:prstGeom prst="roundRect">
+            <a:avLst>
+              <a:gd name="adj" fmla="val 11364"/>
+            </a:avLst>
+          </a:prstGeom>
+          <a:solidFill>
+            <a:schemeClr val="bg2"/>
+          </a:solidFill>
+          <a:ln w="12700">
+            <a:solidFill>
+              <a:schemeClr val="bg2"/>
+            </a:solidFill>
+            <a:prstDash val="solid"/>
+          </a:ln>
+        </p:spPr>
+      </p:sp>
+      <p:sp>
+        <p:nvSpPr>
+          <p:cNvPr id="9" name="圆标-2"/>
+          <p:cNvSpPr/>
+          <p:nvPr/>
+        </p:nvSpPr>
+        <p:spPr>
+          <a:xfrm>
+            <a:off x="886968" y="2578608"/>
+            <a:ext cx="530352" cy="530352"/>
+          </a:xfrm>
+          <a:prstGeom prst="ellipse">
+            <a:avLst/>
+          </a:prstGeom>
+          <a:solidFill>
+            <a:schemeClr val="accent5"/>
+          </a:solidFill>
+          <a:ln w="12700">
+            <a:solidFill>
+              <a:schemeClr val="accent5"/>
+            </a:solidFill>
+            <a:prstDash val="solid"/>
+          </a:ln>
+        </p:spPr>
+      </p:sp>
+      <p:sp>
+        <p:nvSpPr>
+          <p:cNvPr id="10" name="Text 8"/>
+          <p:cNvSpPr txBox="1"/>
+          <p:nvPr/>
+        </p:nvSpPr>
+        <p:spPr>
+          <a:xfrm>
+            <a:off x="886968" y="2578608"/>
+            <a:ext cx="530352" cy="530352"/>
+          </a:xfrm>
+          <a:prstGeom prst="rect">
+            <a:avLst/>
+          </a:prstGeom>
+          <a:noFill/>
+          <a:ln/>
+        </p:spPr>
+        <p:txBody>
+          <a:bodyPr wrap="square" lIns="0" tIns="0" rIns="0" bIns="0" rtlCol="0" anchor="ctr"/>
+          <a:lstStyle/>
+          <a:p>
+            <a:pPr algn="ctr" indent="0" marL="0">
+              <a:buNone/>
+            </a:pPr>
+            <a:r>
+              <a:rPr lang="en-US" sz="1700" b="1" dirty="0">
+                <a:solidFill>
+                  <a:schemeClr val="bg1"/>
+                </a:solidFill>
+              </a:rPr>
+              <a:t>2</a:t>
+            </a:r>
+            <a:endParaRPr lang="en-US" sz="1700" dirty="0"/>
+          </a:p>
+        </p:txBody>
+      </p:sp>
+      <p:sp>
+        <p:nvSpPr>
+          <p:cNvPr id="11" name="Text 9"/>
+          <p:cNvSpPr txBox="1"/>
+          <p:nvPr/>
+        </p:nvSpPr>
+        <p:spPr>
+          <a:xfrm>
+            <a:off x="1572768" y="2496312"/>
+            <a:ext cx="5788152" cy="694944"/>
+          </a:xfrm>
+          <a:prstGeom prst="rect">
+            <a:avLst/>
+          </a:prstGeom>
+          <a:noFill/>
+          <a:ln/>
+        </p:spPr>
+        <p:txBody>
+          <a:bodyPr wrap="square" lIns="0" tIns="0" rIns="0" bIns="0" rtlCol="0" anchor="ctr"/>
+          <a:lstStyle/>
+          <a:p>
+            <a:pPr indent="0" marL="0">
+              <a:buNone/>
+            </a:pPr>
+            <a:r>
+              <a:rPr lang="en-US" sz="1350" b="1" dirty="0">
+                <a:solidFill>
+                  <a:schemeClr val="tx2"/>
+                </a:solidFill>
+              </a:rPr>
+              <a:t>外部文本隔离　</a:t>
+            </a:r>
+            <a:pPr indent="0" marL="0">
+              <a:buNone/>
+            </a:pPr>
+            <a:r>
+              <a:rPr lang="en-US" sz="1350" dirty="0">
+                <a:solidFill>
+                  <a:schemeClr val="tx1"/>
+                </a:solidFill>
+              </a:rPr>
+              <a:t>交易备注、商户名、产品说明包进 &lt;external_data&gt;，界面标“外部备注”</a:t>
+            </a:r>
+            <a:endParaRPr lang="en-US" sz="1350" dirty="0"/>
+          </a:p>
+        </p:txBody>
+      </p:sp>
+      <p:sp>
+        <p:nvSpPr>
+          <p:cNvPr id="12" name="防线3"/>
+          <p:cNvSpPr/>
+          <p:nvPr/>
+        </p:nvSpPr>
+        <p:spPr>
+          <a:xfrm>
+            <a:off x="950976" y="3374136"/>
+            <a:ext cx="6547104" cy="804672"/>
+          </a:xfrm>
+          <a:prstGeom prst="roundRect">
+            <a:avLst>
+              <a:gd name="adj" fmla="val 11364"/>
+            </a:avLst>
+          </a:prstGeom>
+          <a:solidFill>
+            <a:schemeClr val="bg2"/>
+          </a:solidFill>
+          <a:ln w="12700">
+            <a:solidFill>
+              <a:schemeClr val="bg2"/>
+            </a:solidFill>
+            <a:prstDash val="solid"/>
+          </a:ln>
+        </p:spPr>
+      </p:sp>
+      <p:sp>
+        <p:nvSpPr>
+          <p:cNvPr id="13" name="圆标-3"/>
+          <p:cNvSpPr/>
+          <p:nvPr/>
+        </p:nvSpPr>
+        <p:spPr>
+          <a:xfrm>
+            <a:off x="1088136" y="3511296"/>
+            <a:ext cx="530352" cy="530352"/>
           </a:xfrm>
           <a:prstGeom prst="ellipse">
             <a:avLst/>
@@ -3147,14 +3417,14 @@
       </p:sp>
       <p:sp>
         <p:nvSpPr>
-          <p:cNvPr id="6" name="Text 4"/>
+          <p:cNvPr id="14" name="Text 12"/>
           <p:cNvSpPr txBox="1"/>
           <p:nvPr/>
         </p:nvSpPr>
         <p:spPr>
           <a:xfrm>
-            <a:off x="777240" y="1783080"/>
-            <a:ext cx="566928" cy="566928"/>
+            <a:off x="1088136" y="3511296"/>
+            <a:ext cx="530352" cy="530352"/>
           </a:xfrm>
           <a:prstGeom prst="rect">
             <a:avLst/>
@@ -3175,7 +3445,7 @@
                   <a:schemeClr val="bg1"/>
                 </a:solidFill>
               </a:rPr>
-              <a:t>源</a:t>
+              <a:t>3</a:t>
             </a:r>
             <a:endParaRPr lang="en-US" sz="1700" dirty="0"/>
           </a:p>
@@ -3183,14 +3453,14 @@
       </p:sp>
       <p:sp>
         <p:nvSpPr>
-          <p:cNvPr id="7" name="Text 5"/>
+          <p:cNvPr id="15" name="Text 13"/>
           <p:cNvSpPr txBox="1"/>
           <p:nvPr/>
         </p:nvSpPr>
         <p:spPr>
           <a:xfrm>
-            <a:off x="1508760" y="1755648"/>
-            <a:ext cx="4343400" cy="457200"/>
+            <a:off x="1773936" y="3429000"/>
+            <a:ext cx="5586984" cy="694944"/>
           </a:xfrm>
           <a:prstGeom prst="rect">
             <a:avLst/>
@@ -3206,130 +3476,42 @@
               <a:buNone/>
             </a:pPr>
             <a:r>
-              <a:rPr lang="en-US" sz="1700" b="1" dirty="0">
+              <a:rPr lang="en-US" sz="1350" b="1" dirty="0">
                 <a:solidFill>
                   <a:schemeClr val="tx2"/>
                 </a:solidFill>
               </a:rPr>
-              <a:t>参数溯源（写操作之前）</a:t>
-            </a:r>
-            <a:endParaRPr lang="en-US" sz="1700" dirty="0"/>
-          </a:p>
-        </p:txBody>
-      </p:sp>
-      <p:sp>
-        <p:nvSpPr>
-          <p:cNvPr id="8" name="Text 6"/>
-          <p:cNvSpPr txBox="1"/>
-          <p:nvPr/>
-        </p:nvSpPr>
-        <p:spPr>
-          <a:xfrm>
-            <a:off x="777240" y="2450592"/>
-            <a:ext cx="5029200" cy="3474720"/>
-          </a:xfrm>
-          <a:prstGeom prst="rect">
-            <a:avLst/>
-          </a:prstGeom>
-          <a:noFill/>
-          <a:ln/>
-        </p:spPr>
-        <p:txBody>
-          <a:bodyPr wrap="square" lIns="0" tIns="0" rIns="0" bIns="0" rtlCol="0" anchor="t"/>
-          <a:lstStyle/>
-          <a:p>
-            <a:pPr indent="0" marL="0">
-              <a:spcAft>
-                <a:spcPts val="400"/>
-              </a:spcAft>
-              <a:buNone/>
-            </a:pPr>
-            <a:r>
-              <a:rPr lang="en-US" sz="1400" dirty="0">
+              <a:t>参数溯源　</a:t>
+            </a:r>
+            <a:pPr indent="0" marL="0">
+              <a:buNone/>
+            </a:pPr>
+            <a:r>
+              <a:rPr lang="en-US" sz="1350" dirty="0">
                 <a:solidFill>
                   <a:schemeClr val="tx1"/>
                 </a:solidFill>
               </a:rPr>
-              <a:t>金额：用户原话中的表达，代码解析“两百”“整五百”“1.5k”“一万二”</a:t>
-            </a:r>
-            <a:endParaRPr lang="en-US" sz="1400" dirty="0"/>
-          </a:p>
-          <a:p>
-            <a:pPr indent="0" marL="0">
-              <a:spcAft>
-                <a:spcPts val="400"/>
-              </a:spcAft>
-              <a:buNone/>
-            </a:pPr>
-            <a:r>
-              <a:rPr lang="en-US" sz="1400" dirty="0">
-                <a:solidFill>
-                  <a:schemeClr val="tx1"/>
-                </a:solidFill>
-              </a:rPr>
-              <a:t>收款人：原话里的姓名、称呼、手机号，或用户点选</a:t>
-            </a:r>
-            <a:endParaRPr lang="en-US" sz="1400" dirty="0"/>
-          </a:p>
-          <a:p>
-            <a:pPr indent="0" marL="0">
-              <a:spcAft>
-                <a:spcPts val="400"/>
-              </a:spcAft>
-              <a:buNone/>
-            </a:pPr>
-            <a:r>
-              <a:rPr lang="en-US" sz="1400" dirty="0">
-                <a:solidFill>
-                  <a:schemeClr val="tx1"/>
-                </a:solidFill>
-              </a:rPr>
-              <a:t>日期：由“明天”“下礼拜五”“月底”换算</a:t>
-            </a:r>
-            <a:endParaRPr lang="en-US" sz="1400" dirty="0"/>
-          </a:p>
-          <a:p>
-            <a:pPr indent="0" marL="0">
-              <a:spcAft>
-                <a:spcPts val="400"/>
-              </a:spcAft>
-              <a:buNone/>
-            </a:pPr>
-            <a:endParaRPr lang="en-US" sz="1400" dirty="0"/>
-          </a:p>
-          <a:p>
-            <a:pPr indent="0" marL="0">
-              <a:spcAft>
-                <a:spcPts val="400"/>
-              </a:spcAft>
-              <a:buNone/>
-            </a:pPr>
-            <a:r>
-              <a:rPr lang="en-US" sz="1400" dirty="0">
-                <a:solidFill>
-                  <a:schemeClr val="tx1"/>
-                </a:solidFill>
-              </a:rPr>
-              <a:t>工具结果、交易备注、产品说明、模型推测都不能成为新资金动作的来源；不通过就追问，不出单。</a:t>
-            </a:r>
-            <a:endParaRPr lang="en-US" sz="1400" dirty="0"/>
-          </a:p>
-        </p:txBody>
-      </p:sp>
-      <p:sp>
-        <p:nvSpPr>
-          <p:cNvPr id="9" name="卡片-事实校验（回复之后）"/>
+              <a:t>金额、收款人、日期必须来自用户原话；备注里的号码无效</a:t>
+            </a:r>
+            <a:endParaRPr lang="en-US" sz="1350" dirty="0"/>
+          </a:p>
+        </p:txBody>
+      </p:sp>
+      <p:sp>
+        <p:nvSpPr>
+          <p:cNvPr id="16" name="防线4"/>
           <p:cNvSpPr/>
           <p:nvPr/>
         </p:nvSpPr>
         <p:spPr>
           <a:xfrm>
-            <a:off x="6263640" y="1554480"/>
-            <a:ext cx="5394960" cy="4526280"/>
+            <a:off x="1152144" y="4306824"/>
+            <a:ext cx="6345936" cy="804672"/>
           </a:xfrm>
           <a:prstGeom prst="roundRect">
             <a:avLst>
-              <a:gd name="adj" fmla="val 2424"/>
+              <a:gd name="adj" fmla="val 11364"/>
             </a:avLst>
           </a:prstGeom>
           <a:solidFill>
@@ -3345,24 +3527,24 @@
       </p:sp>
       <p:sp>
         <p:nvSpPr>
-          <p:cNvPr id="10" name="圆标-核"/>
+          <p:cNvPr id="17" name="圆标-4"/>
           <p:cNvSpPr/>
           <p:nvPr/>
         </p:nvSpPr>
         <p:spPr>
           <a:xfrm>
-            <a:off x="6492240" y="1783080"/>
-            <a:ext cx="566928" cy="566928"/>
+            <a:off x="1289304" y="4443984"/>
+            <a:ext cx="530352" cy="530352"/>
           </a:xfrm>
           <a:prstGeom prst="ellipse">
             <a:avLst/>
           </a:prstGeom>
           <a:solidFill>
-            <a:schemeClr val="accent1"/>
+            <a:schemeClr val="accent3"/>
           </a:solidFill>
           <a:ln w="12700">
             <a:solidFill>
-              <a:schemeClr val="accent1"/>
+              <a:schemeClr val="accent3"/>
             </a:solidFill>
             <a:prstDash val="solid"/>
           </a:ln>
@@ -3370,14 +3552,14 @@
       </p:sp>
       <p:sp>
         <p:nvSpPr>
-          <p:cNvPr id="11" name="Text 9"/>
+          <p:cNvPr id="18" name="Text 16"/>
           <p:cNvSpPr txBox="1"/>
           <p:nvPr/>
         </p:nvSpPr>
         <p:spPr>
           <a:xfrm>
-            <a:off x="6492240" y="1783080"/>
-            <a:ext cx="566928" cy="566928"/>
+            <a:off x="1289304" y="4443984"/>
+            <a:ext cx="530352" cy="530352"/>
           </a:xfrm>
           <a:prstGeom prst="rect">
             <a:avLst/>
@@ -3398,7 +3580,7 @@
                   <a:schemeClr val="bg1"/>
                 </a:solidFill>
               </a:rPr>
-              <a:t>核</a:t>
+              <a:t>4</a:t>
             </a:r>
             <a:endParaRPr lang="en-US" sz="1700" dirty="0"/>
           </a:p>
@@ -3406,14 +3588,14 @@
       </p:sp>
       <p:sp>
         <p:nvSpPr>
-          <p:cNvPr id="12" name="Text 10"/>
+          <p:cNvPr id="19" name="Text 17"/>
           <p:cNvSpPr txBox="1"/>
           <p:nvPr/>
         </p:nvSpPr>
         <p:spPr>
           <a:xfrm>
-            <a:off x="7223760" y="1755648"/>
-            <a:ext cx="4251960" cy="457200"/>
+            <a:off x="1975104" y="4361688"/>
+            <a:ext cx="5385816" cy="694944"/>
           </a:xfrm>
           <a:prstGeom prst="rect">
             <a:avLst/>
@@ -3429,27 +3611,90 @@
               <a:buNone/>
             </a:pPr>
             <a:r>
-              <a:rPr lang="en-US" sz="1700" b="1" dirty="0">
+              <a:rPr lang="en-US" sz="1350" b="1" dirty="0">
                 <a:solidFill>
                   <a:schemeClr val="tx2"/>
                 </a:solidFill>
               </a:rPr>
-              <a:t>事实校验（回复之后）</a:t>
-            </a:r>
-            <a:endParaRPr lang="en-US" sz="1700" dirty="0"/>
-          </a:p>
-        </p:txBody>
-      </p:sp>
-      <p:sp>
-        <p:nvSpPr>
-          <p:cNvPr id="13" name="Text 11"/>
+              <a:t>代码判档 + 工具白名单　</a:t>
+            </a:r>
+            <a:pPr indent="0" marL="0">
+              <a:buNone/>
+            </a:pPr>
+            <a:r>
+              <a:rPr lang="en-US" sz="1350" dirty="0">
+                <a:solidFill>
+                  <a:schemeClr val="tx1"/>
+                </a:solidFill>
+              </a:rPr>
+              <a:t>模型无法自降档位、无法调用未登记的工具</a:t>
+            </a:r>
+            <a:endParaRPr lang="en-US" sz="1350" dirty="0"/>
+          </a:p>
+        </p:txBody>
+      </p:sp>
+      <p:sp>
+        <p:nvSpPr>
+          <p:cNvPr id="20" name="防线5"/>
+          <p:cNvSpPr/>
+          <p:nvPr/>
+        </p:nvSpPr>
+        <p:spPr>
+          <a:xfrm>
+            <a:off x="1353312" y="5239512"/>
+            <a:ext cx="6144768" cy="804672"/>
+          </a:xfrm>
+          <a:prstGeom prst="roundRect">
+            <a:avLst>
+              <a:gd name="adj" fmla="val 11364"/>
+            </a:avLst>
+          </a:prstGeom>
+          <a:solidFill>
+            <a:schemeClr val="bg2"/>
+          </a:solidFill>
+          <a:ln w="12700">
+            <a:solidFill>
+              <a:schemeClr val="bg2"/>
+            </a:solidFill>
+            <a:prstDash val="solid"/>
+          </a:ln>
+        </p:spPr>
+      </p:sp>
+      <p:sp>
+        <p:nvSpPr>
+          <p:cNvPr id="21" name="圆标-5"/>
+          <p:cNvSpPr/>
+          <p:nvPr/>
+        </p:nvSpPr>
+        <p:spPr>
+          <a:xfrm>
+            <a:off x="1490472" y="5376672"/>
+            <a:ext cx="530352" cy="530352"/>
+          </a:xfrm>
+          <a:prstGeom prst="ellipse">
+            <a:avLst/>
+          </a:prstGeom>
+          <a:solidFill>
+            <a:schemeClr val="accent4"/>
+          </a:solidFill>
+          <a:ln w="12700">
+            <a:solidFill>
+              <a:schemeClr val="accent4"/>
+            </a:solidFill>
+            <a:prstDash val="solid"/>
+          </a:ln>
+        </p:spPr>
+      </p:sp>
+      <p:sp>
+        <p:nvSpPr>
+          <p:cNvPr id="22" name="Text 20"/>
           <p:cNvSpPr txBox="1"/>
           <p:nvPr/>
         </p:nvSpPr>
         <p:spPr>
           <a:xfrm>
-            <a:off x="6492240" y="2450592"/>
-            <a:ext cx="4937760" cy="3474720"/>
+            <a:off x="1490472" y="5376672"/>
+            <a:ext cx="530352" cy="530352"/>
           </a:xfrm>
           <a:prstGeom prst="rect">
             <a:avLst/>
@@ -3458,79 +3703,102 @@
           <a:ln/>
         </p:spPr>
         <p:txBody>
-          <a:bodyPr wrap="square" lIns="0" tIns="0" rIns="0" bIns="0" rtlCol="0" anchor="t"/>
-          <a:lstStyle/>
-          <a:p>
-            <a:pPr indent="0" marL="0">
-              <a:spcAft>
-                <a:spcPts val="400"/>
-              </a:spcAft>
-              <a:buNone/>
-            </a:pPr>
-            <a:r>
-              <a:rPr lang="en-US" sz="1400" dirty="0">
+          <a:bodyPr wrap="square" lIns="0" tIns="0" rIns="0" bIns="0" rtlCol="0" anchor="ctr"/>
+          <a:lstStyle/>
+          <a:p>
+            <a:pPr algn="ctr" indent="0" marL="0">
+              <a:buNone/>
+            </a:pPr>
+            <a:r>
+              <a:rPr lang="en-US" sz="1700" b="1" dirty="0">
+                <a:solidFill>
+                  <a:schemeClr val="bg1"/>
+                </a:solidFill>
+              </a:rPr>
+              <a:t>5</a:t>
+            </a:r>
+            <a:endParaRPr lang="en-US" sz="1700" dirty="0"/>
+          </a:p>
+        </p:txBody>
+      </p:sp>
+      <p:sp>
+        <p:nvSpPr>
+          <p:cNvPr id="23" name="Text 21"/>
+          <p:cNvSpPr txBox="1"/>
+          <p:nvPr/>
+        </p:nvSpPr>
+        <p:spPr>
+          <a:xfrm>
+            <a:off x="2176272" y="5294376"/>
+            <a:ext cx="5184648" cy="694944"/>
+          </a:xfrm>
+          <a:prstGeom prst="rect">
+            <a:avLst/>
+          </a:prstGeom>
+          <a:noFill/>
+          <a:ln/>
+        </p:spPr>
+        <p:txBody>
+          <a:bodyPr wrap="square" lIns="0" tIns="0" rIns="0" bIns="0" rtlCol="0" anchor="ctr"/>
+          <a:lstStyle/>
+          <a:p>
+            <a:pPr indent="0" marL="0">
+              <a:buNone/>
+            </a:pPr>
+            <a:r>
+              <a:rPr lang="en-US" sz="1350" b="1" dirty="0">
+                <a:solidFill>
+                  <a:schemeClr val="tx2"/>
+                </a:solidFill>
+              </a:rPr>
+              <a:t>代码渲染确认单　</a:t>
+            </a:r>
+            <a:pPr indent="0" marL="0">
+              <a:buNone/>
+            </a:pPr>
+            <a:r>
+              <a:rPr lang="en-US" sz="1350" dirty="0">
                 <a:solidFill>
                   <a:schemeClr val="tx1"/>
                 </a:solidFill>
               </a:rPr>
-              <a:t>回复里的金额、百分比、日期、笔数逐一和本轮工具结果比对（允许换算、取整、两数之和或差）。</a:t>
-            </a:r>
-            <a:endParaRPr lang="en-US" sz="1400" dirty="0"/>
-          </a:p>
-          <a:p>
-            <a:pPr indent="0" marL="0">
-              <a:spcAft>
-                <a:spcPts val="400"/>
-              </a:spcAft>
-              <a:buNone/>
-            </a:pPr>
-            <a:endParaRPr lang="en-US" sz="1400" dirty="0"/>
-          </a:p>
-          <a:p>
-            <a:pPr indent="0" marL="0">
-              <a:spcAft>
-                <a:spcPts val="400"/>
-              </a:spcAft>
-              <a:buNone/>
-            </a:pPr>
-            <a:r>
-              <a:rPr lang="en-US" sz="1400" dirty="0">
-                <a:solidFill>
-                  <a:schemeClr val="tx1"/>
-                </a:solidFill>
-              </a:rPr>
-              <a:t>对不上就用代码模板根据卡片重写，并记入审计；没有成功回执时禁止“已转账 / 已完成”。</a:t>
-            </a:r>
-            <a:endParaRPr lang="en-US" sz="1400" dirty="0"/>
-          </a:p>
-          <a:p>
-            <a:pPr indent="0" marL="0">
-              <a:spcAft>
-                <a:spcPts val="400"/>
-              </a:spcAft>
-              <a:buNone/>
-            </a:pPr>
-            <a:endParaRPr lang="en-US" sz="1400" dirty="0"/>
-          </a:p>
-          <a:p>
-            <a:pPr indent="0" marL="0">
-              <a:spcAft>
-                <a:spcPts val="400"/>
-              </a:spcAft>
-              <a:buNone/>
-            </a:pPr>
-            <a:r>
-              <a:rPr lang="en-US" sz="1400" dirty="0">
-                <a:solidFill>
-                  <a:schemeClr val="tx1"/>
-                </a:solidFill>
-              </a:rPr>
-              <a:t>所有卡片内容由代码根据账本生成。</a:t>
-            </a:r>
-            <a:endParaRPr lang="en-US" sz="1400" dirty="0"/>
-          </a:p>
-        </p:txBody>
-      </p:sp>
+              <a:t>用户看到的收款人和金额由代码生成，模型改不了</a:t>
+            </a:r>
+            <a:endParaRPr lang="en-US" sz="1350" dirty="0"/>
+          </a:p>
+        </p:txBody>
+      </p:sp>
+      <p:pic>
+        <p:nvPicPr>
+          <p:cNvPr id="24" name="Image 0" descr="界面截图：07-indirect-injection.png">    </p:cNvPr>
+          <p:cNvPicPr>
+            <a:picLocks noChangeAspect="1"/>
+          </p:cNvPicPr>
+          <p:nvPr/>
+        </p:nvPicPr>
+        <p:blipFill>
+          <a:blip r:embed="rId1"/>
+          <a:stretch>
+            <a:fillRect/>
+          </a:stretch>
+        </p:blipFill>
+        <p:spPr>
+          <a:xfrm>
+            <a:off x="8595360" y="1417320"/>
+            <a:ext cx="2239413" cy="4846320"/>
+          </a:xfrm>
+          <a:prstGeom prst="rect">
+            <a:avLst/>
+          </a:prstGeom>
+          <a:effectLst>
+            <a:outerShdw sx="100000" sy="100000" kx="0" ky="0" algn="bl" rotWithShape="0" blurRad="101600" dist="38100" dir="5400000">
+              <a:srgbClr val="000000">
+                <a:alpha val="25000"/>
+              </a:srgbClr>
+            </a:outerShdw>
+          </a:effectLst>
+        </p:spPr>
+      </p:pic>
       <p:sp>
         <p:nvSpPr>
           <p:cNvPr id="25" name="Slide Number Placeholder 0"/>
@@ -3631,7 +3899,7 @@
                   <a:schemeClr val="tx2"/>
                 </a:solidFill>
               </a:rPr>
-              <a:t>沙箱：AI 生成的分析代码在受限环境运行</a:t>
+              <a:t>防幻觉与沙箱：数字只来自账本，代码只在笼子里跑</a:t>
             </a:r>
             <a:endParaRPr lang="en-US" sz="3000" dirty="0"/>
           </a:p>
@@ -3667,57 +3935,26 @@
                   <a:schemeClr val="accent6"/>
                 </a:solidFill>
               </a:rPr>
-              <a:t>固定报表回答不了的长尾问题，让模型写代码，但只在沙箱里跑</a:t>
+              <a:t>参数溯源（写操作之前）· 事实校验（回复之后）· 沙箱（模型写的分析代码）</a:t>
             </a:r>
             <a:endParaRPr lang="en-US" sz="1500" dirty="0"/>
           </a:p>
         </p:txBody>
       </p:sp>
-      <p:pic>
-        <p:nvPicPr>
-          <p:cNvPr id="4" name="Image 0" descr="界面截图：14-sandbox.png">    </p:cNvPr>
-          <p:cNvPicPr>
-            <a:picLocks noChangeAspect="1"/>
-          </p:cNvPicPr>
-          <p:nvPr/>
-        </p:nvPicPr>
-        <p:blipFill>
-          <a:blip r:embed="rId1"/>
-          <a:stretch>
-            <a:fillRect/>
-          </a:stretch>
-        </p:blipFill>
-        <p:spPr>
-          <a:xfrm>
-            <a:off x="548640" y="1417320"/>
-            <a:ext cx="2239413" cy="4846320"/>
-          </a:xfrm>
-          <a:prstGeom prst="rect">
-            <a:avLst/>
-          </a:prstGeom>
-          <a:effectLst>
-            <a:outerShdw sx="100000" sy="100000" kx="0" ky="0" algn="bl" rotWithShape="0" blurRad="101600" dist="38100" dir="5400000">
-              <a:srgbClr val="000000">
-                <a:alpha val="25000"/>
-              </a:srgbClr>
-            </a:outerShdw>
-          </a:effectLst>
-        </p:spPr>
-      </p:pic>
-      <p:sp>
-        <p:nvSpPr>
-          <p:cNvPr id="5" name="沙箱-运行前检查"/>
+      <p:sp>
+        <p:nvSpPr>
+          <p:cNvPr id="4" name="卡片-参数溯源"/>
           <p:cNvSpPr/>
           <p:nvPr/>
         </p:nvSpPr>
         <p:spPr>
           <a:xfrm>
-            <a:off x="3246120" y="1463040"/>
-            <a:ext cx="8412480" cy="1051560"/>
+            <a:off x="548640" y="1554480"/>
+            <a:ext cx="3611880" cy="4526280"/>
           </a:xfrm>
           <a:prstGeom prst="roundRect">
             <a:avLst>
-              <a:gd name="adj" fmla="val 10435"/>
+              <a:gd name="adj" fmla="val 3038"/>
             </a:avLst>
           </a:prstGeom>
           <a:solidFill>
@@ -3733,13 +3970,391 @@
       </p:sp>
       <p:sp>
         <p:nvSpPr>
-          <p:cNvPr id="6" name="圆标-1"/>
+          <p:cNvPr id="5" name="圆标-源"/>
           <p:cNvSpPr/>
           <p:nvPr/>
         </p:nvSpPr>
         <p:spPr>
           <a:xfrm>
-            <a:off x="3474720" y="1700784"/>
+            <a:off x="777240" y="1783080"/>
+            <a:ext cx="566928" cy="566928"/>
+          </a:xfrm>
+          <a:prstGeom prst="ellipse">
+            <a:avLst/>
+          </a:prstGeom>
+          <a:solidFill>
+            <a:schemeClr val="accent2"/>
+          </a:solidFill>
+          <a:ln w="12700">
+            <a:solidFill>
+              <a:schemeClr val="accent2"/>
+            </a:solidFill>
+            <a:prstDash val="solid"/>
+          </a:ln>
+        </p:spPr>
+      </p:sp>
+      <p:sp>
+        <p:nvSpPr>
+          <p:cNvPr id="6" name="Text 4"/>
+          <p:cNvSpPr txBox="1"/>
+          <p:nvPr/>
+        </p:nvSpPr>
+        <p:spPr>
+          <a:xfrm>
+            <a:off x="777240" y="1783080"/>
+            <a:ext cx="566928" cy="566928"/>
+          </a:xfrm>
+          <a:prstGeom prst="rect">
+            <a:avLst/>
+          </a:prstGeom>
+          <a:noFill/>
+          <a:ln/>
+        </p:spPr>
+        <p:txBody>
+          <a:bodyPr wrap="square" lIns="0" tIns="0" rIns="0" bIns="0" rtlCol="0" anchor="ctr"/>
+          <a:lstStyle/>
+          <a:p>
+            <a:pPr algn="ctr" indent="0" marL="0">
+              <a:buNone/>
+            </a:pPr>
+            <a:r>
+              <a:rPr lang="en-US" sz="1700" b="1" dirty="0">
+                <a:solidFill>
+                  <a:schemeClr val="bg1"/>
+                </a:solidFill>
+              </a:rPr>
+              <a:t>源</a:t>
+            </a:r>
+            <a:endParaRPr lang="en-US" sz="1700" dirty="0"/>
+          </a:p>
+        </p:txBody>
+      </p:sp>
+      <p:sp>
+        <p:nvSpPr>
+          <p:cNvPr id="7" name="Text 5"/>
+          <p:cNvSpPr txBox="1"/>
+          <p:nvPr/>
+        </p:nvSpPr>
+        <p:spPr>
+          <a:xfrm>
+            <a:off x="1508760" y="1755648"/>
+            <a:ext cx="2468880" cy="457200"/>
+          </a:xfrm>
+          <a:prstGeom prst="rect">
+            <a:avLst/>
+          </a:prstGeom>
+          <a:noFill/>
+          <a:ln/>
+        </p:spPr>
+        <p:txBody>
+          <a:bodyPr wrap="square" lIns="0" tIns="0" rIns="0" bIns="0" rtlCol="0" anchor="ctr"/>
+          <a:lstStyle/>
+          <a:p>
+            <a:pPr indent="0" marL="0">
+              <a:buNone/>
+            </a:pPr>
+            <a:r>
+              <a:rPr lang="en-US" sz="1700" b="1" dirty="0">
+                <a:solidFill>
+                  <a:schemeClr val="tx2"/>
+                </a:solidFill>
+              </a:rPr>
+              <a:t>参数溯源</a:t>
+            </a:r>
+            <a:endParaRPr lang="en-US" sz="1700" dirty="0"/>
+          </a:p>
+        </p:txBody>
+      </p:sp>
+      <p:sp>
+        <p:nvSpPr>
+          <p:cNvPr id="8" name="Text 6"/>
+          <p:cNvSpPr txBox="1"/>
+          <p:nvPr/>
+        </p:nvSpPr>
+        <p:spPr>
+          <a:xfrm>
+            <a:off x="777240" y="2450592"/>
+            <a:ext cx="3154680" cy="3474720"/>
+          </a:xfrm>
+          <a:prstGeom prst="rect">
+            <a:avLst/>
+          </a:prstGeom>
+          <a:noFill/>
+          <a:ln/>
+        </p:spPr>
+        <p:txBody>
+          <a:bodyPr wrap="square" lIns="0" tIns="0" rIns="0" bIns="0" rtlCol="0" anchor="t"/>
+          <a:lstStyle/>
+          <a:p>
+            <a:pPr indent="0" marL="0">
+              <a:spcAft>
+                <a:spcPts val="400"/>
+              </a:spcAft>
+              <a:buNone/>
+            </a:pPr>
+            <a:r>
+              <a:rPr lang="en-US" sz="1400" dirty="0">
+                <a:solidFill>
+                  <a:schemeClr val="tx1"/>
+                </a:solidFill>
+              </a:rPr>
+              <a:t>金额、收款人、日期必须来自用户原话（代码解析“两百”“整五百”“下礼拜五”）</a:t>
+            </a:r>
+            <a:endParaRPr lang="en-US" sz="1400" dirty="0"/>
+          </a:p>
+          <a:p>
+            <a:pPr indent="0" marL="0">
+              <a:spcAft>
+                <a:spcPts val="400"/>
+              </a:spcAft>
+              <a:buNone/>
+            </a:pPr>
+            <a:endParaRPr lang="en-US" sz="1400" dirty="0"/>
+          </a:p>
+          <a:p>
+            <a:pPr indent="0" marL="0">
+              <a:spcAft>
+                <a:spcPts val="400"/>
+              </a:spcAft>
+              <a:buNone/>
+            </a:pPr>
+            <a:r>
+              <a:rPr lang="en-US" sz="1400" dirty="0">
+                <a:solidFill>
+                  <a:schemeClr val="tx1"/>
+                </a:solidFill>
+              </a:rPr>
+              <a:t>交易备注、产品说明、模型推测都不算；不通过就追问，不出单</a:t>
+            </a:r>
+            <a:endParaRPr lang="en-US" sz="1400" dirty="0"/>
+          </a:p>
+        </p:txBody>
+      </p:sp>
+      <p:sp>
+        <p:nvSpPr>
+          <p:cNvPr id="9" name="卡片-事实校验"/>
+          <p:cNvSpPr/>
+          <p:nvPr/>
+        </p:nvSpPr>
+        <p:spPr>
+          <a:xfrm>
+            <a:off x="4297680" y="1554480"/>
+            <a:ext cx="3611880" cy="4526280"/>
+          </a:xfrm>
+          <a:prstGeom prst="roundRect">
+            <a:avLst>
+              <a:gd name="adj" fmla="val 3038"/>
+            </a:avLst>
+          </a:prstGeom>
+          <a:solidFill>
+            <a:schemeClr val="bg2"/>
+          </a:solidFill>
+          <a:ln w="12700">
+            <a:solidFill>
+              <a:schemeClr val="bg2"/>
+            </a:solidFill>
+            <a:prstDash val="solid"/>
+          </a:ln>
+        </p:spPr>
+      </p:sp>
+      <p:sp>
+        <p:nvSpPr>
+          <p:cNvPr id="10" name="圆标-核"/>
+          <p:cNvSpPr/>
+          <p:nvPr/>
+        </p:nvSpPr>
+        <p:spPr>
+          <a:xfrm>
+            <a:off x="4526280" y="1783080"/>
+            <a:ext cx="566928" cy="566928"/>
+          </a:xfrm>
+          <a:prstGeom prst="ellipse">
+            <a:avLst/>
+          </a:prstGeom>
+          <a:solidFill>
+            <a:schemeClr val="accent1"/>
+          </a:solidFill>
+          <a:ln w="12700">
+            <a:solidFill>
+              <a:schemeClr val="accent1"/>
+            </a:solidFill>
+            <a:prstDash val="solid"/>
+          </a:ln>
+        </p:spPr>
+      </p:sp>
+      <p:sp>
+        <p:nvSpPr>
+          <p:cNvPr id="11" name="Text 9"/>
+          <p:cNvSpPr txBox="1"/>
+          <p:nvPr/>
+        </p:nvSpPr>
+        <p:spPr>
+          <a:xfrm>
+            <a:off x="4526280" y="1783080"/>
+            <a:ext cx="566928" cy="566928"/>
+          </a:xfrm>
+          <a:prstGeom prst="rect">
+            <a:avLst/>
+          </a:prstGeom>
+          <a:noFill/>
+          <a:ln/>
+        </p:spPr>
+        <p:txBody>
+          <a:bodyPr wrap="square" lIns="0" tIns="0" rIns="0" bIns="0" rtlCol="0" anchor="ctr"/>
+          <a:lstStyle/>
+          <a:p>
+            <a:pPr algn="ctr" indent="0" marL="0">
+              <a:buNone/>
+            </a:pPr>
+            <a:r>
+              <a:rPr lang="en-US" sz="1700" b="1" dirty="0">
+                <a:solidFill>
+                  <a:schemeClr val="bg1"/>
+                </a:solidFill>
+              </a:rPr>
+              <a:t>核</a:t>
+            </a:r>
+            <a:endParaRPr lang="en-US" sz="1700" dirty="0"/>
+          </a:p>
+        </p:txBody>
+      </p:sp>
+      <p:sp>
+        <p:nvSpPr>
+          <p:cNvPr id="12" name="Text 10"/>
+          <p:cNvSpPr txBox="1"/>
+          <p:nvPr/>
+        </p:nvSpPr>
+        <p:spPr>
+          <a:xfrm>
+            <a:off x="5257800" y="1755648"/>
+            <a:ext cx="2468880" cy="457200"/>
+          </a:xfrm>
+          <a:prstGeom prst="rect">
+            <a:avLst/>
+          </a:prstGeom>
+          <a:noFill/>
+          <a:ln/>
+        </p:spPr>
+        <p:txBody>
+          <a:bodyPr wrap="square" lIns="0" tIns="0" rIns="0" bIns="0" rtlCol="0" anchor="ctr"/>
+          <a:lstStyle/>
+          <a:p>
+            <a:pPr indent="0" marL="0">
+              <a:buNone/>
+            </a:pPr>
+            <a:r>
+              <a:rPr lang="en-US" sz="1700" b="1" dirty="0">
+                <a:solidFill>
+                  <a:schemeClr val="tx2"/>
+                </a:solidFill>
+              </a:rPr>
+              <a:t>事实校验</a:t>
+            </a:r>
+            <a:endParaRPr lang="en-US" sz="1700" dirty="0"/>
+          </a:p>
+        </p:txBody>
+      </p:sp>
+      <p:sp>
+        <p:nvSpPr>
+          <p:cNvPr id="13" name="Text 11"/>
+          <p:cNvSpPr txBox="1"/>
+          <p:nvPr/>
+        </p:nvSpPr>
+        <p:spPr>
+          <a:xfrm>
+            <a:off x="4526280" y="2450592"/>
+            <a:ext cx="3154680" cy="3474720"/>
+          </a:xfrm>
+          <a:prstGeom prst="rect">
+            <a:avLst/>
+          </a:prstGeom>
+          <a:noFill/>
+          <a:ln/>
+        </p:spPr>
+        <p:txBody>
+          <a:bodyPr wrap="square" lIns="0" tIns="0" rIns="0" bIns="0" rtlCol="0" anchor="t"/>
+          <a:lstStyle/>
+          <a:p>
+            <a:pPr indent="0" marL="0">
+              <a:spcAft>
+                <a:spcPts val="400"/>
+              </a:spcAft>
+              <a:buNone/>
+            </a:pPr>
+            <a:r>
+              <a:rPr lang="en-US" sz="1400" dirty="0">
+                <a:solidFill>
+                  <a:schemeClr val="tx1"/>
+                </a:solidFill>
+              </a:rPr>
+              <a:t>回复里的金额、日期、笔数逐一和本轮工具结果比对</a:t>
+            </a:r>
+            <a:endParaRPr lang="en-US" sz="1400" dirty="0"/>
+          </a:p>
+          <a:p>
+            <a:pPr indent="0" marL="0">
+              <a:spcAft>
+                <a:spcPts val="400"/>
+              </a:spcAft>
+              <a:buNone/>
+            </a:pPr>
+            <a:endParaRPr lang="en-US" sz="1400" dirty="0"/>
+          </a:p>
+          <a:p>
+            <a:pPr indent="0" marL="0">
+              <a:spcAft>
+                <a:spcPts val="400"/>
+              </a:spcAft>
+              <a:buNone/>
+            </a:pPr>
+            <a:r>
+              <a:rPr lang="en-US" sz="1400" dirty="0">
+                <a:solidFill>
+                  <a:schemeClr val="tx1"/>
+                </a:solidFill>
+              </a:rPr>
+              <a:t>对不上就用代码模板重写并记入审计；没有回执不许说“已完成”</a:t>
+            </a:r>
+            <a:endParaRPr lang="en-US" sz="1400" dirty="0"/>
+          </a:p>
+        </p:txBody>
+      </p:sp>
+      <p:sp>
+        <p:nvSpPr>
+          <p:cNvPr id="14" name="卡片-沙箱分析"/>
+          <p:cNvSpPr/>
+          <p:nvPr/>
+        </p:nvSpPr>
+        <p:spPr>
+          <a:xfrm>
+            <a:off x="8046720" y="1554480"/>
+            <a:ext cx="3611880" cy="4526280"/>
+          </a:xfrm>
+          <a:prstGeom prst="roundRect">
+            <a:avLst>
+              <a:gd name="adj" fmla="val 3038"/>
+            </a:avLst>
+          </a:prstGeom>
+          <a:solidFill>
+            <a:schemeClr val="bg2"/>
+          </a:solidFill>
+          <a:ln w="12700">
+            <a:solidFill>
+              <a:schemeClr val="bg2"/>
+            </a:solidFill>
+            <a:prstDash val="solid"/>
+          </a:ln>
+        </p:spPr>
+      </p:sp>
+      <p:sp>
+        <p:nvSpPr>
+          <p:cNvPr id="15" name="圆标-笼"/>
+          <p:cNvSpPr/>
+          <p:nvPr/>
+        </p:nvSpPr>
+        <p:spPr>
+          <a:xfrm>
+            <a:off x="8275320" y="1783080"/>
             <a:ext cx="566928" cy="566928"/>
           </a:xfrm>
           <a:prstGeom prst="ellipse">
@@ -3758,13 +4373,13 @@
       </p:sp>
       <p:sp>
         <p:nvSpPr>
-          <p:cNvPr id="7" name="Text 4"/>
+          <p:cNvPr id="16" name="Text 14"/>
           <p:cNvSpPr txBox="1"/>
           <p:nvPr/>
         </p:nvSpPr>
         <p:spPr>
           <a:xfrm>
-            <a:off x="3474720" y="1700784"/>
+            <a:off x="8275320" y="1783080"/>
             <a:ext cx="566928" cy="566928"/>
           </a:xfrm>
           <a:prstGeom prst="rect">
@@ -3786,7 +4401,7 @@
                   <a:schemeClr val="bg1"/>
                 </a:solidFill>
               </a:rPr>
-              <a:t>1</a:t>
+              <a:t>笼</a:t>
             </a:r>
             <a:endParaRPr lang="en-US" sz="1700" dirty="0"/>
           </a:p>
@@ -3794,14 +4409,14 @@
       </p:sp>
       <p:sp>
         <p:nvSpPr>
-          <p:cNvPr id="8" name="Text 5"/>
+          <p:cNvPr id="17" name="Text 15"/>
           <p:cNvSpPr txBox="1"/>
           <p:nvPr/>
         </p:nvSpPr>
         <p:spPr>
           <a:xfrm>
-            <a:off x="4206240" y="1554480"/>
-            <a:ext cx="1371600" cy="868680"/>
+            <a:off x="9006840" y="1755648"/>
+            <a:ext cx="2468880" cy="457200"/>
           </a:xfrm>
           <a:prstGeom prst="rect">
             <a:avLst/>
@@ -3822,7 +4437,7 @@
                   <a:schemeClr val="tx2"/>
                 </a:solidFill>
               </a:rPr>
-              <a:t>运行前检查</a:t>
+              <a:t>沙箱分析</a:t>
             </a:r>
             <a:endParaRPr lang="en-US" sz="1700" dirty="0"/>
           </a:p>
@@ -3830,14 +4445,14 @@
       </p:sp>
       <p:sp>
         <p:nvSpPr>
-          <p:cNvPr id="9" name="Text 6"/>
+          <p:cNvPr id="18" name="Text 16"/>
           <p:cNvSpPr txBox="1"/>
           <p:nvPr/>
         </p:nvSpPr>
         <p:spPr>
           <a:xfrm>
-            <a:off x="5669280" y="1554480"/>
-            <a:ext cx="5852160" cy="868680"/>
+            <a:off x="8275320" y="2450592"/>
+            <a:ext cx="3154680" cy="3474720"/>
           </a:xfrm>
           <a:prstGeom prst="rect">
             <a:avLst/>
@@ -3846,501 +4461,76 @@
           <a:ln/>
         </p:spPr>
         <p:txBody>
-          <a:bodyPr wrap="square" lIns="0" tIns="0" rIns="0" bIns="0" rtlCol="0" anchor="ctr"/>
-          <a:lstStyle/>
-          <a:p>
-            <a:pPr indent="0" marL="0">
-              <a:buNone/>
-            </a:pPr>
-            <a:r>
-              <a:rPr lang="en-US" sz="1350" dirty="0">
+          <a:bodyPr wrap="square" lIns="0" tIns="0" rIns="0" bIns="0" rtlCol="0" anchor="t"/>
+          <a:lstStyle/>
+          <a:p>
+            <a:pPr indent="0" marL="0">
+              <a:spcAft>
+                <a:spcPts val="400"/>
+              </a:spcAft>
+              <a:buNone/>
+            </a:pPr>
+            <a:r>
+              <a:rPr lang="en-US" sz="1400" dirty="0">
                 <a:solidFill>
                   <a:schemeClr val="tx1"/>
                 </a:solidFill>
               </a:rPr>
-              <a:t>AST 白名单：只允许 5 个标准库的 from-import；禁止下划线属性、eval、open、__import__；≤ 2000 字符</a:t>
-            </a:r>
-            <a:endParaRPr lang="en-US" sz="1350" dirty="0"/>
-          </a:p>
-        </p:txBody>
-      </p:sp>
-      <p:sp>
-        <p:nvSpPr>
-          <p:cNvPr id="10" name="沙箱-受限运行"/>
-          <p:cNvSpPr/>
-          <p:nvPr/>
-        </p:nvSpPr>
-        <p:spPr>
-          <a:xfrm>
-            <a:off x="3246120" y="2651760"/>
-            <a:ext cx="8412480" cy="1051560"/>
-          </a:xfrm>
-          <a:prstGeom prst="roundRect">
-            <a:avLst>
-              <a:gd name="adj" fmla="val 10435"/>
-            </a:avLst>
-          </a:prstGeom>
-          <a:solidFill>
-            <a:schemeClr val="bg2"/>
-          </a:solidFill>
-          <a:ln w="12700">
-            <a:solidFill>
-              <a:schemeClr val="bg2"/>
-            </a:solidFill>
-            <a:prstDash val="solid"/>
-          </a:ln>
-        </p:spPr>
-      </p:sp>
-      <p:sp>
-        <p:nvSpPr>
-          <p:cNvPr id="11" name="圆标-2"/>
-          <p:cNvSpPr/>
-          <p:nvPr/>
-        </p:nvSpPr>
-        <p:spPr>
-          <a:xfrm>
-            <a:off x="3474720" y="2889504"/>
-            <a:ext cx="566928" cy="566928"/>
-          </a:xfrm>
-          <a:prstGeom prst="ellipse">
-            <a:avLst/>
-          </a:prstGeom>
-          <a:solidFill>
-            <a:schemeClr val="accent1"/>
-          </a:solidFill>
-          <a:ln w="12700">
-            <a:solidFill>
-              <a:schemeClr val="accent1"/>
-            </a:solidFill>
-            <a:prstDash val="solid"/>
-          </a:ln>
-        </p:spPr>
-      </p:sp>
-      <p:sp>
-        <p:nvSpPr>
-          <p:cNvPr id="12" name="Text 9"/>
-          <p:cNvSpPr txBox="1"/>
-          <p:nvPr/>
-        </p:nvSpPr>
-        <p:spPr>
-          <a:xfrm>
-            <a:off x="3474720" y="2889504"/>
-            <a:ext cx="566928" cy="566928"/>
-          </a:xfrm>
-          <a:prstGeom prst="rect">
-            <a:avLst/>
-          </a:prstGeom>
-          <a:noFill/>
-          <a:ln/>
-        </p:spPr>
-        <p:txBody>
-          <a:bodyPr wrap="square" lIns="0" tIns="0" rIns="0" bIns="0" rtlCol="0" anchor="ctr"/>
-          <a:lstStyle/>
-          <a:p>
-            <a:pPr algn="ctr" indent="0" marL="0">
-              <a:buNone/>
-            </a:pPr>
-            <a:r>
-              <a:rPr lang="en-US" sz="1700" b="1" dirty="0">
-                <a:solidFill>
-                  <a:schemeClr val="bg1"/>
-                </a:solidFill>
-              </a:rPr>
-              <a:t>2</a:t>
-            </a:r>
-            <a:endParaRPr lang="en-US" sz="1700" dirty="0"/>
-          </a:p>
-        </p:txBody>
-      </p:sp>
-      <p:sp>
-        <p:nvSpPr>
-          <p:cNvPr id="13" name="Text 10"/>
-          <p:cNvSpPr txBox="1"/>
-          <p:nvPr/>
-        </p:nvSpPr>
-        <p:spPr>
-          <a:xfrm>
-            <a:off x="4206240" y="2743200"/>
-            <a:ext cx="1371600" cy="868680"/>
-          </a:xfrm>
-          <a:prstGeom prst="rect">
-            <a:avLst/>
-          </a:prstGeom>
-          <a:noFill/>
-          <a:ln/>
-        </p:spPr>
-        <p:txBody>
-          <a:bodyPr wrap="square" lIns="0" tIns="0" rIns="0" bIns="0" rtlCol="0" anchor="ctr"/>
-          <a:lstStyle/>
-          <a:p>
-            <a:pPr indent="0" marL="0">
-              <a:buNone/>
-            </a:pPr>
-            <a:r>
-              <a:rPr lang="en-US" sz="1700" b="1" dirty="0">
-                <a:solidFill>
-                  <a:schemeClr val="tx2"/>
-                </a:solidFill>
-              </a:rPr>
-              <a:t>受限运行</a:t>
-            </a:r>
-            <a:endParaRPr lang="en-US" sz="1700" dirty="0"/>
-          </a:p>
-        </p:txBody>
-      </p:sp>
-      <p:sp>
-        <p:nvSpPr>
-          <p:cNvPr id="14" name="Text 11"/>
-          <p:cNvSpPr txBox="1"/>
-          <p:nvPr/>
-        </p:nvSpPr>
-        <p:spPr>
-          <a:xfrm>
-            <a:off x="5669280" y="2743200"/>
-            <a:ext cx="5852160" cy="868680"/>
-          </a:xfrm>
-          <a:prstGeom prst="rect">
-            <a:avLst/>
-          </a:prstGeom>
-          <a:noFill/>
-          <a:ln/>
-        </p:spPr>
-        <p:txBody>
-          <a:bodyPr wrap="square" lIns="0" tIns="0" rIns="0" bIns="0" rtlCol="0" anchor="ctr"/>
-          <a:lstStyle/>
-          <a:p>
-            <a:pPr indent="0" marL="0">
-              <a:buNone/>
-            </a:pPr>
-            <a:r>
-              <a:rPr lang="en-US" sz="1350" dirty="0">
+              <a:t>长尾问题让模型写分析代码</a:t>
+            </a:r>
+            <a:endParaRPr lang="en-US" sz="1400" dirty="0"/>
+          </a:p>
+          <a:p>
+            <a:pPr indent="0" marL="0">
+              <a:spcAft>
+                <a:spcPts val="400"/>
+              </a:spcAft>
+              <a:buNone/>
+            </a:pPr>
+            <a:endParaRPr lang="en-US" sz="1400" dirty="0"/>
+          </a:p>
+          <a:p>
+            <a:pPr indent="0" marL="0">
+              <a:spcAft>
+                <a:spcPts val="400"/>
+              </a:spcAft>
+              <a:buNone/>
+            </a:pPr>
+            <a:r>
+              <a:rPr lang="en-US" sz="1400" dirty="0">
                 <a:solidFill>
                   <a:schemeClr val="tx1"/>
                 </a:solidFill>
               </a:rPr>
-              <a:t>子进程 python -I -S、空环境变量、临时目录；CPU 2 秒、内存 256MB、5 秒超时；无网络命名空间（有 Docker 时用 Docker）</a:t>
-            </a:r>
-            <a:endParaRPr lang="en-US" sz="1350" dirty="0"/>
-          </a:p>
-        </p:txBody>
-      </p:sp>
-      <p:sp>
-        <p:nvSpPr>
-          <p:cNvPr id="15" name="沙箱-最小数据"/>
-          <p:cNvSpPr/>
-          <p:nvPr/>
-        </p:nvSpPr>
-        <p:spPr>
-          <a:xfrm>
-            <a:off x="3246120" y="3840480"/>
-            <a:ext cx="8412480" cy="1051560"/>
-          </a:xfrm>
-          <a:prstGeom prst="roundRect">
-            <a:avLst>
-              <a:gd name="adj" fmla="val 10435"/>
-            </a:avLst>
-          </a:prstGeom>
-          <a:solidFill>
-            <a:schemeClr val="bg2"/>
-          </a:solidFill>
-          <a:ln w="12700">
-            <a:solidFill>
-              <a:schemeClr val="bg2"/>
-            </a:solidFill>
-            <a:prstDash val="solid"/>
-          </a:ln>
-        </p:spPr>
-      </p:sp>
-      <p:sp>
-        <p:nvSpPr>
-          <p:cNvPr id="16" name="圆标-3"/>
-          <p:cNvSpPr/>
-          <p:nvPr/>
-        </p:nvSpPr>
-        <p:spPr>
-          <a:xfrm>
-            <a:off x="3474720" y="4078224"/>
-            <a:ext cx="566928" cy="566928"/>
-          </a:xfrm>
-          <a:prstGeom prst="ellipse">
-            <a:avLst/>
-          </a:prstGeom>
-          <a:solidFill>
-            <a:schemeClr val="accent2"/>
-          </a:solidFill>
-          <a:ln w="12700">
-            <a:solidFill>
-              <a:schemeClr val="accent2"/>
-            </a:solidFill>
-            <a:prstDash val="solid"/>
-          </a:ln>
-        </p:spPr>
-      </p:sp>
-      <p:sp>
-        <p:nvSpPr>
-          <p:cNvPr id="17" name="Text 14"/>
-          <p:cNvSpPr txBox="1"/>
-          <p:nvPr/>
-        </p:nvSpPr>
-        <p:spPr>
-          <a:xfrm>
-            <a:off x="3474720" y="4078224"/>
-            <a:ext cx="566928" cy="566928"/>
-          </a:xfrm>
-          <a:prstGeom prst="rect">
-            <a:avLst/>
-          </a:prstGeom>
-          <a:noFill/>
-          <a:ln/>
-        </p:spPr>
-        <p:txBody>
-          <a:bodyPr wrap="square" lIns="0" tIns="0" rIns="0" bIns="0" rtlCol="0" anchor="ctr"/>
-          <a:lstStyle/>
-          <a:p>
-            <a:pPr algn="ctr" indent="0" marL="0">
-              <a:buNone/>
-            </a:pPr>
-            <a:r>
-              <a:rPr lang="en-US" sz="1700" b="1" dirty="0">
-                <a:solidFill>
-                  <a:schemeClr val="bg1"/>
-                </a:solidFill>
-              </a:rPr>
-              <a:t>3</a:t>
-            </a:r>
-            <a:endParaRPr lang="en-US" sz="1700" dirty="0"/>
-          </a:p>
-        </p:txBody>
-      </p:sp>
-      <p:sp>
-        <p:nvSpPr>
-          <p:cNvPr id="18" name="Text 15"/>
-          <p:cNvSpPr txBox="1"/>
-          <p:nvPr/>
-        </p:nvSpPr>
-        <p:spPr>
-          <a:xfrm>
-            <a:off x="4206240" y="3931920"/>
-            <a:ext cx="1371600" cy="868680"/>
-          </a:xfrm>
-          <a:prstGeom prst="rect">
-            <a:avLst/>
-          </a:prstGeom>
-          <a:noFill/>
-          <a:ln/>
-        </p:spPr>
-        <p:txBody>
-          <a:bodyPr wrap="square" lIns="0" tIns="0" rIns="0" bIns="0" rtlCol="0" anchor="ctr"/>
-          <a:lstStyle/>
-          <a:p>
-            <a:pPr indent="0" marL="0">
-              <a:buNone/>
-            </a:pPr>
-            <a:r>
-              <a:rPr lang="en-US" sz="1700" b="1" dirty="0">
-                <a:solidFill>
-                  <a:schemeClr val="tx2"/>
-                </a:solidFill>
-              </a:rPr>
-              <a:t>最小数据</a:t>
-            </a:r>
-            <a:endParaRPr lang="en-US" sz="1700" dirty="0"/>
-          </a:p>
-        </p:txBody>
-      </p:sp>
-      <p:sp>
-        <p:nvSpPr>
-          <p:cNvPr id="19" name="Text 16"/>
-          <p:cNvSpPr txBox="1"/>
-          <p:nvPr/>
-        </p:nvSpPr>
-        <p:spPr>
-          <a:xfrm>
-            <a:off x="5669280" y="3931920"/>
-            <a:ext cx="5852160" cy="868680"/>
-          </a:xfrm>
-          <a:prstGeom prst="rect">
-            <a:avLst/>
-          </a:prstGeom>
-          <a:noFill/>
-          <a:ln/>
-        </p:spPr>
-        <p:txBody>
-          <a:bodyPr wrap="square" lIns="0" tIns="0" rIns="0" bIns="0" rtlCol="0" anchor="ctr"/>
-          <a:lstStyle/>
-          <a:p>
-            <a:pPr indent="0" marL="0">
-              <a:buNone/>
-            </a:pPr>
-            <a:r>
-              <a:rPr lang="en-US" sz="1350" dirty="0">
+              <a:t>运行前语法树白名单；运行时独立子进程、无网络、CPU 2 秒、内存 256MB、5 秒超时</a:t>
+            </a:r>
+            <a:endParaRPr lang="en-US" sz="1400" dirty="0"/>
+          </a:p>
+          <a:p>
+            <a:pPr indent="0" marL="0">
+              <a:spcAft>
+                <a:spcPts val="400"/>
+              </a:spcAft>
+              <a:buNone/>
+            </a:pPr>
+            <a:endParaRPr lang="en-US" sz="1400" dirty="0"/>
+          </a:p>
+          <a:p>
+            <a:pPr indent="0" marL="0">
+              <a:spcAft>
+                <a:spcPts val="400"/>
+              </a:spcAft>
+              <a:buNone/>
+            </a:pPr>
+            <a:r>
+              <a:rPr lang="en-US" sz="1400" dirty="0">
                 <a:solidFill>
                   <a:schemeClr val="tx1"/>
                 </a:solidFill>
               </a:rPr>
-              <a:t>只给本人交易的只读快照，没有数据库、没有密钥</a:t>
-            </a:r>
-            <a:endParaRPr lang="en-US" sz="1350" dirty="0"/>
-          </a:p>
-        </p:txBody>
-      </p:sp>
-      <p:sp>
-        <p:nvSpPr>
-          <p:cNvPr id="20" name="沙箱-可审计"/>
-          <p:cNvSpPr/>
-          <p:nvPr/>
-        </p:nvSpPr>
-        <p:spPr>
-          <a:xfrm>
-            <a:off x="3246120" y="5029200"/>
-            <a:ext cx="8412480" cy="1051560"/>
-          </a:xfrm>
-          <a:prstGeom prst="roundRect">
-            <a:avLst>
-              <a:gd name="adj" fmla="val 10435"/>
-            </a:avLst>
-          </a:prstGeom>
-          <a:solidFill>
-            <a:schemeClr val="bg2"/>
-          </a:solidFill>
-          <a:ln w="12700">
-            <a:solidFill>
-              <a:schemeClr val="bg2"/>
-            </a:solidFill>
-            <a:prstDash val="solid"/>
-          </a:ln>
-        </p:spPr>
-      </p:sp>
-      <p:sp>
-        <p:nvSpPr>
-          <p:cNvPr id="21" name="圆标-4"/>
-          <p:cNvSpPr/>
-          <p:nvPr/>
-        </p:nvSpPr>
-        <p:spPr>
-          <a:xfrm>
-            <a:off x="3474720" y="5266944"/>
-            <a:ext cx="566928" cy="566928"/>
-          </a:xfrm>
-          <a:prstGeom prst="ellipse">
-            <a:avLst/>
-          </a:prstGeom>
-          <a:solidFill>
-            <a:schemeClr val="accent3"/>
-          </a:solidFill>
-          <a:ln w="12700">
-            <a:solidFill>
-              <a:schemeClr val="accent3"/>
-            </a:solidFill>
-            <a:prstDash val="solid"/>
-          </a:ln>
-        </p:spPr>
-      </p:sp>
-      <p:sp>
-        <p:nvSpPr>
-          <p:cNvPr id="22" name="Text 19"/>
-          <p:cNvSpPr txBox="1"/>
-          <p:nvPr/>
-        </p:nvSpPr>
-        <p:spPr>
-          <a:xfrm>
-            <a:off x="3474720" y="5266944"/>
-            <a:ext cx="566928" cy="566928"/>
-          </a:xfrm>
-          <a:prstGeom prst="rect">
-            <a:avLst/>
-          </a:prstGeom>
-          <a:noFill/>
-          <a:ln/>
-        </p:spPr>
-        <p:txBody>
-          <a:bodyPr wrap="square" lIns="0" tIns="0" rIns="0" bIns="0" rtlCol="0" anchor="ctr"/>
-          <a:lstStyle/>
-          <a:p>
-            <a:pPr algn="ctr" indent="0" marL="0">
-              <a:buNone/>
-            </a:pPr>
-            <a:r>
-              <a:rPr lang="en-US" sz="1700" b="1" dirty="0">
-                <a:solidFill>
-                  <a:schemeClr val="bg1"/>
-                </a:solidFill>
-              </a:rPr>
-              <a:t>4</a:t>
-            </a:r>
-            <a:endParaRPr lang="en-US" sz="1700" dirty="0"/>
-          </a:p>
-        </p:txBody>
-      </p:sp>
-      <p:sp>
-        <p:nvSpPr>
-          <p:cNvPr id="23" name="Text 20"/>
-          <p:cNvSpPr txBox="1"/>
-          <p:nvPr/>
-        </p:nvSpPr>
-        <p:spPr>
-          <a:xfrm>
-            <a:off x="4206240" y="5120640"/>
-            <a:ext cx="1371600" cy="868680"/>
-          </a:xfrm>
-          <a:prstGeom prst="rect">
-            <a:avLst/>
-          </a:prstGeom>
-          <a:noFill/>
-          <a:ln/>
-        </p:spPr>
-        <p:txBody>
-          <a:bodyPr wrap="square" lIns="0" tIns="0" rIns="0" bIns="0" rtlCol="0" anchor="ctr"/>
-          <a:lstStyle/>
-          <a:p>
-            <a:pPr indent="0" marL="0">
-              <a:buNone/>
-            </a:pPr>
-            <a:r>
-              <a:rPr lang="en-US" sz="1700" b="1" dirty="0">
-                <a:solidFill>
-                  <a:schemeClr val="tx2"/>
-                </a:solidFill>
-              </a:rPr>
-              <a:t>可审计</a:t>
-            </a:r>
-            <a:endParaRPr lang="en-US" sz="1700" dirty="0"/>
-          </a:p>
-        </p:txBody>
-      </p:sp>
-      <p:sp>
-        <p:nvSpPr>
-          <p:cNvPr id="24" name="Text 21"/>
-          <p:cNvSpPr txBox="1"/>
-          <p:nvPr/>
-        </p:nvSpPr>
-        <p:spPr>
-          <a:xfrm>
-            <a:off x="5669280" y="5120640"/>
-            <a:ext cx="5852160" cy="868680"/>
-          </a:xfrm>
-          <a:prstGeom prst="rect">
-            <a:avLst/>
-          </a:prstGeom>
-          <a:noFill/>
-          <a:ln/>
-        </p:spPr>
-        <p:txBody>
-          <a:bodyPr wrap="square" lIns="0" tIns="0" rIns="0" bIns="0" rtlCol="0" anchor="ctr"/>
-          <a:lstStyle/>
-          <a:p>
-            <a:pPr indent="0" marL="0">
-              <a:buNone/>
-            </a:pPr>
-            <a:r>
-              <a:rPr lang="en-US" sz="1350" dirty="0">
-                <a:solidFill>
-                  <a:schemeClr val="tx1"/>
-                </a:solidFill>
-              </a:rPr>
-              <a:t>代码哈希、引擎、耗时、退出状态写入审计；输出数字同样过事实校验</a:t>
-            </a:r>
-            <a:endParaRPr lang="en-US" sz="1350" dirty="0"/>
+              <a:t>只给本人交易的只读快照；代码哈希写入审计</a:t>
+            </a:r>
+            <a:endParaRPr lang="en-US" sz="1400" dirty="0"/>
           </a:p>
         </p:txBody>
       </p:sp>
@@ -7294,7 +7484,7 @@
                   <a:schemeClr val="tx2"/>
                 </a:solidFill>
               </a:rPr>
-              <a:t>银行 App 的两个痛点</a:t>
+              <a:t>行业对标：Revolut AIR 已经上线，但还有缺口</a:t>
             </a:r>
             <a:endParaRPr lang="en-US" sz="3000" dirty="0"/>
           </a:p>
@@ -7330,7 +7520,7 @@
                   <a:schemeClr val="accent6"/>
                 </a:solidFill>
               </a:rPr>
-              <a:t>功能越来越多，操作路径越来越长；让 AI 代办，又担心它“乱转钱”</a:t>
+              <a:t>2026-04 Revolut 在 App 内推出 AI 助手 AIR（以下只引用公开资料）</a:t>
             </a:r>
             <a:endParaRPr lang="en-US" sz="1500" dirty="0"/>
           </a:p>
@@ -7338,18 +7528,18 @@
       </p:sp>
       <p:sp>
         <p:nvSpPr>
-          <p:cNvPr id="4" name="卡片-操作路径长"/>
+          <p:cNvPr id="4" name="卡片-AIR 做到了"/>
           <p:cNvSpPr/>
           <p:nvPr/>
         </p:nvSpPr>
         <p:spPr>
           <a:xfrm>
-            <a:off x="548640" y="1600200"/>
-            <a:ext cx="5394960" cy="4480560"/>
+            <a:off x="548640" y="1554480"/>
+            <a:ext cx="3611880" cy="4069080"/>
           </a:xfrm>
           <a:prstGeom prst="roundRect">
             <a:avLst>
-              <a:gd name="adj" fmla="val 2449"/>
+              <a:gd name="adj" fmla="val 3038"/>
             </a:avLst>
           </a:prstGeom>
           <a:solidFill>
@@ -7365,24 +7555,24 @@
       </p:sp>
       <p:sp>
         <p:nvSpPr>
-          <p:cNvPr id="5" name="圆标-长"/>
+          <p:cNvPr id="5" name="圆标-有"/>
           <p:cNvSpPr/>
           <p:nvPr/>
         </p:nvSpPr>
         <p:spPr>
           <a:xfrm>
-            <a:off x="777240" y="1828800"/>
+            <a:off x="777240" y="1783080"/>
             <a:ext cx="566928" cy="566928"/>
           </a:xfrm>
           <a:prstGeom prst="ellipse">
             <a:avLst/>
           </a:prstGeom>
           <a:solidFill>
-            <a:schemeClr val="accent3"/>
+            <a:schemeClr val="accent1"/>
           </a:solidFill>
           <a:ln w="12700">
             <a:solidFill>
-              <a:schemeClr val="accent3"/>
+              <a:schemeClr val="accent1"/>
             </a:solidFill>
             <a:prstDash val="solid"/>
           </a:ln>
@@ -7396,7 +7586,7 @@
         </p:nvSpPr>
         <p:spPr>
           <a:xfrm>
-            <a:off x="777240" y="1828800"/>
+            <a:off x="777240" y="1783080"/>
             <a:ext cx="566928" cy="566928"/>
           </a:xfrm>
           <a:prstGeom prst="rect">
@@ -7418,7 +7608,7 @@
                   <a:schemeClr val="bg1"/>
                 </a:solidFill>
               </a:rPr>
-              <a:t>长</a:t>
+              <a:t>有</a:t>
             </a:r>
             <a:endParaRPr lang="en-US" sz="1700" dirty="0"/>
           </a:p>
@@ -7432,8 +7622,8 @@
         </p:nvSpPr>
         <p:spPr>
           <a:xfrm>
-            <a:off x="1508760" y="1801368"/>
-            <a:ext cx="4251960" cy="457200"/>
+            <a:off x="1508760" y="1755648"/>
+            <a:ext cx="2468880" cy="457200"/>
           </a:xfrm>
           <a:prstGeom prst="rect">
             <a:avLst/>
@@ -7454,7 +7644,7 @@
                   <a:schemeClr val="tx2"/>
                 </a:solidFill>
               </a:rPr>
-              <a:t>操作路径长</a:t>
+              <a:t>AIR 做到了</a:t>
             </a:r>
             <a:endParaRPr lang="en-US" sz="1700" dirty="0"/>
           </a:p>
@@ -7468,8 +7658,8 @@
         </p:nvSpPr>
         <p:spPr>
           <a:xfrm>
-            <a:off x="777240" y="2496312"/>
-            <a:ext cx="4937760" cy="3429000"/>
+            <a:off x="777240" y="2450592"/>
+            <a:ext cx="3154680" cy="3017520"/>
           </a:xfrm>
           <a:prstGeom prst="rect">
             <a:avLst/>
@@ -7493,7 +7683,7 @@
                   <a:schemeClr val="tx1"/>
                 </a:solidFill>
               </a:rPr>
-              <a:t>给妈妈转一笔生活费、查一笔可疑扣款、取消一个忘了的会员，往往要在菜单里点五六层。</a:t>
+              <a:t>消费查询与洞察、投资跟踪、订阅管理、卡片控制（含冻结丢失的卡）、旅行规划</a:t>
             </a:r>
             <a:endParaRPr lang="en-US" sz="1400" dirty="0"/>
           </a:p>
@@ -7519,26 +7709,52 @@
                   <a:schemeClr val="tx1"/>
                 </a:solidFill>
               </a:rPr>
-              <a:t>老人和不熟悉 App 的用户最吃力；而他们恰恰是电信诈骗的主要目标。</a:t>
+              <a:t>推荐问题、语音输入</a:t>
             </a:r>
             <a:endParaRPr lang="en-US" sz="1400" dirty="0"/>
           </a:p>
-        </p:txBody>
-      </p:sp>
-      <p:sp>
-        <p:nvSpPr>
-          <p:cNvPr id="9" name="卡片-AI 代办的安全顾虑"/>
+          <a:p>
+            <a:pPr indent="0" marL="0">
+              <a:spcAft>
+                <a:spcPts val="400"/>
+              </a:spcAft>
+              <a:buNone/>
+            </a:pPr>
+            <a:endParaRPr lang="en-US" sz="1400" dirty="0"/>
+          </a:p>
+          <a:p>
+            <a:pPr indent="0" marL="0">
+              <a:spcAft>
+                <a:spcPts val="400"/>
+              </a:spcAft>
+              <a:buNone/>
+            </a:pPr>
+            <a:r>
+              <a:rPr lang="en-US" sz="1400" dirty="0">
+                <a:solidFill>
+                  <a:schemeClr val="tx1"/>
+                </a:solidFill>
+              </a:rPr>
+              <a:t>每笔金融交易都要生物识别确认</a:t>
+            </a:r>
+            <a:endParaRPr lang="en-US" sz="1400" dirty="0"/>
+          </a:p>
+        </p:txBody>
+      </p:sp>
+      <p:sp>
+        <p:nvSpPr>
+          <p:cNvPr id="9" name="卡片-评论指出的不足"/>
           <p:cNvSpPr/>
           <p:nvPr/>
         </p:nvSpPr>
         <p:spPr>
           <a:xfrm>
-            <a:off x="6263640" y="1600200"/>
-            <a:ext cx="5394960" cy="4480560"/>
+            <a:off x="4297680" y="1554480"/>
+            <a:ext cx="3611880" cy="4069080"/>
           </a:xfrm>
           <a:prstGeom prst="roundRect">
             <a:avLst>
-              <a:gd name="adj" fmla="val 2449"/>
+              <a:gd name="adj" fmla="val 3038"/>
             </a:avLst>
           </a:prstGeom>
           <a:solidFill>
@@ -7554,13 +7770,13 @@
       </p:sp>
       <p:sp>
         <p:nvSpPr>
-          <p:cNvPr id="10" name="圆标-险"/>
+          <p:cNvPr id="10" name="圆标-缺"/>
           <p:cNvSpPr/>
           <p:nvPr/>
         </p:nvSpPr>
         <p:spPr>
           <a:xfrm>
-            <a:off x="6492240" y="1828800"/>
+            <a:off x="4526280" y="1783080"/>
             <a:ext cx="566928" cy="566928"/>
           </a:xfrm>
           <a:prstGeom prst="ellipse">
@@ -7585,7 +7801,7 @@
         </p:nvSpPr>
         <p:spPr>
           <a:xfrm>
-            <a:off x="6492240" y="1828800"/>
+            <a:off x="4526280" y="1783080"/>
             <a:ext cx="566928" cy="566928"/>
           </a:xfrm>
           <a:prstGeom prst="rect">
@@ -7607,7 +7823,7 @@
                   <a:schemeClr val="bg1"/>
                 </a:solidFill>
               </a:rPr>
-              <a:t>险</a:t>
+              <a:t>缺</a:t>
             </a:r>
             <a:endParaRPr lang="en-US" sz="1700" dirty="0"/>
           </a:p>
@@ -7621,8 +7837,8 @@
         </p:nvSpPr>
         <p:spPr>
           <a:xfrm>
-            <a:off x="7223760" y="1801368"/>
-            <a:ext cx="4251960" cy="457200"/>
+            <a:off x="5257800" y="1755648"/>
+            <a:ext cx="2468880" cy="457200"/>
           </a:xfrm>
           <a:prstGeom prst="rect">
             <a:avLst/>
@@ -7643,7 +7859,7 @@
                   <a:schemeClr val="tx2"/>
                 </a:solidFill>
               </a:rPr>
-              <a:t>AI 代办的安全顾虑</a:t>
+              <a:t>评论指出的不足</a:t>
             </a:r>
             <a:endParaRPr lang="en-US" sz="1700" dirty="0"/>
           </a:p>
@@ -7657,8 +7873,8 @@
         </p:nvSpPr>
         <p:spPr>
           <a:xfrm>
-            <a:off x="6492240" y="2496312"/>
-            <a:ext cx="4937760" cy="3429000"/>
+            <a:off x="4526280" y="2450592"/>
+            <a:ext cx="3154680" cy="3017520"/>
           </a:xfrm>
           <a:prstGeom prst="rect">
             <a:avLst/>
@@ -7682,7 +7898,7 @@
                   <a:schemeClr val="tx1"/>
                 </a:solidFill>
               </a:rPr>
-              <a:t>大模型会被话术诱导、会被交易备注里的文字“注入”、会编造数字、会把没做的事说成“已完成”。</a:t>
+              <a:t>只有 App 内一个渠道</a:t>
             </a:r>
             <a:endParaRPr lang="en-US" sz="1400" dirty="0"/>
           </a:p>
@@ -7708,9 +7924,338 @@
                   <a:schemeClr val="tx1"/>
                 </a:solidFill>
               </a:rPr>
-              <a:t>如果让模型直接决定转账，风险不可接受。</a:t>
+              <a:t>熟悉的操作用聊天反而更慢</a:t>
             </a:r>
             <a:endParaRPr lang="en-US" sz="1400" dirty="0"/>
+          </a:p>
+          <a:p>
+            <a:pPr indent="0" marL="0">
+              <a:spcAft>
+                <a:spcPts val="400"/>
+              </a:spcAft>
+              <a:buNone/>
+            </a:pPr>
+            <a:endParaRPr lang="en-US" sz="1400" dirty="0"/>
+          </a:p>
+          <a:p>
+            <a:pPr indent="0" marL="0">
+              <a:spcAft>
+                <a:spcPts val="400"/>
+              </a:spcAft>
+              <a:buNone/>
+            </a:pPr>
+            <a:r>
+              <a:rPr lang="en-US" sz="1400" dirty="0">
+                <a:solidFill>
+                  <a:schemeClr val="tx1"/>
+                </a:solidFill>
+              </a:rPr>
+              <a:t>“逃不出自动客服循环”，缺少清晰的转人工出口</a:t>
+            </a:r>
+            <a:endParaRPr lang="en-US" sz="1400" dirty="0"/>
+          </a:p>
+          <a:p>
+            <a:pPr indent="0" marL="0">
+              <a:spcAft>
+                <a:spcPts val="400"/>
+              </a:spcAft>
+              <a:buNone/>
+            </a:pPr>
+            <a:endParaRPr lang="en-US" sz="1400" dirty="0"/>
+          </a:p>
+          <a:p>
+            <a:pPr indent="0" marL="0">
+              <a:spcAft>
+                <a:spcPts val="400"/>
+              </a:spcAft>
+              <a:buNone/>
+            </a:pPr>
+            <a:r>
+              <a:rPr lang="en-US" sz="1400" dirty="0">
+                <a:solidFill>
+                  <a:schemeClr val="tx1"/>
+                </a:solidFill>
+              </a:rPr>
+              <a:t>冻结账户、反洗钱触发等例外处理弱</a:t>
+            </a:r>
+            <a:endParaRPr lang="en-US" sz="1400" dirty="0"/>
+          </a:p>
+        </p:txBody>
+      </p:sp>
+      <p:sp>
+        <p:nvSpPr>
+          <p:cNvPr id="14" name="卡片-小安的回答"/>
+          <p:cNvSpPr/>
+          <p:nvPr/>
+        </p:nvSpPr>
+        <p:spPr>
+          <a:xfrm>
+            <a:off x="8046720" y="1554480"/>
+            <a:ext cx="3611880" cy="4069080"/>
+          </a:xfrm>
+          <a:prstGeom prst="roundRect">
+            <a:avLst>
+              <a:gd name="adj" fmla="val 3038"/>
+            </a:avLst>
+          </a:prstGeom>
+          <a:solidFill>
+            <a:schemeClr val="bg2"/>
+          </a:solidFill>
+          <a:ln w="12700">
+            <a:solidFill>
+              <a:schemeClr val="bg2"/>
+            </a:solidFill>
+            <a:prstDash val="solid"/>
+          </a:ln>
+        </p:spPr>
+      </p:sp>
+      <p:sp>
+        <p:nvSpPr>
+          <p:cNvPr id="15" name="圆标-答"/>
+          <p:cNvSpPr/>
+          <p:nvPr/>
+        </p:nvSpPr>
+        <p:spPr>
+          <a:xfrm>
+            <a:off x="8275320" y="1783080"/>
+            <a:ext cx="566928" cy="566928"/>
+          </a:xfrm>
+          <a:prstGeom prst="ellipse">
+            <a:avLst/>
+          </a:prstGeom>
+          <a:solidFill>
+            <a:schemeClr val="accent2"/>
+          </a:solidFill>
+          <a:ln w="12700">
+            <a:solidFill>
+              <a:schemeClr val="accent2"/>
+            </a:solidFill>
+            <a:prstDash val="solid"/>
+          </a:ln>
+        </p:spPr>
+      </p:sp>
+      <p:sp>
+        <p:nvSpPr>
+          <p:cNvPr id="16" name="Text 14"/>
+          <p:cNvSpPr txBox="1"/>
+          <p:nvPr/>
+        </p:nvSpPr>
+        <p:spPr>
+          <a:xfrm>
+            <a:off x="8275320" y="1783080"/>
+            <a:ext cx="566928" cy="566928"/>
+          </a:xfrm>
+          <a:prstGeom prst="rect">
+            <a:avLst/>
+          </a:prstGeom>
+          <a:noFill/>
+          <a:ln/>
+        </p:spPr>
+        <p:txBody>
+          <a:bodyPr wrap="square" lIns="0" tIns="0" rIns="0" bIns="0" rtlCol="0" anchor="ctr"/>
+          <a:lstStyle/>
+          <a:p>
+            <a:pPr algn="ctr" indent="0" marL="0">
+              <a:buNone/>
+            </a:pPr>
+            <a:r>
+              <a:rPr lang="en-US" sz="1700" b="1" dirty="0">
+                <a:solidFill>
+                  <a:schemeClr val="bg1"/>
+                </a:solidFill>
+              </a:rPr>
+              <a:t>答</a:t>
+            </a:r>
+            <a:endParaRPr lang="en-US" sz="1700" dirty="0"/>
+          </a:p>
+        </p:txBody>
+      </p:sp>
+      <p:sp>
+        <p:nvSpPr>
+          <p:cNvPr id="17" name="Text 15"/>
+          <p:cNvSpPr txBox="1"/>
+          <p:nvPr/>
+        </p:nvSpPr>
+        <p:spPr>
+          <a:xfrm>
+            <a:off x="9006840" y="1755648"/>
+            <a:ext cx="2468880" cy="457200"/>
+          </a:xfrm>
+          <a:prstGeom prst="rect">
+            <a:avLst/>
+          </a:prstGeom>
+          <a:noFill/>
+          <a:ln/>
+        </p:spPr>
+        <p:txBody>
+          <a:bodyPr wrap="square" lIns="0" tIns="0" rIns="0" bIns="0" rtlCol="0" anchor="ctr"/>
+          <a:lstStyle/>
+          <a:p>
+            <a:pPr indent="0" marL="0">
+              <a:buNone/>
+            </a:pPr>
+            <a:r>
+              <a:rPr lang="en-US" sz="1700" b="1" dirty="0">
+                <a:solidFill>
+                  <a:schemeClr val="tx2"/>
+                </a:solidFill>
+              </a:rPr>
+              <a:t>小安的回答</a:t>
+            </a:r>
+            <a:endParaRPr lang="en-US" sz="1700" dirty="0"/>
+          </a:p>
+        </p:txBody>
+      </p:sp>
+      <p:sp>
+        <p:nvSpPr>
+          <p:cNvPr id="18" name="Text 16"/>
+          <p:cNvSpPr txBox="1"/>
+          <p:nvPr/>
+        </p:nvSpPr>
+        <p:spPr>
+          <a:xfrm>
+            <a:off x="8275320" y="2450592"/>
+            <a:ext cx="3154680" cy="3017520"/>
+          </a:xfrm>
+          <a:prstGeom prst="rect">
+            <a:avLst/>
+          </a:prstGeom>
+          <a:noFill/>
+          <a:ln/>
+        </p:spPr>
+        <p:txBody>
+          <a:bodyPr wrap="square" lIns="0" tIns="0" rIns="0" bIns="0" rtlCol="0" anchor="t"/>
+          <a:lstStyle/>
+          <a:p>
+            <a:pPr indent="0" marL="0">
+              <a:spcAft>
+                <a:spcPts val="400"/>
+              </a:spcAft>
+              <a:buNone/>
+            </a:pPr>
+            <a:r>
+              <a:rPr lang="en-US" sz="1400" dirty="0">
+                <a:solidFill>
+                  <a:schemeClr val="tx1"/>
+                </a:solidFill>
+              </a:rPr>
+              <a:t>App + 飞书，按渠道分级风控</a:t>
+            </a:r>
+            <a:endParaRPr lang="en-US" sz="1400" dirty="0"/>
+          </a:p>
+          <a:p>
+            <a:pPr indent="0" marL="0">
+              <a:spcAft>
+                <a:spcPts val="400"/>
+              </a:spcAft>
+              <a:buNone/>
+            </a:pPr>
+            <a:endParaRPr lang="en-US" sz="1400" dirty="0"/>
+          </a:p>
+          <a:p>
+            <a:pPr indent="0" marL="0">
+              <a:spcAft>
+                <a:spcPts val="400"/>
+              </a:spcAft>
+              <a:buNone/>
+            </a:pPr>
+            <a:r>
+              <a:rPr lang="en-US" sz="1400" dirty="0">
+                <a:solidFill>
+                  <a:schemeClr val="tx1"/>
+                </a:solidFill>
+              </a:rPr>
+              <a:t>三档权限：低风险点确认，高风险强验证</a:t>
+            </a:r>
+            <a:endParaRPr lang="en-US" sz="1400" dirty="0"/>
+          </a:p>
+          <a:p>
+            <a:pPr indent="0" marL="0">
+              <a:spcAft>
+                <a:spcPts val="400"/>
+              </a:spcAft>
+              <a:buNone/>
+            </a:pPr>
+            <a:endParaRPr lang="en-US" sz="1400" dirty="0"/>
+          </a:p>
+          <a:p>
+            <a:pPr indent="0" marL="0">
+              <a:spcAft>
+                <a:spcPts val="400"/>
+              </a:spcAft>
+              <a:buNone/>
+            </a:pPr>
+            <a:r>
+              <a:rPr lang="en-US" sz="1400" dirty="0">
+                <a:solidFill>
+                  <a:schemeClr val="tx1"/>
+                </a:solidFill>
+              </a:rPr>
+              <a:t>保留常规页面和按钮，聊天不是唯一入口</a:t>
+            </a:r>
+            <a:endParaRPr lang="en-US" sz="1400" dirty="0"/>
+          </a:p>
+          <a:p>
+            <a:pPr indent="0" marL="0">
+              <a:spcAft>
+                <a:spcPts val="400"/>
+              </a:spcAft>
+              <a:buNone/>
+            </a:pPr>
+            <a:endParaRPr lang="en-US" sz="1400" dirty="0"/>
+          </a:p>
+          <a:p>
+            <a:pPr indent="0" marL="0">
+              <a:spcAft>
+                <a:spcPts val="400"/>
+              </a:spcAft>
+              <a:buNone/>
+            </a:pPr>
+            <a:r>
+              <a:rPr lang="en-US" sz="1400" dirty="0">
+                <a:solidFill>
+                  <a:schemeClr val="tx1"/>
+                </a:solidFill>
+              </a:rPr>
+              <a:t>明确的转人工、反诈拦截与可回退计划</a:t>
+            </a:r>
+            <a:endParaRPr lang="en-US" sz="1400" dirty="0"/>
+          </a:p>
+        </p:txBody>
+      </p:sp>
+      <p:sp>
+        <p:nvSpPr>
+          <p:cNvPr id="19" name="Text 17"/>
+          <p:cNvSpPr txBox="1"/>
+          <p:nvPr/>
+        </p:nvSpPr>
+        <p:spPr>
+          <a:xfrm>
+            <a:off x="548640" y="5742432"/>
+            <a:ext cx="11109960" cy="548640"/>
+          </a:xfrm>
+          <a:prstGeom prst="rect">
+            <a:avLst/>
+          </a:prstGeom>
+          <a:noFill/>
+          <a:ln/>
+        </p:spPr>
+        <p:txBody>
+          <a:bodyPr wrap="square" lIns="0" tIns="0" rIns="0" bIns="0" rtlCol="0" anchor="t"/>
+          <a:lstStyle/>
+          <a:p>
+            <a:pPr indent="0" marL="0">
+              <a:buNone/>
+            </a:pPr>
+            <a:r>
+              <a:rPr lang="en-US" sz="1100" dirty="0">
+                <a:solidFill>
+                  <a:schemeClr val="accent6"/>
+                </a:solidFill>
+              </a:rPr>
+              <a:t>来源：revolut.com 新闻稿与博客（AIR 发布）、ergomania.eu（UX 评论）、uktech.news（2026-04-09 报道）。我们不足之处：模拟原型、没有生物识别、没有旅行场景。</a:t>
+            </a:r>
+            <a:endParaRPr lang="en-US" sz="1100" dirty="0"/>
           </a:p>
         </p:txBody>
       </p:sp>
@@ -9499,7 +10044,7 @@
                   <a:schemeClr val="tx2"/>
                 </a:solidFill>
               </a:rPr>
-              <a:t>Agent 规划：工具调用 + DAG 计划，一次确认</a:t>
+              <a:t>多渠道：App + 飞书，按渠道分级风控</a:t>
             </a:r>
             <a:endParaRPr lang="en-US" sz="3000" dirty="0"/>
           </a:p>
@@ -9535,15 +10080,999 @@
                   <a:schemeClr val="accent6"/>
                 </a:solidFill>
               </a:rPr>
-              <a:t>复杂任务拆成有依赖关系的步骤，代码校验后整体确认、到点执行、随时可回退</a:t>
+              <a:t>渠道越不可控，能办的事越少；同一个安全内核、同一本模拟账本</a:t>
             </a:r>
             <a:endParaRPr lang="en-US" sz="1500" dirty="0"/>
+          </a:p>
+        </p:txBody>
+      </p:sp>
+      <p:graphicFrame>
+        <p:nvGraphicFramePr>
+          <p:cNvPr id="6" name="Table 0"/>
+          <p:cNvGraphicFramePr>
+            <a:graphicFrameLocks noGrp="1"/>
+          </p:cNvGraphicFramePr>
+          <p:nvPr>
+            <p:extLst>
+              <p:ext uri="{D42A27DB-BD31-4B8C-83A1-F6EECF244321}">
+                <p14:modId xmlns:p14="http://schemas.microsoft.com/office/powerpoint/2010/main" val="1579011935"/>
+              </p:ext>
+            </p:extLst>
+          </p:nvPr>
+        </p:nvGraphicFramePr>
+        <p:xfrm>
+          <a:off x="548640" y="1554480"/>
+          <a:ext cx="7863840" cy="914400"/>
+        </p:xfrm>
+        <a:graphic>
+          <a:graphicData uri="http://schemas.openxmlformats.org/drawingml/2006/table">
+            <a:tbl>
+              <a:tblPr/>
+              <a:tblGrid>
+                <a:gridCol w="1737360"/>
+                <a:gridCol w="2651760"/>
+                <a:gridCol w="3474720"/>
+              </a:tblGrid>
+              <a:tr h="777240">
+                <a:tc>
+                  <a:txBody>
+                    <a:bodyPr/>
+                    <a:lstStyle/>
+                    <a:p>
+                      <a:pPr indent="0" marL="0">
+                        <a:buNone/>
+                      </a:pPr>
+                      <a:endParaRPr lang="en-US" sz="1400" dirty="0"/>
+                    </a:p>
+                  </a:txBody>
+                  <a:tcPr marL="91440" marR="91440" marT="91440" marB="91440" anchor="ctr">
+                    <a:lnL w="12700" cap="flat" cmpd="sng" algn="ctr">
+                      <a:solidFill>
+                        <a:srgbClr val="D6DCE8"/>
+                      </a:solidFill>
+                      <a:prstDash val="solid"/>
+                      <a:round/>
+                      <a:headEnd type="none" w="med" len="med"/>
+                      <a:tailEnd type="none" w="med" len="med"/>
+                    </a:lnL>
+                    <a:lnR w="12700" cap="flat" cmpd="sng" algn="ctr">
+                      <a:solidFill>
+                        <a:srgbClr val="D6DCE8"/>
+                      </a:solidFill>
+                      <a:prstDash val="solid"/>
+                      <a:round/>
+                      <a:headEnd type="none" w="med" len="med"/>
+                      <a:tailEnd type="none" w="med" len="med"/>
+                    </a:lnR>
+                    <a:lnT w="12700" cap="flat" cmpd="sng" algn="ctr">
+                      <a:solidFill>
+                        <a:srgbClr val="D6DCE8"/>
+                      </a:solidFill>
+                      <a:prstDash val="solid"/>
+                      <a:round/>
+                      <a:headEnd type="none" w="med" len="med"/>
+                      <a:tailEnd type="none" w="med" len="med"/>
+                    </a:lnT>
+                    <a:lnB w="12700" cap="flat" cmpd="sng" algn="ctr">
+                      <a:solidFill>
+                        <a:srgbClr val="D6DCE8"/>
+                      </a:solidFill>
+                      <a:prstDash val="solid"/>
+                      <a:round/>
+                      <a:headEnd type="none" w="med" len="med"/>
+                      <a:tailEnd type="none" w="med" len="med"/>
+                    </a:lnB>
+                    <a:solidFill>
+                      <a:schemeClr val="tx2"/>
+                    </a:solidFill>
+                  </a:tcPr>
+                </a:tc>
+                <a:tc>
+                  <a:txBody>
+                    <a:bodyPr/>
+                    <a:lstStyle/>
+                    <a:p>
+                      <a:pPr indent="0" marL="0">
+                        <a:buNone/>
+                      </a:pPr>
+                      <a:r>
+                        <a:rPr lang="en-US" sz="1400" b="1" dirty="0">
+                          <a:solidFill>
+                            <a:schemeClr val="bg1"/>
+                          </a:solidFill>
+                        </a:rPr>
+                        <a:t>App（可安装的手机网页 PWA）</a:t>
+                      </a:r>
+                      <a:endParaRPr lang="en-US" sz="1400" dirty="0"/>
+                    </a:p>
+                  </a:txBody>
+                  <a:tcPr marL="91440" marR="91440" marT="91440" marB="91440" anchor="ctr">
+                    <a:lnL w="12700" cap="flat" cmpd="sng" algn="ctr">
+                      <a:solidFill>
+                        <a:srgbClr val="D6DCE8"/>
+                      </a:solidFill>
+                      <a:prstDash val="solid"/>
+                      <a:round/>
+                      <a:headEnd type="none" w="med" len="med"/>
+                      <a:tailEnd type="none" w="med" len="med"/>
+                    </a:lnL>
+                    <a:lnR w="12700" cap="flat" cmpd="sng" algn="ctr">
+                      <a:solidFill>
+                        <a:srgbClr val="D6DCE8"/>
+                      </a:solidFill>
+                      <a:prstDash val="solid"/>
+                      <a:round/>
+                      <a:headEnd type="none" w="med" len="med"/>
+                      <a:tailEnd type="none" w="med" len="med"/>
+                    </a:lnR>
+                    <a:lnT w="12700" cap="flat" cmpd="sng" algn="ctr">
+                      <a:solidFill>
+                        <a:srgbClr val="D6DCE8"/>
+                      </a:solidFill>
+                      <a:prstDash val="solid"/>
+                      <a:round/>
+                      <a:headEnd type="none" w="med" len="med"/>
+                      <a:tailEnd type="none" w="med" len="med"/>
+                    </a:lnT>
+                    <a:lnB w="12700" cap="flat" cmpd="sng" algn="ctr">
+                      <a:solidFill>
+                        <a:srgbClr val="D6DCE8"/>
+                      </a:solidFill>
+                      <a:prstDash val="solid"/>
+                      <a:round/>
+                      <a:headEnd type="none" w="med" len="med"/>
+                      <a:tailEnd type="none" w="med" len="med"/>
+                    </a:lnB>
+                    <a:solidFill>
+                      <a:schemeClr val="tx2"/>
+                    </a:solidFill>
+                  </a:tcPr>
+                </a:tc>
+                <a:tc>
+                  <a:txBody>
+                    <a:bodyPr/>
+                    <a:lstStyle/>
+                    <a:p>
+                      <a:pPr indent="0" marL="0">
+                        <a:buNone/>
+                      </a:pPr>
+                      <a:r>
+                        <a:rPr lang="en-US" sz="1400" b="1" dirty="0">
+                          <a:solidFill>
+                            <a:schemeClr val="bg1"/>
+                          </a:solidFill>
+                        </a:rPr>
+                        <a:t>飞书私聊机器人</a:t>
+                      </a:r>
+                      <a:endParaRPr lang="en-US" sz="1400" dirty="0"/>
+                    </a:p>
+                  </a:txBody>
+                  <a:tcPr marL="91440" marR="91440" marT="91440" marB="91440" anchor="ctr">
+                    <a:lnL w="12700" cap="flat" cmpd="sng" algn="ctr">
+                      <a:solidFill>
+                        <a:srgbClr val="D6DCE8"/>
+                      </a:solidFill>
+                      <a:prstDash val="solid"/>
+                      <a:round/>
+                      <a:headEnd type="none" w="med" len="med"/>
+                      <a:tailEnd type="none" w="med" len="med"/>
+                    </a:lnL>
+                    <a:lnR w="12700" cap="flat" cmpd="sng" algn="ctr">
+                      <a:solidFill>
+                        <a:srgbClr val="D6DCE8"/>
+                      </a:solidFill>
+                      <a:prstDash val="solid"/>
+                      <a:round/>
+                      <a:headEnd type="none" w="med" len="med"/>
+                      <a:tailEnd type="none" w="med" len="med"/>
+                    </a:lnR>
+                    <a:lnT w="12700" cap="flat" cmpd="sng" algn="ctr">
+                      <a:solidFill>
+                        <a:srgbClr val="D6DCE8"/>
+                      </a:solidFill>
+                      <a:prstDash val="solid"/>
+                      <a:round/>
+                      <a:headEnd type="none" w="med" len="med"/>
+                      <a:tailEnd type="none" w="med" len="med"/>
+                    </a:lnT>
+                    <a:lnB w="12700" cap="flat" cmpd="sng" algn="ctr">
+                      <a:solidFill>
+                        <a:srgbClr val="D6DCE8"/>
+                      </a:solidFill>
+                      <a:prstDash val="solid"/>
+                      <a:round/>
+                      <a:headEnd type="none" w="med" len="med"/>
+                      <a:tailEnd type="none" w="med" len="med"/>
+                    </a:lnB>
+                    <a:solidFill>
+                      <a:schemeClr val="tx2"/>
+                    </a:solidFill>
+                  </a:tcPr>
+                </a:tc>
+              </a:tr>
+              <a:tr h="777240">
+                <a:tc>
+                  <a:txBody>
+                    <a:bodyPr/>
+                    <a:lstStyle/>
+                    <a:p>
+                      <a:pPr indent="0" marL="0">
+                        <a:buNone/>
+                      </a:pPr>
+                      <a:r>
+                        <a:rPr lang="en-US" sz="1400" dirty="0">
+                          <a:solidFill>
+                            <a:srgbClr val="059669"/>
+                          </a:solidFill>
+                        </a:rPr>
+                        <a:t>绿档 · 查询</a:t>
+                      </a:r>
+                      <a:endParaRPr lang="en-US" sz="1400" dirty="0"/>
+                    </a:p>
+                  </a:txBody>
+                  <a:tcPr marL="91440" marR="91440" marT="91440" marB="91440" anchor="ctr">
+                    <a:lnL w="12700" cap="flat" cmpd="sng" algn="ctr">
+                      <a:solidFill>
+                        <a:srgbClr val="D6DCE8"/>
+                      </a:solidFill>
+                      <a:prstDash val="solid"/>
+                      <a:round/>
+                      <a:headEnd type="none" w="med" len="med"/>
+                      <a:tailEnd type="none" w="med" len="med"/>
+                    </a:lnL>
+                    <a:lnR w="12700" cap="flat" cmpd="sng" algn="ctr">
+                      <a:solidFill>
+                        <a:srgbClr val="D6DCE8"/>
+                      </a:solidFill>
+                      <a:prstDash val="solid"/>
+                      <a:round/>
+                      <a:headEnd type="none" w="med" len="med"/>
+                      <a:tailEnd type="none" w="med" len="med"/>
+                    </a:lnR>
+                    <a:lnT w="12700" cap="flat" cmpd="sng" algn="ctr">
+                      <a:solidFill>
+                        <a:srgbClr val="D6DCE8"/>
+                      </a:solidFill>
+                      <a:prstDash val="solid"/>
+                      <a:round/>
+                      <a:headEnd type="none" w="med" len="med"/>
+                      <a:tailEnd type="none" w="med" len="med"/>
+                    </a:lnT>
+                    <a:lnB w="12700" cap="flat" cmpd="sng" algn="ctr">
+                      <a:solidFill>
+                        <a:srgbClr val="D6DCE8"/>
+                      </a:solidFill>
+                      <a:prstDash val="solid"/>
+                      <a:round/>
+                      <a:headEnd type="none" w="med" len="med"/>
+                      <a:tailEnd type="none" w="med" len="med"/>
+                    </a:lnB>
+                    <a:solidFill>
+                      <a:schemeClr val="bg1"/>
+                    </a:solidFill>
+                  </a:tcPr>
+                </a:tc>
+                <a:tc>
+                  <a:txBody>
+                    <a:bodyPr/>
+                    <a:lstStyle/>
+                    <a:p>
+                      <a:pPr indent="0" marL="0">
+                        <a:buNone/>
+                      </a:pPr>
+                      <a:r>
+                        <a:rPr lang="en-US" sz="1400" dirty="0">
+                          <a:solidFill>
+                            <a:schemeClr val="tx1"/>
+                          </a:solidFill>
+                        </a:rPr>
+                        <a:t>直接办</a:t>
+                      </a:r>
+                      <a:endParaRPr lang="en-US" sz="1400" dirty="0"/>
+                    </a:p>
+                  </a:txBody>
+                  <a:tcPr marL="91440" marR="91440" marT="91440" marB="91440" anchor="ctr">
+                    <a:lnL w="12700" cap="flat" cmpd="sng" algn="ctr">
+                      <a:solidFill>
+                        <a:srgbClr val="D6DCE8"/>
+                      </a:solidFill>
+                      <a:prstDash val="solid"/>
+                      <a:round/>
+                      <a:headEnd type="none" w="med" len="med"/>
+                      <a:tailEnd type="none" w="med" len="med"/>
+                    </a:lnL>
+                    <a:lnR w="12700" cap="flat" cmpd="sng" algn="ctr">
+                      <a:solidFill>
+                        <a:srgbClr val="D6DCE8"/>
+                      </a:solidFill>
+                      <a:prstDash val="solid"/>
+                      <a:round/>
+                      <a:headEnd type="none" w="med" len="med"/>
+                      <a:tailEnd type="none" w="med" len="med"/>
+                    </a:lnR>
+                    <a:lnT w="12700" cap="flat" cmpd="sng" algn="ctr">
+                      <a:solidFill>
+                        <a:srgbClr val="D6DCE8"/>
+                      </a:solidFill>
+                      <a:prstDash val="solid"/>
+                      <a:round/>
+                      <a:headEnd type="none" w="med" len="med"/>
+                      <a:tailEnd type="none" w="med" len="med"/>
+                    </a:lnT>
+                    <a:lnB w="12700" cap="flat" cmpd="sng" algn="ctr">
+                      <a:solidFill>
+                        <a:srgbClr val="D6DCE8"/>
+                      </a:solidFill>
+                      <a:prstDash val="solid"/>
+                      <a:round/>
+                      <a:headEnd type="none" w="med" len="med"/>
+                      <a:tailEnd type="none" w="med" len="med"/>
+                    </a:lnB>
+                    <a:solidFill>
+                      <a:schemeClr val="bg1"/>
+                    </a:solidFill>
+                  </a:tcPr>
+                </a:tc>
+                <a:tc>
+                  <a:txBody>
+                    <a:bodyPr/>
+                    <a:lstStyle/>
+                    <a:p>
+                      <a:pPr indent="0" marL="0">
+                        <a:buNone/>
+                      </a:pPr>
+                      <a:r>
+                        <a:rPr lang="en-US" sz="1400" dirty="0">
+                          <a:solidFill>
+                            <a:schemeClr val="tx1"/>
+                          </a:solidFill>
+                        </a:rPr>
+                        <a:t>直接办</a:t>
+                      </a:r>
+                      <a:endParaRPr lang="en-US" sz="1400" dirty="0"/>
+                    </a:p>
+                  </a:txBody>
+                  <a:tcPr marL="91440" marR="91440" marT="91440" marB="91440" anchor="ctr">
+                    <a:lnL w="12700" cap="flat" cmpd="sng" algn="ctr">
+                      <a:solidFill>
+                        <a:srgbClr val="D6DCE8"/>
+                      </a:solidFill>
+                      <a:prstDash val="solid"/>
+                      <a:round/>
+                      <a:headEnd type="none" w="med" len="med"/>
+                      <a:tailEnd type="none" w="med" len="med"/>
+                    </a:lnL>
+                    <a:lnR w="12700" cap="flat" cmpd="sng" algn="ctr">
+                      <a:solidFill>
+                        <a:srgbClr val="D6DCE8"/>
+                      </a:solidFill>
+                      <a:prstDash val="solid"/>
+                      <a:round/>
+                      <a:headEnd type="none" w="med" len="med"/>
+                      <a:tailEnd type="none" w="med" len="med"/>
+                    </a:lnR>
+                    <a:lnT w="12700" cap="flat" cmpd="sng" algn="ctr">
+                      <a:solidFill>
+                        <a:srgbClr val="D6DCE8"/>
+                      </a:solidFill>
+                      <a:prstDash val="solid"/>
+                      <a:round/>
+                      <a:headEnd type="none" w="med" len="med"/>
+                      <a:tailEnd type="none" w="med" len="med"/>
+                    </a:lnT>
+                    <a:lnB w="12700" cap="flat" cmpd="sng" algn="ctr">
+                      <a:solidFill>
+                        <a:srgbClr val="D6DCE8"/>
+                      </a:solidFill>
+                      <a:prstDash val="solid"/>
+                      <a:round/>
+                      <a:headEnd type="none" w="med" len="med"/>
+                      <a:tailEnd type="none" w="med" len="med"/>
+                    </a:lnB>
+                    <a:solidFill>
+                      <a:schemeClr val="bg1"/>
+                    </a:solidFill>
+                  </a:tcPr>
+                </a:tc>
+              </a:tr>
+              <a:tr h="777240">
+                <a:tc>
+                  <a:txBody>
+                    <a:bodyPr/>
+                    <a:lstStyle/>
+                    <a:p>
+                      <a:pPr indent="0" marL="0">
+                        <a:buNone/>
+                      </a:pPr>
+                      <a:r>
+                        <a:rPr lang="en-US" sz="1400" dirty="0">
+                          <a:solidFill>
+                            <a:srgbClr val="C2710C"/>
+                          </a:solidFill>
+                        </a:rPr>
+                        <a:t>黄档 · 小额</a:t>
+                      </a:r>
+                      <a:endParaRPr lang="en-US" sz="1400" dirty="0"/>
+                    </a:p>
+                  </a:txBody>
+                  <a:tcPr marL="91440" marR="91440" marT="91440" marB="91440" anchor="ctr">
+                    <a:lnL w="12700" cap="flat" cmpd="sng" algn="ctr">
+                      <a:solidFill>
+                        <a:srgbClr val="D6DCE8"/>
+                      </a:solidFill>
+                      <a:prstDash val="solid"/>
+                      <a:round/>
+                      <a:headEnd type="none" w="med" len="med"/>
+                      <a:tailEnd type="none" w="med" len="med"/>
+                    </a:lnL>
+                    <a:lnR w="12700" cap="flat" cmpd="sng" algn="ctr">
+                      <a:solidFill>
+                        <a:srgbClr val="D6DCE8"/>
+                      </a:solidFill>
+                      <a:prstDash val="solid"/>
+                      <a:round/>
+                      <a:headEnd type="none" w="med" len="med"/>
+                      <a:tailEnd type="none" w="med" len="med"/>
+                    </a:lnR>
+                    <a:lnT w="12700" cap="flat" cmpd="sng" algn="ctr">
+                      <a:solidFill>
+                        <a:srgbClr val="D6DCE8"/>
+                      </a:solidFill>
+                      <a:prstDash val="solid"/>
+                      <a:round/>
+                      <a:headEnd type="none" w="med" len="med"/>
+                      <a:tailEnd type="none" w="med" len="med"/>
+                    </a:lnT>
+                    <a:lnB w="12700" cap="flat" cmpd="sng" algn="ctr">
+                      <a:solidFill>
+                        <a:srgbClr val="D6DCE8"/>
+                      </a:solidFill>
+                      <a:prstDash val="solid"/>
+                      <a:round/>
+                      <a:headEnd type="none" w="med" len="med"/>
+                      <a:tailEnd type="none" w="med" len="med"/>
+                    </a:lnB>
+                    <a:solidFill>
+                      <a:schemeClr val="bg1"/>
+                    </a:solidFill>
+                  </a:tcPr>
+                </a:tc>
+                <a:tc>
+                  <a:txBody>
+                    <a:bodyPr/>
+                    <a:lstStyle/>
+                    <a:p>
+                      <a:pPr indent="0" marL="0">
+                        <a:buNone/>
+                      </a:pPr>
+                      <a:r>
+                        <a:rPr lang="en-US" sz="1400" dirty="0">
+                          <a:solidFill>
+                            <a:schemeClr val="tx1"/>
+                          </a:solidFill>
+                        </a:rPr>
+                        <a:t>确认按钮</a:t>
+                      </a:r>
+                      <a:endParaRPr lang="en-US" sz="1400" dirty="0"/>
+                    </a:p>
+                  </a:txBody>
+                  <a:tcPr marL="91440" marR="91440" marT="91440" marB="91440" anchor="ctr">
+                    <a:lnL w="12700" cap="flat" cmpd="sng" algn="ctr">
+                      <a:solidFill>
+                        <a:srgbClr val="D6DCE8"/>
+                      </a:solidFill>
+                      <a:prstDash val="solid"/>
+                      <a:round/>
+                      <a:headEnd type="none" w="med" len="med"/>
+                      <a:tailEnd type="none" w="med" len="med"/>
+                    </a:lnL>
+                    <a:lnR w="12700" cap="flat" cmpd="sng" algn="ctr">
+                      <a:solidFill>
+                        <a:srgbClr val="D6DCE8"/>
+                      </a:solidFill>
+                      <a:prstDash val="solid"/>
+                      <a:round/>
+                      <a:headEnd type="none" w="med" len="med"/>
+                      <a:tailEnd type="none" w="med" len="med"/>
+                    </a:lnR>
+                    <a:lnT w="12700" cap="flat" cmpd="sng" algn="ctr">
+                      <a:solidFill>
+                        <a:srgbClr val="D6DCE8"/>
+                      </a:solidFill>
+                      <a:prstDash val="solid"/>
+                      <a:round/>
+                      <a:headEnd type="none" w="med" len="med"/>
+                      <a:tailEnd type="none" w="med" len="med"/>
+                    </a:lnT>
+                    <a:lnB w="12700" cap="flat" cmpd="sng" algn="ctr">
+                      <a:solidFill>
+                        <a:srgbClr val="D6DCE8"/>
+                      </a:solidFill>
+                      <a:prstDash val="solid"/>
+                      <a:round/>
+                      <a:headEnd type="none" w="med" len="med"/>
+                      <a:tailEnd type="none" w="med" len="med"/>
+                    </a:lnB>
+                    <a:solidFill>
+                      <a:schemeClr val="bg1"/>
+                    </a:solidFill>
+                  </a:tcPr>
+                </a:tc>
+                <a:tc>
+                  <a:txBody>
+                    <a:bodyPr/>
+                    <a:lstStyle/>
+                    <a:p>
+                      <a:pPr indent="0" marL="0">
+                        <a:buNone/>
+                      </a:pPr>
+                      <a:r>
+                        <a:rPr lang="en-US" sz="1400" dirty="0">
+                          <a:solidFill>
+                            <a:schemeClr val="tx1"/>
+                          </a:solidFill>
+                        </a:rPr>
+                        <a:t>飞书卡片上的确认按钮；打字“确认”无效</a:t>
+                      </a:r>
+                      <a:endParaRPr lang="en-US" sz="1400" dirty="0"/>
+                    </a:p>
+                  </a:txBody>
+                  <a:tcPr marL="91440" marR="91440" marT="91440" marB="91440" anchor="ctr">
+                    <a:lnL w="12700" cap="flat" cmpd="sng" algn="ctr">
+                      <a:solidFill>
+                        <a:srgbClr val="D6DCE8"/>
+                      </a:solidFill>
+                      <a:prstDash val="solid"/>
+                      <a:round/>
+                      <a:headEnd type="none" w="med" len="med"/>
+                      <a:tailEnd type="none" w="med" len="med"/>
+                    </a:lnL>
+                    <a:lnR w="12700" cap="flat" cmpd="sng" algn="ctr">
+                      <a:solidFill>
+                        <a:srgbClr val="D6DCE8"/>
+                      </a:solidFill>
+                      <a:prstDash val="solid"/>
+                      <a:round/>
+                      <a:headEnd type="none" w="med" len="med"/>
+                      <a:tailEnd type="none" w="med" len="med"/>
+                    </a:lnR>
+                    <a:lnT w="12700" cap="flat" cmpd="sng" algn="ctr">
+                      <a:solidFill>
+                        <a:srgbClr val="D6DCE8"/>
+                      </a:solidFill>
+                      <a:prstDash val="solid"/>
+                      <a:round/>
+                      <a:headEnd type="none" w="med" len="med"/>
+                      <a:tailEnd type="none" w="med" len="med"/>
+                    </a:lnT>
+                    <a:lnB w="12700" cap="flat" cmpd="sng" algn="ctr">
+                      <a:solidFill>
+                        <a:srgbClr val="D6DCE8"/>
+                      </a:solidFill>
+                      <a:prstDash val="solid"/>
+                      <a:round/>
+                      <a:headEnd type="none" w="med" len="med"/>
+                      <a:tailEnd type="none" w="med" len="med"/>
+                    </a:lnB>
+                    <a:solidFill>
+                      <a:schemeClr val="bg1"/>
+                    </a:solidFill>
+                  </a:tcPr>
+                </a:tc>
+              </a:tr>
+              <a:tr h="777240">
+                <a:tc>
+                  <a:txBody>
+                    <a:bodyPr/>
+                    <a:lstStyle/>
+                    <a:p>
+                      <a:pPr indent="0" marL="0">
+                        <a:buNone/>
+                      </a:pPr>
+                      <a:r>
+                        <a:rPr lang="en-US" sz="1400" dirty="0">
+                          <a:solidFill>
+                            <a:srgbClr val="DC2626"/>
+                          </a:solidFill>
+                        </a:rPr>
+                        <a:t>红档 · 大额</a:t>
+                      </a:r>
+                      <a:endParaRPr lang="en-US" sz="1400" dirty="0"/>
+                    </a:p>
+                  </a:txBody>
+                  <a:tcPr marL="91440" marR="91440" marT="91440" marB="91440" anchor="ctr">
+                    <a:lnL w="12700" cap="flat" cmpd="sng" algn="ctr">
+                      <a:solidFill>
+                        <a:srgbClr val="D6DCE8"/>
+                      </a:solidFill>
+                      <a:prstDash val="solid"/>
+                      <a:round/>
+                      <a:headEnd type="none" w="med" len="med"/>
+                      <a:tailEnd type="none" w="med" len="med"/>
+                    </a:lnL>
+                    <a:lnR w="12700" cap="flat" cmpd="sng" algn="ctr">
+                      <a:solidFill>
+                        <a:srgbClr val="D6DCE8"/>
+                      </a:solidFill>
+                      <a:prstDash val="solid"/>
+                      <a:round/>
+                      <a:headEnd type="none" w="med" len="med"/>
+                      <a:tailEnd type="none" w="med" len="med"/>
+                    </a:lnR>
+                    <a:lnT w="12700" cap="flat" cmpd="sng" algn="ctr">
+                      <a:solidFill>
+                        <a:srgbClr val="D6DCE8"/>
+                      </a:solidFill>
+                      <a:prstDash val="solid"/>
+                      <a:round/>
+                      <a:headEnd type="none" w="med" len="med"/>
+                      <a:tailEnd type="none" w="med" len="med"/>
+                    </a:lnT>
+                    <a:lnB w="12700" cap="flat" cmpd="sng" algn="ctr">
+                      <a:solidFill>
+                        <a:srgbClr val="D6DCE8"/>
+                      </a:solidFill>
+                      <a:prstDash val="solid"/>
+                      <a:round/>
+                      <a:headEnd type="none" w="med" len="med"/>
+                      <a:tailEnd type="none" w="med" len="med"/>
+                    </a:lnB>
+                    <a:solidFill>
+                      <a:schemeClr val="bg1"/>
+                    </a:solidFill>
+                  </a:tcPr>
+                </a:tc>
+                <a:tc>
+                  <a:txBody>
+                    <a:bodyPr/>
+                    <a:lstStyle/>
+                    <a:p>
+                      <a:pPr indent="0" marL="0">
+                        <a:buNone/>
+                      </a:pPr>
+                      <a:r>
+                        <a:rPr lang="en-US" sz="1400" dirty="0">
+                          <a:solidFill>
+                            <a:schemeClr val="tx1"/>
+                          </a:solidFill>
+                        </a:rPr>
+                        <a:t>交易密码 + 短信动态码</a:t>
+                      </a:r>
+                      <a:endParaRPr lang="en-US" sz="1400" dirty="0"/>
+                    </a:p>
+                  </a:txBody>
+                  <a:tcPr marL="91440" marR="91440" marT="91440" marB="91440" anchor="ctr">
+                    <a:lnL w="12700" cap="flat" cmpd="sng" algn="ctr">
+                      <a:solidFill>
+                        <a:srgbClr val="D6DCE8"/>
+                      </a:solidFill>
+                      <a:prstDash val="solid"/>
+                      <a:round/>
+                      <a:headEnd type="none" w="med" len="med"/>
+                      <a:tailEnd type="none" w="med" len="med"/>
+                    </a:lnL>
+                    <a:lnR w="12700" cap="flat" cmpd="sng" algn="ctr">
+                      <a:solidFill>
+                        <a:srgbClr val="D6DCE8"/>
+                      </a:solidFill>
+                      <a:prstDash val="solid"/>
+                      <a:round/>
+                      <a:headEnd type="none" w="med" len="med"/>
+                      <a:tailEnd type="none" w="med" len="med"/>
+                    </a:lnR>
+                    <a:lnT w="12700" cap="flat" cmpd="sng" algn="ctr">
+                      <a:solidFill>
+                        <a:srgbClr val="D6DCE8"/>
+                      </a:solidFill>
+                      <a:prstDash val="solid"/>
+                      <a:round/>
+                      <a:headEnd type="none" w="med" len="med"/>
+                      <a:tailEnd type="none" w="med" len="med"/>
+                    </a:lnT>
+                    <a:lnB w="12700" cap="flat" cmpd="sng" algn="ctr">
+                      <a:solidFill>
+                        <a:srgbClr val="D6DCE8"/>
+                      </a:solidFill>
+                      <a:prstDash val="solid"/>
+                      <a:round/>
+                      <a:headEnd type="none" w="med" len="med"/>
+                      <a:tailEnd type="none" w="med" len="med"/>
+                    </a:lnB>
+                    <a:solidFill>
+                      <a:schemeClr val="bg1"/>
+                    </a:solidFill>
+                  </a:tcPr>
+                </a:tc>
+                <a:tc>
+                  <a:txBody>
+                    <a:bodyPr/>
+                    <a:lstStyle/>
+                    <a:p>
+                      <a:pPr indent="0" marL="0">
+                        <a:buNone/>
+                      </a:pPr>
+                      <a:r>
+                        <a:rPr lang="en-US" sz="1400" dirty="0">
+                          <a:solidFill>
+                            <a:schemeClr val="tx1"/>
+                          </a:solidFill>
+                        </a:rPr>
+                        <a:t>只生成待办，回 App 强验证；动态码绝不发到飞书</a:t>
+                      </a:r>
+                      <a:endParaRPr lang="en-US" sz="1400" dirty="0"/>
+                    </a:p>
+                  </a:txBody>
+                  <a:tcPr marL="91440" marR="91440" marT="91440" marB="91440" anchor="ctr">
+                    <a:lnL w="12700" cap="flat" cmpd="sng" algn="ctr">
+                      <a:solidFill>
+                        <a:srgbClr val="D6DCE8"/>
+                      </a:solidFill>
+                      <a:prstDash val="solid"/>
+                      <a:round/>
+                      <a:headEnd type="none" w="med" len="med"/>
+                      <a:tailEnd type="none" w="med" len="med"/>
+                    </a:lnL>
+                    <a:lnR w="12700" cap="flat" cmpd="sng" algn="ctr">
+                      <a:solidFill>
+                        <a:srgbClr val="D6DCE8"/>
+                      </a:solidFill>
+                      <a:prstDash val="solid"/>
+                      <a:round/>
+                      <a:headEnd type="none" w="med" len="med"/>
+                      <a:tailEnd type="none" w="med" len="med"/>
+                    </a:lnR>
+                    <a:lnT w="12700" cap="flat" cmpd="sng" algn="ctr">
+                      <a:solidFill>
+                        <a:srgbClr val="D6DCE8"/>
+                      </a:solidFill>
+                      <a:prstDash val="solid"/>
+                      <a:round/>
+                      <a:headEnd type="none" w="med" len="med"/>
+                      <a:tailEnd type="none" w="med" len="med"/>
+                    </a:lnT>
+                    <a:lnB w="12700" cap="flat" cmpd="sng" algn="ctr">
+                      <a:solidFill>
+                        <a:srgbClr val="D6DCE8"/>
+                      </a:solidFill>
+                      <a:prstDash val="solid"/>
+                      <a:round/>
+                      <a:headEnd type="none" w="med" len="med"/>
+                      <a:tailEnd type="none" w="med" len="med"/>
+                    </a:lnB>
+                    <a:solidFill>
+                      <a:schemeClr val="bg1"/>
+                    </a:solidFill>
+                  </a:tcPr>
+                </a:tc>
+              </a:tr>
+              <a:tr h="777240">
+                <a:tc>
+                  <a:txBody>
+                    <a:bodyPr/>
+                    <a:lstStyle/>
+                    <a:p>
+                      <a:pPr indent="0" marL="0">
+                        <a:buNone/>
+                      </a:pPr>
+                      <a:r>
+                        <a:rPr lang="en-US" sz="1400" dirty="0">
+                          <a:solidFill>
+                            <a:schemeClr val="tx1"/>
+                          </a:solidFill>
+                        </a:rPr>
+                        <a:t>准入</a:t>
+                      </a:r>
+                      <a:endParaRPr lang="en-US" sz="1400" dirty="0"/>
+                    </a:p>
+                  </a:txBody>
+                  <a:tcPr marL="91440" marR="91440" marT="91440" marB="91440" anchor="ctr">
+                    <a:lnL w="12700" cap="flat" cmpd="sng" algn="ctr">
+                      <a:solidFill>
+                        <a:srgbClr val="D6DCE8"/>
+                      </a:solidFill>
+                      <a:prstDash val="solid"/>
+                      <a:round/>
+                      <a:headEnd type="none" w="med" len="med"/>
+                      <a:tailEnd type="none" w="med" len="med"/>
+                    </a:lnL>
+                    <a:lnR w="12700" cap="flat" cmpd="sng" algn="ctr">
+                      <a:solidFill>
+                        <a:srgbClr val="D6DCE8"/>
+                      </a:solidFill>
+                      <a:prstDash val="solid"/>
+                      <a:round/>
+                      <a:headEnd type="none" w="med" len="med"/>
+                      <a:tailEnd type="none" w="med" len="med"/>
+                    </a:lnR>
+                    <a:lnT w="12700" cap="flat" cmpd="sng" algn="ctr">
+                      <a:solidFill>
+                        <a:srgbClr val="D6DCE8"/>
+                      </a:solidFill>
+                      <a:prstDash val="solid"/>
+                      <a:round/>
+                      <a:headEnd type="none" w="med" len="med"/>
+                      <a:tailEnd type="none" w="med" len="med"/>
+                    </a:lnT>
+                    <a:lnB w="12700" cap="flat" cmpd="sng" algn="ctr">
+                      <a:solidFill>
+                        <a:srgbClr val="D6DCE8"/>
+                      </a:solidFill>
+                      <a:prstDash val="solid"/>
+                      <a:round/>
+                      <a:headEnd type="none" w="med" len="med"/>
+                      <a:tailEnd type="none" w="med" len="med"/>
+                    </a:lnB>
+                    <a:solidFill>
+                      <a:schemeClr val="bg1"/>
+                    </a:solidFill>
+                  </a:tcPr>
+                </a:tc>
+                <a:tc>
+                  <a:txBody>
+                    <a:bodyPr/>
+                    <a:lstStyle/>
+                    <a:p>
+                      <a:pPr indent="0" marL="0">
+                        <a:buNone/>
+                      </a:pPr>
+                      <a:r>
+                        <a:rPr lang="en-US" sz="1400" dirty="0">
+                          <a:solidFill>
+                            <a:schemeClr val="tx1"/>
+                          </a:solidFill>
+                        </a:rPr>
+                        <a:t>演示登录</a:t>
+                      </a:r>
+                      <a:endParaRPr lang="en-US" sz="1400" dirty="0"/>
+                    </a:p>
+                  </a:txBody>
+                  <a:tcPr marL="91440" marR="91440" marT="91440" marB="91440" anchor="ctr">
+                    <a:lnL w="12700" cap="flat" cmpd="sng" algn="ctr">
+                      <a:solidFill>
+                        <a:srgbClr val="D6DCE8"/>
+                      </a:solidFill>
+                      <a:prstDash val="solid"/>
+                      <a:round/>
+                      <a:headEnd type="none" w="med" len="med"/>
+                      <a:tailEnd type="none" w="med" len="med"/>
+                    </a:lnL>
+                    <a:lnR w="12700" cap="flat" cmpd="sng" algn="ctr">
+                      <a:solidFill>
+                        <a:srgbClr val="D6DCE8"/>
+                      </a:solidFill>
+                      <a:prstDash val="solid"/>
+                      <a:round/>
+                      <a:headEnd type="none" w="med" len="med"/>
+                      <a:tailEnd type="none" w="med" len="med"/>
+                    </a:lnR>
+                    <a:lnT w="12700" cap="flat" cmpd="sng" algn="ctr">
+                      <a:solidFill>
+                        <a:srgbClr val="D6DCE8"/>
+                      </a:solidFill>
+                      <a:prstDash val="solid"/>
+                      <a:round/>
+                      <a:headEnd type="none" w="med" len="med"/>
+                      <a:tailEnd type="none" w="med" len="med"/>
+                    </a:lnT>
+                    <a:lnB w="12700" cap="flat" cmpd="sng" algn="ctr">
+                      <a:solidFill>
+                        <a:srgbClr val="D6DCE8"/>
+                      </a:solidFill>
+                      <a:prstDash val="solid"/>
+                      <a:round/>
+                      <a:headEnd type="none" w="med" len="med"/>
+                      <a:tailEnd type="none" w="med" len="med"/>
+                    </a:lnB>
+                    <a:solidFill>
+                      <a:schemeClr val="bg1"/>
+                    </a:solidFill>
+                  </a:tcPr>
+                </a:tc>
+                <a:tc>
+                  <a:txBody>
+                    <a:bodyPr/>
+                    <a:lstStyle/>
+                    <a:p>
+                      <a:pPr indent="0" marL="0">
+                        <a:buNone/>
+                      </a:pPr>
+                      <a:r>
+                        <a:rPr lang="en-US" sz="1400" dirty="0">
+                          <a:solidFill>
+                            <a:schemeClr val="tx1"/>
+                          </a:solidFill>
+                        </a:rPr>
+                        <a:t>App 内生成一次性绑定码；只处理私聊，群聊忽略</a:t>
+                      </a:r>
+                      <a:endParaRPr lang="en-US" sz="1400" dirty="0"/>
+                    </a:p>
+                  </a:txBody>
+                  <a:tcPr marL="91440" marR="91440" marT="91440" marB="91440" anchor="ctr">
+                    <a:lnL w="12700" cap="flat" cmpd="sng" algn="ctr">
+                      <a:solidFill>
+                        <a:srgbClr val="D6DCE8"/>
+                      </a:solidFill>
+                      <a:prstDash val="solid"/>
+                      <a:round/>
+                      <a:headEnd type="none" w="med" len="med"/>
+                      <a:tailEnd type="none" w="med" len="med"/>
+                    </a:lnL>
+                    <a:lnR w="12700" cap="flat" cmpd="sng" algn="ctr">
+                      <a:solidFill>
+                        <a:srgbClr val="D6DCE8"/>
+                      </a:solidFill>
+                      <a:prstDash val="solid"/>
+                      <a:round/>
+                      <a:headEnd type="none" w="med" len="med"/>
+                      <a:tailEnd type="none" w="med" len="med"/>
+                    </a:lnR>
+                    <a:lnT w="12700" cap="flat" cmpd="sng" algn="ctr">
+                      <a:solidFill>
+                        <a:srgbClr val="D6DCE8"/>
+                      </a:solidFill>
+                      <a:prstDash val="solid"/>
+                      <a:round/>
+                      <a:headEnd type="none" w="med" len="med"/>
+                      <a:tailEnd type="none" w="med" len="med"/>
+                    </a:lnT>
+                    <a:lnB w="12700" cap="flat" cmpd="sng" algn="ctr">
+                      <a:solidFill>
+                        <a:srgbClr val="D6DCE8"/>
+                      </a:solidFill>
+                      <a:prstDash val="solid"/>
+                      <a:round/>
+                      <a:headEnd type="none" w="med" len="med"/>
+                      <a:tailEnd type="none" w="med" len="med"/>
+                    </a:lnB>
+                    <a:solidFill>
+                      <a:schemeClr val="bg1"/>
+                    </a:solidFill>
+                  </a:tcPr>
+                </a:tc>
+              </a:tr>
+            </a:tbl>
+          </a:graphicData>
+        </a:graphic>
+      </p:graphicFrame>
+      <p:sp>
+        <p:nvSpPr>
+          <p:cNvPr id="5" name="Text 2"/>
+          <p:cNvSpPr txBox="1"/>
+          <p:nvPr/>
+        </p:nvSpPr>
+        <p:spPr>
+          <a:xfrm>
+            <a:off x="548640" y="5623560"/>
+            <a:ext cx="7863840" cy="640080"/>
+          </a:xfrm>
+          <a:prstGeom prst="rect">
+            <a:avLst/>
+          </a:prstGeom>
+          <a:noFill/>
+          <a:ln/>
+        </p:spPr>
+        <p:txBody>
+          <a:bodyPr wrap="square" lIns="0" tIns="0" rIns="0" bIns="0" rtlCol="0" anchor="ctr"/>
+          <a:lstStyle/>
+          <a:p>
+            <a:pPr indent="0" marL="0">
+              <a:buNone/>
+            </a:pPr>
+            <a:r>
+              <a:rPr lang="en-US" sz="1300" dirty="0">
+                <a:solidFill>
+                  <a:schemeClr val="accent6"/>
+                </a:solidFill>
+              </a:rPr>
+              <a:t>飞书机器人用长连接，不需要公网地址；主动推送定时任务结果、续费和生日提醒、AA 收款。真机联调待队长建好飞书应用后进行。</a:t>
+            </a:r>
+            <a:endParaRPr lang="en-US" sz="1300" dirty="0"/>
           </a:p>
         </p:txBody>
       </p:sp>
       <p:pic>
         <p:nvPicPr>
-          <p:cNvPr id="4" name="Image 0" descr="生日筹备计划 DAG">    </p:cNvPr>
+          <p:cNvPr id="6" name="Image 0" descr="界面截图：16-feishu-bind.png">    </p:cNvPr>
           <p:cNvPicPr>
             <a:picLocks noChangeAspect="1"/>
           </p:cNvPicPr>
@@ -9557,32 +11086,8 @@
         </p:blipFill>
         <p:spPr>
           <a:xfrm>
-            <a:off x="548640" y="1508760"/>
-            <a:ext cx="4663440" cy="4649492"/>
-          </a:xfrm>
-          <a:prstGeom prst="rect">
-            <a:avLst/>
-          </a:prstGeom>
-        </p:spPr>
-      </p:pic>
-      <p:pic>
-        <p:nvPicPr>
-          <p:cNvPr id="5" name="Image 1" descr="界面截图：09-plan-running.png">    </p:cNvPr>
-          <p:cNvPicPr>
-            <a:picLocks noChangeAspect="1"/>
-          </p:cNvPicPr>
-          <p:nvPr/>
-        </p:nvPicPr>
-        <p:blipFill>
-          <a:blip r:embed="rId2"/>
-          <a:stretch>
-            <a:fillRect/>
-          </a:stretch>
-        </p:blipFill>
-        <p:spPr>
-          <a:xfrm>
-            <a:off x="5532120" y="1463040"/>
-            <a:ext cx="2197160" cy="4754880"/>
+            <a:off x="8915400" y="1417320"/>
+            <a:ext cx="2239413" cy="4846320"/>
           </a:xfrm>
           <a:prstGeom prst="rect">
             <a:avLst/>
@@ -9596,156 +11101,6 @@
           </a:effectLst>
         </p:spPr>
       </p:pic>
-      <p:sp>
-        <p:nvSpPr>
-          <p:cNvPr id="6" name="Text 2"/>
-          <p:cNvSpPr txBox="1"/>
-          <p:nvPr/>
-        </p:nvSpPr>
-        <p:spPr>
-          <a:xfrm>
-            <a:off x="7909560" y="1554480"/>
-            <a:ext cx="3749040" cy="4572000"/>
-          </a:xfrm>
-          <a:prstGeom prst="rect">
-            <a:avLst/>
-          </a:prstGeom>
-          <a:noFill/>
-          <a:ln/>
-        </p:spPr>
-        <p:txBody>
-          <a:bodyPr wrap="square" lIns="0" tIns="0" rIns="0" bIns="0" rtlCol="0" anchor="t"/>
-          <a:lstStyle/>
-          <a:p>
-            <a:pPr marL="228600" indent="-228600">
-              <a:spcAft>
-                <a:spcPts val="800"/>
-              </a:spcAft>
-              <a:buSzPct val="100000"/>
-              <a:buChar char="•"/>
-            </a:pPr>
-            <a:r>
-              <a:rPr lang="en-US" sz="1500" b="1" dirty="0">
-                <a:solidFill>
-                  <a:schemeClr val="tx1"/>
-                </a:solidFill>
-              </a:rPr>
-              <a:t>工具调用：</a:t>
-            </a:r>
-            <a:pPr indent="0" marL="0">
-              <a:spcAft>
-                <a:spcPts val="800"/>
-              </a:spcAft>
-              <a:buNone/>
-            </a:pPr>
-            <a:r>
-              <a:rPr lang="en-US" sz="1500" dirty="0">
-                <a:solidFill>
-                  <a:schemeClr val="tx1"/>
-                </a:solidFill>
-              </a:rPr>
-              <a:t>DeepSeek 原生工具调用，一轮最多 6 步，可并行（如同时解析日期和联系人）</a:t>
-            </a:r>
-            <a:endParaRPr lang="en-US" sz="1500" dirty="0"/>
-          </a:p>
-          <a:p>
-            <a:pPr marL="228600" indent="-228600">
-              <a:spcAft>
-                <a:spcPts val="800"/>
-              </a:spcAft>
-              <a:buSzPct val="100000"/>
-              <a:buChar char="•"/>
-            </a:pPr>
-            <a:r>
-              <a:rPr lang="en-US" sz="1500" b="1" dirty="0">
-                <a:solidFill>
-                  <a:schemeClr val="tx1"/>
-                </a:solidFill>
-              </a:rPr>
-              <a:t>一次确认整个计划：</a:t>
-            </a:r>
-            <a:pPr indent="0" marL="0">
-              <a:spcAft>
-                <a:spcPts val="800"/>
-              </a:spcAft>
-              <a:buNone/>
-            </a:pPr>
-            <a:r>
-              <a:rPr lang="en-US" sz="1500" dirty="0">
-                <a:solidFill>
-                  <a:schemeClr val="tx1"/>
-                </a:solidFill>
-              </a:rPr>
-              <a:t>绑定全部节点参数哈希，档位取最高档</a:t>
-            </a:r>
-            <a:endParaRPr lang="en-US" sz="1500" dirty="0"/>
-          </a:p>
-          <a:p>
-            <a:pPr marL="228600" indent="-228600">
-              <a:spcAft>
-                <a:spcPts val="800"/>
-              </a:spcAft>
-              <a:buSzPct val="100000"/>
-              <a:buChar char="•"/>
-            </a:pPr>
-            <a:r>
-              <a:rPr lang="en-US" sz="1500" b="1" dirty="0">
-                <a:solidFill>
-                  <a:schemeClr val="tx1"/>
-                </a:solidFill>
-              </a:rPr>
-              <a:t>到点执行：</a:t>
-            </a:r>
-            <a:pPr indent="0" marL="0">
-              <a:spcAft>
-                <a:spcPts val="800"/>
-              </a:spcAft>
-              <a:buNone/>
-            </a:pPr>
-            <a:r>
-              <a:rPr lang="en-US" sz="1500" dirty="0">
-                <a:solidFill>
-                  <a:schemeClr val="tx1"/>
-                </a:solidFill>
-              </a:rPr>
-              <a:t>调度器按执行日重新判档，超出授权就不执行</a:t>
-            </a:r>
-            <a:endParaRPr lang="en-US" sz="1500" dirty="0"/>
-          </a:p>
-          <a:p>
-            <a:pPr marL="228600" indent="-228600">
-              <a:spcAft>
-                <a:spcPts val="800"/>
-              </a:spcAft>
-              <a:buSzPct val="100000"/>
-              <a:buChar char="•"/>
-            </a:pPr>
-            <a:r>
-              <a:rPr lang="en-US" sz="1500" b="1" dirty="0">
-                <a:solidFill>
-                  <a:schemeClr val="tx1"/>
-                </a:solidFill>
-              </a:rPr>
-              <a:t>可中断：</a:t>
-            </a:r>
-            <a:pPr indent="0" marL="0">
-              <a:spcAft>
-                <a:spcPts val="800"/>
-              </a:spcAft>
-              <a:buNone/>
-            </a:pPr>
-            <a:r>
-              <a:rPr lang="en-US" sz="1500" dirty="0">
-                <a:solidFill>
-                  <a:schemeClr val="tx1"/>
-                </a:solidFill>
-              </a:rPr>
-              <a:t>暂停、继续、去掉一步、全部回退（释放预算）、转人工</a:t>
-            </a:r>
-            <a:endParaRPr lang="en-US" sz="1500" dirty="0"/>
-          </a:p>
-        </p:txBody>
-      </p:sp>
       <p:sp>
         <p:nvSpPr>
           <p:cNvPr id="25" name="Slide Number Placeholder 0"/>
@@ -9846,7 +11201,7 @@
                   <a:schemeClr val="tx2"/>
                 </a:solidFill>
               </a:rPr>
-              <a:t>权限三档，全部由代码判定</a:t>
+              <a:t>Agent 规划：工具调用 + DAG 计划，一次确认</a:t>
             </a:r>
             <a:endParaRPr lang="en-US" sz="3000" dirty="0"/>
           </a:p>
@@ -9882,74 +11237,77 @@
                   <a:schemeClr val="accent6"/>
                 </a:solidFill>
               </a:rPr>
-              <a:t>模型输出里没有“档位”这个字段，也无法传入</a:t>
+              <a:t>复杂任务拆成有依赖关系的步骤，代码校验后整体确认、到点执行、随时可回退</a:t>
             </a:r>
             <a:endParaRPr lang="en-US" sz="1500" dirty="0"/>
           </a:p>
         </p:txBody>
       </p:sp>
-      <p:sp>
-        <p:nvSpPr>
-          <p:cNvPr id="4" name="卡片-绿档 · 自动执行"/>
-          <p:cNvSpPr/>
-          <p:nvPr/>
-        </p:nvSpPr>
-        <p:spPr>
-          <a:xfrm>
-            <a:off x="548640" y="1554480"/>
-            <a:ext cx="6949440" cy="1417320"/>
-          </a:xfrm>
-          <a:prstGeom prst="roundRect">
-            <a:avLst>
-              <a:gd name="adj" fmla="val 7742"/>
-            </a:avLst>
-          </a:prstGeom>
-          <a:solidFill>
-            <a:schemeClr val="bg2"/>
-          </a:solidFill>
-          <a:ln w="12700">
-            <a:solidFill>
-              <a:schemeClr val="bg2"/>
-            </a:solidFill>
-            <a:prstDash val="solid"/>
-          </a:ln>
-        </p:spPr>
-      </p:sp>
-      <p:sp>
-        <p:nvSpPr>
-          <p:cNvPr id="5" name="圆标-绿"/>
-          <p:cNvSpPr/>
-          <p:nvPr/>
-        </p:nvSpPr>
-        <p:spPr>
-          <a:xfrm>
-            <a:off x="777240" y="1783080"/>
-            <a:ext cx="566928" cy="566928"/>
-          </a:xfrm>
-          <a:prstGeom prst="ellipse">
-            <a:avLst/>
-          </a:prstGeom>
-          <a:solidFill>
-            <a:schemeClr val="accent2"/>
-          </a:solidFill>
-          <a:ln w="12700">
-            <a:solidFill>
-              <a:schemeClr val="accent2"/>
-            </a:solidFill>
-            <a:prstDash val="solid"/>
-          </a:ln>
-        </p:spPr>
-      </p:sp>
-      <p:sp>
-        <p:nvSpPr>
-          <p:cNvPr id="6" name="Text 4"/>
+      <p:pic>
+        <p:nvPicPr>
+          <p:cNvPr id="4" name="Image 0" descr="生日筹备计划 DAG">    </p:cNvPr>
+          <p:cNvPicPr>
+            <a:picLocks noChangeAspect="1"/>
+          </p:cNvPicPr>
+          <p:nvPr/>
+        </p:nvPicPr>
+        <p:blipFill>
+          <a:blip r:embed="rId1"/>
+          <a:stretch>
+            <a:fillRect/>
+          </a:stretch>
+        </p:blipFill>
+        <p:spPr>
+          <a:xfrm>
+            <a:off x="548640" y="1508760"/>
+            <a:ext cx="4663440" cy="4649492"/>
+          </a:xfrm>
+          <a:prstGeom prst="rect">
+            <a:avLst/>
+          </a:prstGeom>
+        </p:spPr>
+      </p:pic>
+      <p:pic>
+        <p:nvPicPr>
+          <p:cNvPr id="5" name="Image 1" descr="界面截图：09-plan-running.png">    </p:cNvPr>
+          <p:cNvPicPr>
+            <a:picLocks noChangeAspect="1"/>
+          </p:cNvPicPr>
+          <p:nvPr/>
+        </p:nvPicPr>
+        <p:blipFill>
+          <a:blip r:embed="rId2"/>
+          <a:stretch>
+            <a:fillRect/>
+          </a:stretch>
+        </p:blipFill>
+        <p:spPr>
+          <a:xfrm>
+            <a:off x="5532120" y="1463040"/>
+            <a:ext cx="2197160" cy="4754880"/>
+          </a:xfrm>
+          <a:prstGeom prst="rect">
+            <a:avLst/>
+          </a:prstGeom>
+          <a:effectLst>
+            <a:outerShdw sx="100000" sy="100000" kx="0" ky="0" algn="bl" rotWithShape="0" blurRad="101600" dist="38100" dir="5400000">
+              <a:srgbClr val="000000">
+                <a:alpha val="25000"/>
+              </a:srgbClr>
+            </a:outerShdw>
+          </a:effectLst>
+        </p:spPr>
+      </p:pic>
+      <p:sp>
+        <p:nvSpPr>
+          <p:cNvPr id="6" name="Text 2"/>
           <p:cNvSpPr txBox="1"/>
           <p:nvPr/>
         </p:nvSpPr>
         <p:spPr>
           <a:xfrm>
-            <a:off x="777240" y="1783080"/>
-            <a:ext cx="566928" cy="566928"/>
+            <a:off x="7909560" y="1554480"/>
+            <a:ext cx="3749040" cy="4572000"/>
           </a:xfrm>
           <a:prstGeom prst="rect">
             <a:avLst/>
@@ -9958,615 +11316,133 @@
           <a:ln/>
         </p:spPr>
         <p:txBody>
-          <a:bodyPr wrap="square" lIns="0" tIns="0" rIns="0" bIns="0" rtlCol="0" anchor="ctr"/>
-          <a:lstStyle/>
-          <a:p>
-            <a:pPr algn="ctr" indent="0" marL="0">
-              <a:buNone/>
-            </a:pPr>
-            <a:r>
-              <a:rPr lang="en-US" sz="1700" b="1" dirty="0">
-                <a:solidFill>
-                  <a:schemeClr val="bg1"/>
-                </a:solidFill>
-              </a:rPr>
-              <a:t>绿</a:t>
-            </a:r>
-            <a:endParaRPr lang="en-US" sz="1700" dirty="0"/>
-          </a:p>
-        </p:txBody>
-      </p:sp>
-      <p:sp>
-        <p:nvSpPr>
-          <p:cNvPr id="7" name="Text 5"/>
-          <p:cNvSpPr txBox="1"/>
-          <p:nvPr/>
-        </p:nvSpPr>
-        <p:spPr>
-          <a:xfrm>
-            <a:off x="1508760" y="1755648"/>
-            <a:ext cx="5806440" cy="457200"/>
-          </a:xfrm>
-          <a:prstGeom prst="rect">
-            <a:avLst/>
-          </a:prstGeom>
-          <a:noFill/>
-          <a:ln/>
-        </p:spPr>
-        <p:txBody>
-          <a:bodyPr wrap="square" lIns="0" tIns="0" rIns="0" bIns="0" rtlCol="0" anchor="ctr"/>
-          <a:lstStyle/>
-          <a:p>
-            <a:pPr indent="0" marL="0">
-              <a:buNone/>
-            </a:pPr>
-            <a:r>
-              <a:rPr lang="en-US" sz="1700" b="1" dirty="0">
-                <a:solidFill>
-                  <a:schemeClr val="tx2"/>
-                </a:solidFill>
-              </a:rPr>
-              <a:t>绿档 · 自动执行</a:t>
-            </a:r>
-            <a:endParaRPr lang="en-US" sz="1700" dirty="0"/>
-          </a:p>
-        </p:txBody>
-      </p:sp>
-      <p:sp>
-        <p:nvSpPr>
-          <p:cNvPr id="8" name="Text 6"/>
-          <p:cNvSpPr txBox="1"/>
-          <p:nvPr/>
-        </p:nvSpPr>
-        <p:spPr>
-          <a:xfrm>
-            <a:off x="777240" y="2450592"/>
-            <a:ext cx="6492240" cy="365760"/>
-          </a:xfrm>
-          <a:prstGeom prst="rect">
-            <a:avLst/>
-          </a:prstGeom>
-          <a:noFill/>
-          <a:ln/>
-        </p:spPr>
-        <p:txBody>
           <a:bodyPr wrap="square" lIns="0" tIns="0" rIns="0" bIns="0" rtlCol="0" anchor="t"/>
           <a:lstStyle/>
           <a:p>
-            <a:pPr indent="0" marL="0">
+            <a:pPr marL="228600" indent="-228600">
               <a:spcAft>
-                <a:spcPts val="400"/>
+                <a:spcPts val="800"/>
               </a:spcAft>
-              <a:buNone/>
-            </a:pPr>
-            <a:r>
-              <a:rPr lang="en-US" sz="1400" dirty="0">
+              <a:buSzPct val="100000"/>
+              <a:buChar char="•"/>
+            </a:pPr>
+            <a:r>
+              <a:rPr lang="en-US" sz="1500" b="1" dirty="0">
                 <a:solidFill>
                   <a:schemeClr val="tx1"/>
                 </a:solidFill>
               </a:rPr>
-              <a:t>查询、统计、月报年报、异常识别、产品对比、沙箱分析</a:t>
-            </a:r>
-            <a:endParaRPr lang="en-US" sz="1400" dirty="0"/>
-          </a:p>
-        </p:txBody>
-      </p:sp>
-      <p:sp>
-        <p:nvSpPr>
-          <p:cNvPr id="9" name="卡片-黄档 · 确认按钮"/>
-          <p:cNvSpPr/>
-          <p:nvPr/>
-        </p:nvSpPr>
-        <p:spPr>
-          <a:xfrm>
-            <a:off x="548640" y="3127248"/>
-            <a:ext cx="6949440" cy="1417320"/>
-          </a:xfrm>
-          <a:prstGeom prst="roundRect">
-            <a:avLst>
-              <a:gd name="adj" fmla="val 7742"/>
-            </a:avLst>
-          </a:prstGeom>
-          <a:solidFill>
-            <a:schemeClr val="bg2"/>
-          </a:solidFill>
-          <a:ln w="12700">
-            <a:solidFill>
-              <a:schemeClr val="bg2"/>
-            </a:solidFill>
-            <a:prstDash val="solid"/>
-          </a:ln>
-        </p:spPr>
-      </p:sp>
-      <p:sp>
-        <p:nvSpPr>
-          <p:cNvPr id="10" name="圆标-黄"/>
-          <p:cNvSpPr/>
-          <p:nvPr/>
-        </p:nvSpPr>
-        <p:spPr>
-          <a:xfrm>
-            <a:off x="777240" y="3355848"/>
-            <a:ext cx="566928" cy="566928"/>
-          </a:xfrm>
-          <a:prstGeom prst="ellipse">
-            <a:avLst/>
-          </a:prstGeom>
-          <a:solidFill>
-            <a:schemeClr val="accent3"/>
-          </a:solidFill>
-          <a:ln w="12700">
-            <a:solidFill>
-              <a:schemeClr val="accent3"/>
-            </a:solidFill>
-            <a:prstDash val="solid"/>
-          </a:ln>
-        </p:spPr>
-      </p:sp>
-      <p:sp>
-        <p:nvSpPr>
-          <p:cNvPr id="11" name="Text 9"/>
-          <p:cNvSpPr txBox="1"/>
-          <p:nvPr/>
-        </p:nvSpPr>
-        <p:spPr>
-          <a:xfrm>
-            <a:off x="777240" y="3355848"/>
-            <a:ext cx="566928" cy="566928"/>
-          </a:xfrm>
-          <a:prstGeom prst="rect">
-            <a:avLst/>
-          </a:prstGeom>
-          <a:noFill/>
-          <a:ln/>
-        </p:spPr>
-        <p:txBody>
-          <a:bodyPr wrap="square" lIns="0" tIns="0" rIns="0" bIns="0" rtlCol="0" anchor="ctr"/>
-          <a:lstStyle/>
-          <a:p>
-            <a:pPr algn="ctr" indent="0" marL="0">
-              <a:buNone/>
-            </a:pPr>
-            <a:r>
-              <a:rPr lang="en-US" sz="1700" b="1" dirty="0">
-                <a:solidFill>
-                  <a:schemeClr val="bg1"/>
-                </a:solidFill>
-              </a:rPr>
-              <a:t>黄</a:t>
-            </a:r>
-            <a:endParaRPr lang="en-US" sz="1700" dirty="0"/>
-          </a:p>
-        </p:txBody>
-      </p:sp>
-      <p:sp>
-        <p:nvSpPr>
-          <p:cNvPr id="12" name="Text 10"/>
-          <p:cNvSpPr txBox="1"/>
-          <p:nvPr/>
-        </p:nvSpPr>
-        <p:spPr>
-          <a:xfrm>
-            <a:off x="1508760" y="3328416"/>
-            <a:ext cx="5806440" cy="457200"/>
-          </a:xfrm>
-          <a:prstGeom prst="rect">
-            <a:avLst/>
-          </a:prstGeom>
-          <a:noFill/>
-          <a:ln/>
-        </p:spPr>
-        <p:txBody>
-          <a:bodyPr wrap="square" lIns="0" tIns="0" rIns="0" bIns="0" rtlCol="0" anchor="ctr"/>
-          <a:lstStyle/>
-          <a:p>
-            <a:pPr indent="0" marL="0">
-              <a:buNone/>
-            </a:pPr>
-            <a:r>
-              <a:rPr lang="en-US" sz="1700" b="1" dirty="0">
-                <a:solidFill>
-                  <a:schemeClr val="tx2"/>
-                </a:solidFill>
-              </a:rPr>
-              <a:t>黄档 · 确认按钮</a:t>
-            </a:r>
-            <a:endParaRPr lang="en-US" sz="1700" dirty="0"/>
-          </a:p>
-        </p:txBody>
-      </p:sp>
-      <p:sp>
-        <p:nvSpPr>
-          <p:cNvPr id="13" name="Text 11"/>
-          <p:cNvSpPr txBox="1"/>
-          <p:nvPr/>
-        </p:nvSpPr>
-        <p:spPr>
-          <a:xfrm>
-            <a:off x="777240" y="4023360"/>
-            <a:ext cx="6492240" cy="365760"/>
-          </a:xfrm>
-          <a:prstGeom prst="rect">
-            <a:avLst/>
-          </a:prstGeom>
-          <a:noFill/>
-          <a:ln/>
-        </p:spPr>
-        <p:txBody>
-          <a:bodyPr wrap="square" lIns="0" tIns="0" rIns="0" bIns="0" rtlCol="0" anchor="t"/>
-          <a:lstStyle/>
-          <a:p>
+              <a:t>工具调用：</a:t>
+            </a:r>
             <a:pPr indent="0" marL="0">
               <a:spcAft>
-                <a:spcPts val="400"/>
+                <a:spcPts val="800"/>
               </a:spcAft>
               <a:buNone/>
             </a:pPr>
             <a:r>
-              <a:rPr lang="en-US" sz="1400" dirty="0">
+              <a:rPr lang="en-US" sz="1500" dirty="0">
                 <a:solidFill>
                   <a:schemeClr val="tx1"/>
                 </a:solidFill>
               </a:rPr>
-              <a:t>当日累计 ≤ ¥1,000 的转账、冻结卡、赎回、取消订阅、计划确认</a:t>
-            </a:r>
-            <a:endParaRPr lang="en-US" sz="1400" dirty="0"/>
-          </a:p>
-          <a:p>
-            <a:pPr indent="0" marL="0">
+              <a:t>DeepSeek 原生工具调用，一轮最多 6 步，可并行（如同时解析日期和联系人）</a:t>
+            </a:r>
+            <a:endParaRPr lang="en-US" sz="1500" dirty="0"/>
+          </a:p>
+          <a:p>
+            <a:pPr marL="228600" indent="-228600">
               <a:spcAft>
-                <a:spcPts val="400"/>
+                <a:spcPts val="800"/>
               </a:spcAft>
-              <a:buNone/>
-            </a:pPr>
-            <a:r>
-              <a:rPr lang="en-US" sz="1400" dirty="0">
+              <a:buSzPct val="100000"/>
+              <a:buChar char="•"/>
+            </a:pPr>
+            <a:r>
+              <a:rPr lang="en-US" sz="1500" b="1" dirty="0">
                 <a:solidFill>
                   <a:schemeClr val="tx1"/>
                 </a:solidFill>
               </a:rPr>
-              <a:t>确认码绑定参数哈希、5 分钟、一次性</a:t>
-            </a:r>
-            <a:endParaRPr lang="en-US" sz="1400" dirty="0"/>
-          </a:p>
-        </p:txBody>
-      </p:sp>
-      <p:sp>
-        <p:nvSpPr>
-          <p:cNvPr id="14" name="卡片-红档 · 强验证"/>
-          <p:cNvSpPr/>
-          <p:nvPr/>
-        </p:nvSpPr>
-        <p:spPr>
-          <a:xfrm>
-            <a:off x="548640" y="4700016"/>
-            <a:ext cx="6949440" cy="1417320"/>
-          </a:xfrm>
-          <a:prstGeom prst="roundRect">
-            <a:avLst>
-              <a:gd name="adj" fmla="val 7742"/>
-            </a:avLst>
-          </a:prstGeom>
-          <a:solidFill>
-            <a:schemeClr val="bg2"/>
-          </a:solidFill>
-          <a:ln w="12700">
-            <a:solidFill>
-              <a:schemeClr val="bg2"/>
-            </a:solidFill>
-            <a:prstDash val="solid"/>
-          </a:ln>
-        </p:spPr>
-      </p:sp>
-      <p:sp>
-        <p:nvSpPr>
-          <p:cNvPr id="15" name="圆标-红"/>
-          <p:cNvSpPr/>
-          <p:nvPr/>
-        </p:nvSpPr>
-        <p:spPr>
-          <a:xfrm>
-            <a:off x="777240" y="4928616"/>
-            <a:ext cx="566928" cy="566928"/>
-          </a:xfrm>
-          <a:prstGeom prst="ellipse">
-            <a:avLst/>
-          </a:prstGeom>
-          <a:solidFill>
-            <a:schemeClr val="accent4"/>
-          </a:solidFill>
-          <a:ln w="12700">
-            <a:solidFill>
-              <a:schemeClr val="accent4"/>
-            </a:solidFill>
-            <a:prstDash val="solid"/>
-          </a:ln>
-        </p:spPr>
-      </p:sp>
-      <p:sp>
-        <p:nvSpPr>
-          <p:cNvPr id="16" name="Text 14"/>
-          <p:cNvSpPr txBox="1"/>
-          <p:nvPr/>
-        </p:nvSpPr>
-        <p:spPr>
-          <a:xfrm>
-            <a:off x="777240" y="4928616"/>
-            <a:ext cx="566928" cy="566928"/>
-          </a:xfrm>
-          <a:prstGeom prst="rect">
-            <a:avLst/>
-          </a:prstGeom>
-          <a:noFill/>
-          <a:ln/>
-        </p:spPr>
-        <p:txBody>
-          <a:bodyPr wrap="square" lIns="0" tIns="0" rIns="0" bIns="0" rtlCol="0" anchor="ctr"/>
-          <a:lstStyle/>
-          <a:p>
-            <a:pPr algn="ctr" indent="0" marL="0">
-              <a:buNone/>
-            </a:pPr>
-            <a:r>
-              <a:rPr lang="en-US" sz="1700" b="1" dirty="0">
-                <a:solidFill>
-                  <a:schemeClr val="bg1"/>
-                </a:solidFill>
-              </a:rPr>
-              <a:t>红</a:t>
-            </a:r>
-            <a:endParaRPr lang="en-US" sz="1700" dirty="0"/>
-          </a:p>
-        </p:txBody>
-      </p:sp>
-      <p:sp>
-        <p:nvSpPr>
-          <p:cNvPr id="17" name="Text 15"/>
-          <p:cNvSpPr txBox="1"/>
-          <p:nvPr/>
-        </p:nvSpPr>
-        <p:spPr>
-          <a:xfrm>
-            <a:off x="1508760" y="4901184"/>
-            <a:ext cx="5806440" cy="457200"/>
-          </a:xfrm>
-          <a:prstGeom prst="rect">
-            <a:avLst/>
-          </a:prstGeom>
-          <a:noFill/>
-          <a:ln/>
-        </p:spPr>
-        <p:txBody>
-          <a:bodyPr wrap="square" lIns="0" tIns="0" rIns="0" bIns="0" rtlCol="0" anchor="ctr"/>
-          <a:lstStyle/>
-          <a:p>
-            <a:pPr indent="0" marL="0">
-              <a:buNone/>
-            </a:pPr>
-            <a:r>
-              <a:rPr lang="en-US" sz="1700" b="1" dirty="0">
-                <a:solidFill>
-                  <a:schemeClr val="tx2"/>
-                </a:solidFill>
-              </a:rPr>
-              <a:t>红档 · 强验证</a:t>
-            </a:r>
-            <a:endParaRPr lang="en-US" sz="1700" dirty="0"/>
-          </a:p>
-        </p:txBody>
-      </p:sp>
-      <p:sp>
-        <p:nvSpPr>
-          <p:cNvPr id="18" name="Text 16"/>
-          <p:cNvSpPr txBox="1"/>
-          <p:nvPr/>
-        </p:nvSpPr>
-        <p:spPr>
-          <a:xfrm>
-            <a:off x="777240" y="5596128"/>
-            <a:ext cx="6492240" cy="365760"/>
-          </a:xfrm>
-          <a:prstGeom prst="rect">
-            <a:avLst/>
-          </a:prstGeom>
-          <a:noFill/>
-          <a:ln/>
-        </p:spPr>
-        <p:txBody>
-          <a:bodyPr wrap="square" lIns="0" tIns="0" rIns="0" bIns="0" rtlCol="0" anchor="t"/>
-          <a:lstStyle/>
-          <a:p>
+              <a:t>一次确认整个计划：</a:t>
+            </a:r>
             <a:pPr indent="0" marL="0">
               <a:spcAft>
-                <a:spcPts val="400"/>
+                <a:spcPts val="800"/>
               </a:spcAft>
               <a:buNone/>
             </a:pPr>
             <a:r>
-              <a:rPr lang="en-US" sz="1400" dirty="0">
+              <a:rPr lang="en-US" sz="1500" dirty="0">
                 <a:solidFill>
                   <a:schemeClr val="tx1"/>
                 </a:solidFill>
               </a:rPr>
-              <a:t>大额转账、解冻、挂失、上调限额、理财申购、高风险转账</a:t>
-            </a:r>
-            <a:endParaRPr lang="en-US" sz="1400" dirty="0"/>
-          </a:p>
-          <a:p>
-            <a:pPr indent="0" marL="0">
+              <a:t>绑定全部节点参数哈希，档位取最高档</a:t>
+            </a:r>
+            <a:endParaRPr lang="en-US" sz="1500" dirty="0"/>
+          </a:p>
+          <a:p>
+            <a:pPr marL="228600" indent="-228600">
               <a:spcAft>
-                <a:spcPts val="400"/>
+                <a:spcPts val="800"/>
               </a:spcAft>
-              <a:buNone/>
-            </a:pPr>
-            <a:r>
-              <a:rPr lang="en-US" sz="1400" dirty="0">
+              <a:buSzPct val="100000"/>
+              <a:buChar char="•"/>
+            </a:pPr>
+            <a:r>
+              <a:rPr lang="en-US" sz="1500" b="1" dirty="0">
                 <a:solidFill>
                   <a:schemeClr val="tx1"/>
                 </a:solidFill>
               </a:rPr>
-              <a:t>交易密码 + 模拟短信动态码</a:t>
-            </a:r>
-            <a:endParaRPr lang="en-US" sz="1400" dirty="0"/>
-          </a:p>
-        </p:txBody>
-      </p:sp>
-      <p:sp>
-        <p:nvSpPr>
-          <p:cNvPr id="19" name="风险对称"/>
-          <p:cNvSpPr/>
-          <p:nvPr/>
-        </p:nvSpPr>
-        <p:spPr>
-          <a:xfrm>
-            <a:off x="7863840" y="1554480"/>
-            <a:ext cx="3794760" cy="4562856"/>
-          </a:xfrm>
-          <a:prstGeom prst="roundRect">
-            <a:avLst>
-              <a:gd name="adj" fmla="val 2892"/>
-            </a:avLst>
-          </a:prstGeom>
-          <a:solidFill>
-            <a:schemeClr val="tx2"/>
-          </a:solidFill>
-          <a:ln w="12700">
-            <a:solidFill>
-              <a:schemeClr val="tx2"/>
-            </a:solidFill>
-            <a:prstDash val="solid"/>
-          </a:ln>
-        </p:spPr>
-      </p:sp>
-      <p:sp>
-        <p:nvSpPr>
-          <p:cNvPr id="20" name="Text 18"/>
-          <p:cNvSpPr txBox="1"/>
-          <p:nvPr/>
-        </p:nvSpPr>
-        <p:spPr>
-          <a:xfrm>
-            <a:off x="8138160" y="1783080"/>
-            <a:ext cx="3291840" cy="4114800"/>
-          </a:xfrm>
-          <a:prstGeom prst="rect">
-            <a:avLst/>
-          </a:prstGeom>
-          <a:noFill/>
-          <a:ln/>
-        </p:spPr>
-        <p:txBody>
-          <a:bodyPr wrap="square" lIns="0" tIns="0" rIns="0" bIns="0" rtlCol="0" anchor="t"/>
-          <a:lstStyle/>
-          <a:p>
-            <a:pPr indent="0" marL="0">
-              <a:buNone/>
-            </a:pPr>
-            <a:r>
-              <a:rPr lang="en-US" sz="2200" b="1" dirty="0">
-                <a:solidFill>
-                  <a:srgbClr val="9EE0C5"/>
-                </a:solidFill>
-              </a:rPr>
-              <a:t>风险对称</a:t>
+              <a:t>到点执行：</a:t>
+            </a:r>
+            <a:pPr indent="0" marL="0">
+              <a:spcAft>
+                <a:spcPts val="800"/>
+              </a:spcAft>
+              <a:buNone/>
+            </a:pPr>
+            <a:r>
+              <a:rPr lang="en-US" sz="1500" dirty="0">
+                <a:solidFill>
+                  <a:schemeClr val="tx1"/>
+                </a:solidFill>
+              </a:rPr>
+              <a:t>调度器按执行日重新判档，超出授权就不执行</a:t>
             </a:r>
             <a:endParaRPr lang="en-US" sz="1500" dirty="0"/>
           </a:p>
           <a:p>
-            <a:pPr indent="0" marL="0">
-              <a:buNone/>
+            <a:pPr marL="228600" indent="-228600">
+              <a:spcAft>
+                <a:spcPts val="800"/>
+              </a:spcAft>
+              <a:buSzPct val="100000"/>
+              <a:buChar char="•"/>
             </a:pPr>
             <a:r>
               <a:rPr lang="en-US" sz="1500" b="1" dirty="0">
                 <a:solidFill>
-                  <a:schemeClr val="bg1"/>
-                </a:solidFill>
-              </a:rPr>
-              <a:t>降低风险的操作低摩擦：</a:t>
-            </a:r>
-            <a:endParaRPr lang="en-US" sz="1500" dirty="0"/>
-          </a:p>
-          <a:p>
-            <a:pPr indent="0" marL="0">
+                  <a:schemeClr val="tx1"/>
+                </a:solidFill>
+              </a:rPr>
+              <a:t>可中断：</a:t>
+            </a:r>
+            <a:pPr indent="0" marL="0">
+              <a:spcAft>
+                <a:spcPts val="800"/>
+              </a:spcAft>
               <a:buNone/>
             </a:pPr>
             <a:r>
               <a:rPr lang="en-US" sz="1500" dirty="0">
                 <a:solidFill>
-                  <a:schemeClr val="bg1"/>
-                </a:solidFill>
-              </a:rPr>
-              <a:t>冻结卡、下调限额 → 黄档</a:t>
-            </a:r>
-            <a:endParaRPr lang="en-US" sz="1500" dirty="0"/>
-          </a:p>
-          <a:p>
-            <a:pPr indent="0" marL="0">
-              <a:buNone/>
-            </a:pPr>
-            <a:r>
-              <a:rPr lang="en-US" sz="1500" dirty="0">
-                <a:solidFill>
-                  <a:schemeClr val="bg1"/>
-                </a:solidFill>
-              </a:rPr>
-              <a:t> </a:t>
-            </a:r>
-            <a:endParaRPr lang="en-US" sz="1500" dirty="0"/>
-          </a:p>
-          <a:p>
-            <a:pPr indent="0" marL="0">
-              <a:buNone/>
-            </a:pPr>
-            <a:r>
-              <a:rPr lang="en-US" sz="1500" b="1" dirty="0">
-                <a:solidFill>
-                  <a:schemeClr val="bg1"/>
-                </a:solidFill>
-              </a:rPr>
-              <a:t>增加风险的操作强验证：</a:t>
-            </a:r>
-            <a:endParaRPr lang="en-US" sz="1500" dirty="0"/>
-          </a:p>
-          <a:p>
-            <a:pPr indent="0" marL="0">
-              <a:buNone/>
-            </a:pPr>
-            <a:r>
-              <a:rPr lang="en-US" sz="1500" dirty="0">
-                <a:solidFill>
-                  <a:schemeClr val="bg1"/>
-                </a:solidFill>
-              </a:rPr>
-              <a:t>解冻、上调限额、挂失解挂 → 红档</a:t>
-            </a:r>
-            <a:endParaRPr lang="en-US" sz="1500" dirty="0"/>
-          </a:p>
-          <a:p>
-            <a:pPr indent="0" marL="0">
-              <a:buNone/>
-            </a:pPr>
-            <a:r>
-              <a:rPr lang="en-US" sz="1500" dirty="0">
-                <a:solidFill>
-                  <a:schemeClr val="bg1"/>
-                </a:solidFill>
-              </a:rPr>
-              <a:t> </a:t>
-            </a:r>
-            <a:endParaRPr lang="en-US" sz="1500" dirty="0"/>
-          </a:p>
-          <a:p>
-            <a:pPr indent="0" marL="0">
-              <a:buNone/>
-            </a:pPr>
-            <a:r>
-              <a:rPr lang="en-US" sz="1500" b="1" dirty="0">
-                <a:solidFill>
-                  <a:srgbClr val="FFD58A"/>
-                </a:solidFill>
-              </a:rPr>
-              <a:t>聊天里说“我确认了”不算确认。</a:t>
+                  <a:schemeClr val="tx1"/>
+                </a:solidFill>
+              </a:rPr>
+              <a:t>暂停、继续、去掉一步、全部回退（释放预算）、转人工</a:t>
             </a:r>
             <a:endParaRPr lang="en-US" sz="1500" dirty="0"/>
           </a:p>
@@ -10672,7 +11548,7 @@
                   <a:schemeClr val="tx2"/>
                 </a:solidFill>
               </a:rPr>
-              <a:t>红档强验证与熔断</a:t>
+              <a:t>权限三档，全部由代码判定</a:t>
             </a:r>
             <a:endParaRPr lang="en-US" sz="3000" dirty="0"/>
           </a:p>
@@ -10708,77 +11584,74 @@
                   <a:schemeClr val="accent6"/>
                 </a:solidFill>
               </a:rPr>
-              <a:t>两个因素，所见即所签；连续失败就锁定，重启也不清零</a:t>
+              <a:t>模型输出里没有“档位”这个字段，也无法传入</a:t>
             </a:r>
             <a:endParaRPr lang="en-US" sz="1500" dirty="0"/>
           </a:p>
         </p:txBody>
       </p:sp>
-      <p:pic>
-        <p:nvPicPr>
-          <p:cNvPr id="4" name="Image 0" descr="界面截图：03-red-strong-auth.png">    </p:cNvPr>
-          <p:cNvPicPr>
-            <a:picLocks noChangeAspect="1"/>
-          </p:cNvPicPr>
-          <p:nvPr/>
-        </p:nvPicPr>
-        <p:blipFill>
-          <a:blip r:embed="rId1"/>
-          <a:stretch>
-            <a:fillRect/>
-          </a:stretch>
-        </p:blipFill>
-        <p:spPr>
-          <a:xfrm>
-            <a:off x="548640" y="1417320"/>
-            <a:ext cx="2239413" cy="4846320"/>
-          </a:xfrm>
-          <a:prstGeom prst="rect">
-            <a:avLst/>
-          </a:prstGeom>
-          <a:effectLst>
-            <a:outerShdw sx="100000" sy="100000" kx="0" ky="0" algn="bl" rotWithShape="0" blurRad="101600" dist="38100" dir="5400000">
-              <a:srgbClr val="000000">
-                <a:alpha val="25000"/>
-              </a:srgbClr>
-            </a:outerShdw>
-          </a:effectLst>
-        </p:spPr>
-      </p:pic>
-      <p:pic>
-        <p:nvPicPr>
-          <p:cNvPr id="5" name="Image 1" descr="桌面端：强验证面板与模拟手机短信">    </p:cNvPr>
-          <p:cNvPicPr>
-            <a:picLocks noChangeAspect="1"/>
-          </p:cNvPicPr>
-          <p:nvPr/>
-        </p:nvPicPr>
-        <p:blipFill>
-          <a:blip r:embed="rId2"/>
-          <a:stretch>
-            <a:fillRect/>
-          </a:stretch>
-        </p:blipFill>
-        <p:spPr>
-          <a:xfrm>
-            <a:off x="3108093" y="1463040"/>
-            <a:ext cx="4754880" cy="3146843"/>
-          </a:xfrm>
-          <a:prstGeom prst="rect">
-            <a:avLst/>
-          </a:prstGeom>
-        </p:spPr>
-      </p:pic>
-      <p:sp>
-        <p:nvSpPr>
-          <p:cNvPr id="6" name="Text 2"/>
+      <p:sp>
+        <p:nvSpPr>
+          <p:cNvPr id="4" name="卡片-绿档 · 自动执行"/>
+          <p:cNvSpPr/>
+          <p:nvPr/>
+        </p:nvSpPr>
+        <p:spPr>
+          <a:xfrm>
+            <a:off x="548640" y="1554480"/>
+            <a:ext cx="6949440" cy="1417320"/>
+          </a:xfrm>
+          <a:prstGeom prst="roundRect">
+            <a:avLst>
+              <a:gd name="adj" fmla="val 7742"/>
+            </a:avLst>
+          </a:prstGeom>
+          <a:solidFill>
+            <a:schemeClr val="bg2"/>
+          </a:solidFill>
+          <a:ln w="12700">
+            <a:solidFill>
+              <a:schemeClr val="bg2"/>
+            </a:solidFill>
+            <a:prstDash val="solid"/>
+          </a:ln>
+        </p:spPr>
+      </p:sp>
+      <p:sp>
+        <p:nvSpPr>
+          <p:cNvPr id="5" name="圆标-绿"/>
+          <p:cNvSpPr/>
+          <p:nvPr/>
+        </p:nvSpPr>
+        <p:spPr>
+          <a:xfrm>
+            <a:off x="777240" y="1783080"/>
+            <a:ext cx="566928" cy="566928"/>
+          </a:xfrm>
+          <a:prstGeom prst="ellipse">
+            <a:avLst/>
+          </a:prstGeom>
+          <a:solidFill>
+            <a:schemeClr val="accent2"/>
+          </a:solidFill>
+          <a:ln w="12700">
+            <a:solidFill>
+              <a:schemeClr val="accent2"/>
+            </a:solidFill>
+            <a:prstDash val="solid"/>
+          </a:ln>
+        </p:spPr>
+      </p:sp>
+      <p:sp>
+        <p:nvSpPr>
+          <p:cNvPr id="6" name="Text 4"/>
           <p:cNvSpPr txBox="1"/>
           <p:nvPr/>
         </p:nvSpPr>
         <p:spPr>
           <a:xfrm>
-            <a:off x="8183880" y="1463040"/>
-            <a:ext cx="3474720" cy="4754880"/>
+            <a:off x="777240" y="1783080"/>
+            <a:ext cx="566928" cy="566928"/>
           </a:xfrm>
           <a:prstGeom prst="rect">
             <a:avLst/>
@@ -10787,133 +11660,615 @@
           <a:ln/>
         </p:spPr>
         <p:txBody>
+          <a:bodyPr wrap="square" lIns="0" tIns="0" rIns="0" bIns="0" rtlCol="0" anchor="ctr"/>
+          <a:lstStyle/>
+          <a:p>
+            <a:pPr algn="ctr" indent="0" marL="0">
+              <a:buNone/>
+            </a:pPr>
+            <a:r>
+              <a:rPr lang="en-US" sz="1700" b="1" dirty="0">
+                <a:solidFill>
+                  <a:schemeClr val="bg1"/>
+                </a:solidFill>
+              </a:rPr>
+              <a:t>绿</a:t>
+            </a:r>
+            <a:endParaRPr lang="en-US" sz="1700" dirty="0"/>
+          </a:p>
+        </p:txBody>
+      </p:sp>
+      <p:sp>
+        <p:nvSpPr>
+          <p:cNvPr id="7" name="Text 5"/>
+          <p:cNvSpPr txBox="1"/>
+          <p:nvPr/>
+        </p:nvSpPr>
+        <p:spPr>
+          <a:xfrm>
+            <a:off x="1508760" y="1755648"/>
+            <a:ext cx="5806440" cy="457200"/>
+          </a:xfrm>
+          <a:prstGeom prst="rect">
+            <a:avLst/>
+          </a:prstGeom>
+          <a:noFill/>
+          <a:ln/>
+        </p:spPr>
+        <p:txBody>
+          <a:bodyPr wrap="square" lIns="0" tIns="0" rIns="0" bIns="0" rtlCol="0" anchor="ctr"/>
+          <a:lstStyle/>
+          <a:p>
+            <a:pPr indent="0" marL="0">
+              <a:buNone/>
+            </a:pPr>
+            <a:r>
+              <a:rPr lang="en-US" sz="1700" b="1" dirty="0">
+                <a:solidFill>
+                  <a:schemeClr val="tx2"/>
+                </a:solidFill>
+              </a:rPr>
+              <a:t>绿档 · 自动执行</a:t>
+            </a:r>
+            <a:endParaRPr lang="en-US" sz="1700" dirty="0"/>
+          </a:p>
+        </p:txBody>
+      </p:sp>
+      <p:sp>
+        <p:nvSpPr>
+          <p:cNvPr id="8" name="Text 6"/>
+          <p:cNvSpPr txBox="1"/>
+          <p:nvPr/>
+        </p:nvSpPr>
+        <p:spPr>
+          <a:xfrm>
+            <a:off x="777240" y="2450592"/>
+            <a:ext cx="6492240" cy="365760"/>
+          </a:xfrm>
+          <a:prstGeom prst="rect">
+            <a:avLst/>
+          </a:prstGeom>
+          <a:noFill/>
+          <a:ln/>
+        </p:spPr>
+        <p:txBody>
           <a:bodyPr wrap="square" lIns="0" tIns="0" rIns="0" bIns="0" rtlCol="0" anchor="t"/>
           <a:lstStyle/>
           <a:p>
-            <a:pPr marL="228600" indent="-228600">
+            <a:pPr indent="0" marL="0">
               <a:spcAft>
-                <a:spcPts val="800"/>
+                <a:spcPts val="400"/>
               </a:spcAft>
-              <a:buSzPct val="100000"/>
-              <a:buChar char="•"/>
+              <a:buNone/>
+            </a:pPr>
+            <a:r>
+              <a:rPr lang="en-US" sz="1400" dirty="0">
+                <a:solidFill>
+                  <a:schemeClr val="tx1"/>
+                </a:solidFill>
+              </a:rPr>
+              <a:t>查询、统计、月报年报、异常识别、产品对比、沙箱分析</a:t>
+            </a:r>
+            <a:endParaRPr lang="en-US" sz="1400" dirty="0"/>
+          </a:p>
+        </p:txBody>
+      </p:sp>
+      <p:sp>
+        <p:nvSpPr>
+          <p:cNvPr id="9" name="卡片-黄档 · 确认按钮"/>
+          <p:cNvSpPr/>
+          <p:nvPr/>
+        </p:nvSpPr>
+        <p:spPr>
+          <a:xfrm>
+            <a:off x="548640" y="3127248"/>
+            <a:ext cx="6949440" cy="1417320"/>
+          </a:xfrm>
+          <a:prstGeom prst="roundRect">
+            <a:avLst>
+              <a:gd name="adj" fmla="val 7742"/>
+            </a:avLst>
+          </a:prstGeom>
+          <a:solidFill>
+            <a:schemeClr val="bg2"/>
+          </a:solidFill>
+          <a:ln w="12700">
+            <a:solidFill>
+              <a:schemeClr val="bg2"/>
+            </a:solidFill>
+            <a:prstDash val="solid"/>
+          </a:ln>
+        </p:spPr>
+      </p:sp>
+      <p:sp>
+        <p:nvSpPr>
+          <p:cNvPr id="10" name="圆标-黄"/>
+          <p:cNvSpPr/>
+          <p:nvPr/>
+        </p:nvSpPr>
+        <p:spPr>
+          <a:xfrm>
+            <a:off x="777240" y="3355848"/>
+            <a:ext cx="566928" cy="566928"/>
+          </a:xfrm>
+          <a:prstGeom prst="ellipse">
+            <a:avLst/>
+          </a:prstGeom>
+          <a:solidFill>
+            <a:schemeClr val="accent3"/>
+          </a:solidFill>
+          <a:ln w="12700">
+            <a:solidFill>
+              <a:schemeClr val="accent3"/>
+            </a:solidFill>
+            <a:prstDash val="solid"/>
+          </a:ln>
+        </p:spPr>
+      </p:sp>
+      <p:sp>
+        <p:nvSpPr>
+          <p:cNvPr id="11" name="Text 9"/>
+          <p:cNvSpPr txBox="1"/>
+          <p:nvPr/>
+        </p:nvSpPr>
+        <p:spPr>
+          <a:xfrm>
+            <a:off x="777240" y="3355848"/>
+            <a:ext cx="566928" cy="566928"/>
+          </a:xfrm>
+          <a:prstGeom prst="rect">
+            <a:avLst/>
+          </a:prstGeom>
+          <a:noFill/>
+          <a:ln/>
+        </p:spPr>
+        <p:txBody>
+          <a:bodyPr wrap="square" lIns="0" tIns="0" rIns="0" bIns="0" rtlCol="0" anchor="ctr"/>
+          <a:lstStyle/>
+          <a:p>
+            <a:pPr algn="ctr" indent="0" marL="0">
+              <a:buNone/>
+            </a:pPr>
+            <a:r>
+              <a:rPr lang="en-US" sz="1700" b="1" dirty="0">
+                <a:solidFill>
+                  <a:schemeClr val="bg1"/>
+                </a:solidFill>
+              </a:rPr>
+              <a:t>黄</a:t>
+            </a:r>
+            <a:endParaRPr lang="en-US" sz="1700" dirty="0"/>
+          </a:p>
+        </p:txBody>
+      </p:sp>
+      <p:sp>
+        <p:nvSpPr>
+          <p:cNvPr id="12" name="Text 10"/>
+          <p:cNvSpPr txBox="1"/>
+          <p:nvPr/>
+        </p:nvSpPr>
+        <p:spPr>
+          <a:xfrm>
+            <a:off x="1508760" y="3328416"/>
+            <a:ext cx="5806440" cy="457200"/>
+          </a:xfrm>
+          <a:prstGeom prst="rect">
+            <a:avLst/>
+          </a:prstGeom>
+          <a:noFill/>
+          <a:ln/>
+        </p:spPr>
+        <p:txBody>
+          <a:bodyPr wrap="square" lIns="0" tIns="0" rIns="0" bIns="0" rtlCol="0" anchor="ctr"/>
+          <a:lstStyle/>
+          <a:p>
+            <a:pPr indent="0" marL="0">
+              <a:buNone/>
+            </a:pPr>
+            <a:r>
+              <a:rPr lang="en-US" sz="1700" b="1" dirty="0">
+                <a:solidFill>
+                  <a:schemeClr val="tx2"/>
+                </a:solidFill>
+              </a:rPr>
+              <a:t>黄档 · 确认按钮</a:t>
+            </a:r>
+            <a:endParaRPr lang="en-US" sz="1700" dirty="0"/>
+          </a:p>
+        </p:txBody>
+      </p:sp>
+      <p:sp>
+        <p:nvSpPr>
+          <p:cNvPr id="13" name="Text 11"/>
+          <p:cNvSpPr txBox="1"/>
+          <p:nvPr/>
+        </p:nvSpPr>
+        <p:spPr>
+          <a:xfrm>
+            <a:off x="777240" y="4023360"/>
+            <a:ext cx="6492240" cy="365760"/>
+          </a:xfrm>
+          <a:prstGeom prst="rect">
+            <a:avLst/>
+          </a:prstGeom>
+          <a:noFill/>
+          <a:ln/>
+        </p:spPr>
+        <p:txBody>
+          <a:bodyPr wrap="square" lIns="0" tIns="0" rIns="0" bIns="0" rtlCol="0" anchor="t"/>
+          <a:lstStyle/>
+          <a:p>
+            <a:pPr indent="0" marL="0">
+              <a:spcAft>
+                <a:spcPts val="400"/>
+              </a:spcAft>
+              <a:buNone/>
+            </a:pPr>
+            <a:r>
+              <a:rPr lang="en-US" sz="1400" dirty="0">
+                <a:solidFill>
+                  <a:schemeClr val="tx1"/>
+                </a:solidFill>
+              </a:rPr>
+              <a:t>当日累计 ≤ ¥1,000 的转账、冻结卡、赎回、取消订阅、计划确认</a:t>
+            </a:r>
+            <a:endParaRPr lang="en-US" sz="1400" dirty="0"/>
+          </a:p>
+          <a:p>
+            <a:pPr indent="0" marL="0">
+              <a:spcAft>
+                <a:spcPts val="400"/>
+              </a:spcAft>
+              <a:buNone/>
+            </a:pPr>
+            <a:r>
+              <a:rPr lang="en-US" sz="1400" dirty="0">
+                <a:solidFill>
+                  <a:schemeClr val="tx1"/>
+                </a:solidFill>
+              </a:rPr>
+              <a:t>确认码绑定参数哈希、5 分钟、一次性</a:t>
+            </a:r>
+            <a:endParaRPr lang="en-US" sz="1400" dirty="0"/>
+          </a:p>
+        </p:txBody>
+      </p:sp>
+      <p:sp>
+        <p:nvSpPr>
+          <p:cNvPr id="14" name="卡片-红档 · 强验证"/>
+          <p:cNvSpPr/>
+          <p:nvPr/>
+        </p:nvSpPr>
+        <p:spPr>
+          <a:xfrm>
+            <a:off x="548640" y="4700016"/>
+            <a:ext cx="6949440" cy="1417320"/>
+          </a:xfrm>
+          <a:prstGeom prst="roundRect">
+            <a:avLst>
+              <a:gd name="adj" fmla="val 7742"/>
+            </a:avLst>
+          </a:prstGeom>
+          <a:solidFill>
+            <a:schemeClr val="bg2"/>
+          </a:solidFill>
+          <a:ln w="12700">
+            <a:solidFill>
+              <a:schemeClr val="bg2"/>
+            </a:solidFill>
+            <a:prstDash val="solid"/>
+          </a:ln>
+        </p:spPr>
+      </p:sp>
+      <p:sp>
+        <p:nvSpPr>
+          <p:cNvPr id="15" name="圆标-红"/>
+          <p:cNvSpPr/>
+          <p:nvPr/>
+        </p:nvSpPr>
+        <p:spPr>
+          <a:xfrm>
+            <a:off x="777240" y="4928616"/>
+            <a:ext cx="566928" cy="566928"/>
+          </a:xfrm>
+          <a:prstGeom prst="ellipse">
+            <a:avLst/>
+          </a:prstGeom>
+          <a:solidFill>
+            <a:schemeClr val="accent4"/>
+          </a:solidFill>
+          <a:ln w="12700">
+            <a:solidFill>
+              <a:schemeClr val="accent4"/>
+            </a:solidFill>
+            <a:prstDash val="solid"/>
+          </a:ln>
+        </p:spPr>
+      </p:sp>
+      <p:sp>
+        <p:nvSpPr>
+          <p:cNvPr id="16" name="Text 14"/>
+          <p:cNvSpPr txBox="1"/>
+          <p:nvPr/>
+        </p:nvSpPr>
+        <p:spPr>
+          <a:xfrm>
+            <a:off x="777240" y="4928616"/>
+            <a:ext cx="566928" cy="566928"/>
+          </a:xfrm>
+          <a:prstGeom prst="rect">
+            <a:avLst/>
+          </a:prstGeom>
+          <a:noFill/>
+          <a:ln/>
+        </p:spPr>
+        <p:txBody>
+          <a:bodyPr wrap="square" lIns="0" tIns="0" rIns="0" bIns="0" rtlCol="0" anchor="ctr"/>
+          <a:lstStyle/>
+          <a:p>
+            <a:pPr algn="ctr" indent="0" marL="0">
+              <a:buNone/>
+            </a:pPr>
+            <a:r>
+              <a:rPr lang="en-US" sz="1700" b="1" dirty="0">
+                <a:solidFill>
+                  <a:schemeClr val="bg1"/>
+                </a:solidFill>
+              </a:rPr>
+              <a:t>红</a:t>
+            </a:r>
+            <a:endParaRPr lang="en-US" sz="1700" dirty="0"/>
+          </a:p>
+        </p:txBody>
+      </p:sp>
+      <p:sp>
+        <p:nvSpPr>
+          <p:cNvPr id="17" name="Text 15"/>
+          <p:cNvSpPr txBox="1"/>
+          <p:nvPr/>
+        </p:nvSpPr>
+        <p:spPr>
+          <a:xfrm>
+            <a:off x="1508760" y="4901184"/>
+            <a:ext cx="5806440" cy="457200"/>
+          </a:xfrm>
+          <a:prstGeom prst="rect">
+            <a:avLst/>
+          </a:prstGeom>
+          <a:noFill/>
+          <a:ln/>
+        </p:spPr>
+        <p:txBody>
+          <a:bodyPr wrap="square" lIns="0" tIns="0" rIns="0" bIns="0" rtlCol="0" anchor="ctr"/>
+          <a:lstStyle/>
+          <a:p>
+            <a:pPr indent="0" marL="0">
+              <a:buNone/>
+            </a:pPr>
+            <a:r>
+              <a:rPr lang="en-US" sz="1700" b="1" dirty="0">
+                <a:solidFill>
+                  <a:schemeClr val="tx2"/>
+                </a:solidFill>
+              </a:rPr>
+              <a:t>红档 · 强验证</a:t>
+            </a:r>
+            <a:endParaRPr lang="en-US" sz="1700" dirty="0"/>
+          </a:p>
+        </p:txBody>
+      </p:sp>
+      <p:sp>
+        <p:nvSpPr>
+          <p:cNvPr id="18" name="Text 16"/>
+          <p:cNvSpPr txBox="1"/>
+          <p:nvPr/>
+        </p:nvSpPr>
+        <p:spPr>
+          <a:xfrm>
+            <a:off x="777240" y="5596128"/>
+            <a:ext cx="6492240" cy="365760"/>
+          </a:xfrm>
+          <a:prstGeom prst="rect">
+            <a:avLst/>
+          </a:prstGeom>
+          <a:noFill/>
+          <a:ln/>
+        </p:spPr>
+        <p:txBody>
+          <a:bodyPr wrap="square" lIns="0" tIns="0" rIns="0" bIns="0" rtlCol="0" anchor="t"/>
+          <a:lstStyle/>
+          <a:p>
+            <a:pPr indent="0" marL="0">
+              <a:spcAft>
+                <a:spcPts val="400"/>
+              </a:spcAft>
+              <a:buNone/>
+            </a:pPr>
+            <a:r>
+              <a:rPr lang="en-US" sz="1400" dirty="0">
+                <a:solidFill>
+                  <a:schemeClr val="tx1"/>
+                </a:solidFill>
+              </a:rPr>
+              <a:t>大额转账、解冻、挂失、上调限额、理财申购、高风险转账</a:t>
+            </a:r>
+            <a:endParaRPr lang="en-US" sz="1400" dirty="0"/>
+          </a:p>
+          <a:p>
+            <a:pPr indent="0" marL="0">
+              <a:spcAft>
+                <a:spcPts val="400"/>
+              </a:spcAft>
+              <a:buNone/>
+            </a:pPr>
+            <a:r>
+              <a:rPr lang="en-US" sz="1400" dirty="0">
+                <a:solidFill>
+                  <a:schemeClr val="tx1"/>
+                </a:solidFill>
+              </a:rPr>
+              <a:t>交易密码 + 模拟短信动态码</a:t>
+            </a:r>
+            <a:endParaRPr lang="en-US" sz="1400" dirty="0"/>
+          </a:p>
+        </p:txBody>
+      </p:sp>
+      <p:sp>
+        <p:nvSpPr>
+          <p:cNvPr id="19" name="风险对称"/>
+          <p:cNvSpPr/>
+          <p:nvPr/>
+        </p:nvSpPr>
+        <p:spPr>
+          <a:xfrm>
+            <a:off x="7863840" y="1554480"/>
+            <a:ext cx="3794760" cy="4562856"/>
+          </a:xfrm>
+          <a:prstGeom prst="roundRect">
+            <a:avLst>
+              <a:gd name="adj" fmla="val 2892"/>
+            </a:avLst>
+          </a:prstGeom>
+          <a:solidFill>
+            <a:schemeClr val="tx2"/>
+          </a:solidFill>
+          <a:ln w="12700">
+            <a:solidFill>
+              <a:schemeClr val="tx2"/>
+            </a:solidFill>
+            <a:prstDash val="solid"/>
+          </a:ln>
+        </p:spPr>
+      </p:sp>
+      <p:sp>
+        <p:nvSpPr>
+          <p:cNvPr id="20" name="Text 18"/>
+          <p:cNvSpPr txBox="1"/>
+          <p:nvPr/>
+        </p:nvSpPr>
+        <p:spPr>
+          <a:xfrm>
+            <a:off x="8138160" y="1783080"/>
+            <a:ext cx="3291840" cy="4114800"/>
+          </a:xfrm>
+          <a:prstGeom prst="rect">
+            <a:avLst/>
+          </a:prstGeom>
+          <a:noFill/>
+          <a:ln/>
+        </p:spPr>
+        <p:txBody>
+          <a:bodyPr wrap="square" lIns="0" tIns="0" rIns="0" bIns="0" rtlCol="0" anchor="t"/>
+          <a:lstStyle/>
+          <a:p>
+            <a:pPr indent="0" marL="0">
+              <a:buNone/>
+            </a:pPr>
+            <a:r>
+              <a:rPr lang="en-US" sz="2200" b="1" dirty="0">
+                <a:solidFill>
+                  <a:srgbClr val="9EE0C5"/>
+                </a:solidFill>
+              </a:rPr>
+              <a:t>风险对称</a:t>
+            </a:r>
+            <a:endParaRPr lang="en-US" sz="1500" dirty="0"/>
+          </a:p>
+          <a:p>
+            <a:pPr indent="0" marL="0">
+              <a:buNone/>
             </a:pPr>
             <a:r>
               <a:rPr lang="en-US" sz="1500" b="1" dirty="0">
                 <a:solidFill>
-                  <a:schemeClr val="tx1"/>
-                </a:solidFill>
-              </a:rPr>
-              <a:t>两个因素：</a:t>
-            </a:r>
-            <a:pPr indent="0" marL="0">
-              <a:spcAft>
-                <a:spcPts val="800"/>
-              </a:spcAft>
+                  <a:schemeClr val="bg1"/>
+                </a:solidFill>
+              </a:rPr>
+              <a:t>降低风险的操作低摩擦：</a:t>
+            </a:r>
+            <a:endParaRPr lang="en-US" sz="1500" dirty="0"/>
+          </a:p>
+          <a:p>
+            <a:pPr indent="0" marL="0">
               <a:buNone/>
             </a:pPr>
             <a:r>
               <a:rPr lang="en-US" sz="1500" dirty="0">
                 <a:solidFill>
-                  <a:schemeClr val="tx1"/>
-                </a:solidFill>
-              </a:rPr>
-              <a:t>交易密码（PBKDF2 存储）+ 绑定手机的模拟短信动态码</a:t>
+                  <a:schemeClr val="bg1"/>
+                </a:solidFill>
+              </a:rPr>
+              <a:t>冻结卡、下调限额 → 黄档</a:t>
             </a:r>
             <a:endParaRPr lang="en-US" sz="1500" dirty="0"/>
           </a:p>
           <a:p>
-            <a:pPr marL="228600" indent="-228600">
-              <a:spcAft>
-                <a:spcPts val="800"/>
-              </a:spcAft>
-              <a:buSzPct val="100000"/>
-              <a:buChar char="•"/>
+            <a:pPr indent="0" marL="0">
+              <a:buNone/>
+            </a:pPr>
+            <a:r>
+              <a:rPr lang="en-US" sz="1500" dirty="0">
+                <a:solidFill>
+                  <a:schemeClr val="bg1"/>
+                </a:solidFill>
+              </a:rPr>
+              <a:t> </a:t>
+            </a:r>
+            <a:endParaRPr lang="en-US" sz="1500" dirty="0"/>
+          </a:p>
+          <a:p>
+            <a:pPr indent="0" marL="0">
+              <a:buNone/>
             </a:pPr>
             <a:r>
               <a:rPr lang="en-US" sz="1500" b="1" dirty="0">
                 <a:solidFill>
-                  <a:schemeClr val="tx1"/>
-                </a:solidFill>
-              </a:rPr>
-              <a:t>所见即所签：</a:t>
-            </a:r>
-            <a:pPr indent="0" marL="0">
-              <a:spcAft>
-                <a:spcPts val="800"/>
-              </a:spcAft>
+                  <a:schemeClr val="bg1"/>
+                </a:solidFill>
+              </a:rPr>
+              <a:t>增加风险的操作强验证：</a:t>
+            </a:r>
+            <a:endParaRPr lang="en-US" sz="1500" dirty="0"/>
+          </a:p>
+          <a:p>
+            <a:pPr indent="0" marL="0">
               <a:buNone/>
             </a:pPr>
             <a:r>
               <a:rPr lang="en-US" sz="1500" dirty="0">
                 <a:solidFill>
-                  <a:schemeClr val="tx1"/>
-                </a:solidFill>
-              </a:rPr>
-              <a:t>短信写明“向 刘芳 转账 2,000.00 元”</a:t>
+                  <a:schemeClr val="bg1"/>
+                </a:solidFill>
+              </a:rPr>
+              <a:t>解冻、上调限额、挂失解挂 → 红档</a:t>
             </a:r>
             <a:endParaRPr lang="en-US" sz="1500" dirty="0"/>
           </a:p>
           <a:p>
-            <a:pPr marL="228600" indent="-228600">
-              <a:spcAft>
-                <a:spcPts val="800"/>
-              </a:spcAft>
-              <a:buSzPct val="100000"/>
-              <a:buChar char="•"/>
+            <a:pPr indent="0" marL="0">
+              <a:buNone/>
+            </a:pPr>
+            <a:r>
+              <a:rPr lang="en-US" sz="1500" dirty="0">
+                <a:solidFill>
+                  <a:schemeClr val="bg1"/>
+                </a:solidFill>
+              </a:rPr>
+              <a:t> </a:t>
+            </a:r>
+            <a:endParaRPr lang="en-US" sz="1500" dirty="0"/>
+          </a:p>
+          <a:p>
+            <a:pPr indent="0" marL="0">
+              <a:buNone/>
             </a:pPr>
             <a:r>
               <a:rPr lang="en-US" sz="1500" b="1" dirty="0">
                 <a:solidFill>
-                  <a:schemeClr val="tx1"/>
-                </a:solidFill>
-              </a:rPr>
-              <a:t>动态码只在模拟手机里，</a:t>
-            </a:r>
-            <a:pPr indent="0" marL="0">
-              <a:spcAft>
-                <a:spcPts val="800"/>
-              </a:spcAft>
-              <a:buNone/>
-            </a:pPr>
-            <a:r>
-              <a:rPr lang="en-US" sz="1500" dirty="0">
-                <a:solidFill>
-                  <a:schemeClr val="tx1"/>
-                </a:solidFill>
-              </a:rPr>
-              <a:t>不进聊天、不给模型、不进日志</a:t>
-            </a:r>
-            <a:endParaRPr lang="en-US" sz="1500" dirty="0"/>
-          </a:p>
-          <a:p>
-            <a:pPr marL="228600" indent="-228600">
-              <a:spcAft>
-                <a:spcPts val="800"/>
-              </a:spcAft>
-              <a:buSzPct val="100000"/>
-              <a:buChar char="•"/>
-            </a:pPr>
-            <a:r>
-              <a:rPr lang="en-US" sz="1500" b="1" dirty="0">
-                <a:solidFill>
-                  <a:schemeClr val="tx1"/>
-                </a:solidFill>
-              </a:rPr>
-              <a:t>3 次失败锁 10 分钟，</a:t>
-            </a:r>
-            <a:pPr indent="0" marL="0">
-              <a:spcAft>
-                <a:spcPts val="800"/>
-              </a:spcAft>
-              <a:buNone/>
-            </a:pPr>
-            <a:r>
-              <a:rPr lang="en-US" sz="1500" dirty="0">
-                <a:solidFill>
-                  <a:schemeClr val="tx1"/>
-                </a:solidFill>
-              </a:rPr>
-              <a:t>锁状态写在库里，重启不清零</a:t>
+                  <a:srgbClr val="FFD58A"/>
+                </a:solidFill>
+              </a:rPr>
+              <a:t>聊天里说“我确认了”不算确认。</a:t>
             </a:r>
             <a:endParaRPr lang="en-US" sz="1500" dirty="0"/>
           </a:p>
@@ -11019,7 +12374,7 @@
                   <a:schemeClr val="tx2"/>
                 </a:solidFill>
               </a:rPr>
-              <a:t>反诈守护：评分升档 + 冷静期 + 延时到账可撤回</a:t>
+              <a:t>红档强验证与熔断</a:t>
             </a:r>
             <a:endParaRPr lang="en-US" sz="3000" dirty="0"/>
           </a:p>
@@ -11055,7 +12410,7 @@
                   <a:schemeClr val="accent6"/>
                 </a:solidFill>
               </a:rPr>
-              <a:t>诱导转账是赛题点名的第一类风险</a:t>
+              <a:t>两个因素，所见即所签；连续失败就锁定，重启也不清零</a:t>
             </a:r>
             <a:endParaRPr lang="en-US" sz="1500" dirty="0"/>
           </a:p>
@@ -11063,7 +12418,7 @@
       </p:sp>
       <p:pic>
         <p:nvPicPr>
-          <p:cNvPr id="4" name="Image 0" descr="反诈评分流程">    </p:cNvPr>
+          <p:cNvPr id="4" name="Image 0" descr="界面截图：03-red-strong-auth.png">    </p:cNvPr>
           <p:cNvPicPr>
             <a:picLocks noChangeAspect="1"/>
           </p:cNvPicPr>
@@ -11077,17 +12432,24 @@
         </p:blipFill>
         <p:spPr>
           <a:xfrm>
-            <a:off x="548640" y="1508760"/>
-            <a:ext cx="7223760" cy="2335519"/>
-          </a:xfrm>
-          <a:prstGeom prst="rect">
-            <a:avLst/>
-          </a:prstGeom>
+            <a:off x="548640" y="1417320"/>
+            <a:ext cx="2239413" cy="4846320"/>
+          </a:xfrm>
+          <a:prstGeom prst="rect">
+            <a:avLst/>
+          </a:prstGeom>
+          <a:effectLst>
+            <a:outerShdw sx="100000" sy="100000" kx="0" ky="0" algn="bl" rotWithShape="0" blurRad="101600" dist="38100" dir="5400000">
+              <a:srgbClr val="000000">
+                <a:alpha val="25000"/>
+              </a:srgbClr>
+            </a:outerShdw>
+          </a:effectLst>
         </p:spPr>
       </p:pic>
       <p:pic>
         <p:nvPicPr>
-          <p:cNvPr id="5" name="Image 1" descr="界面截图：05-fraud.png">    </p:cNvPr>
+          <p:cNvPr id="5" name="Image 1" descr="桌面端：强验证面板与模拟手机短信">    </p:cNvPr>
           <p:cNvPicPr>
             <a:picLocks noChangeAspect="1"/>
           </p:cNvPicPr>
@@ -11101,19 +12463,12 @@
         </p:blipFill>
         <p:spPr>
           <a:xfrm>
-            <a:off x="8275320" y="1417320"/>
-            <a:ext cx="2239413" cy="4846320"/>
-          </a:xfrm>
-          <a:prstGeom prst="rect">
-            <a:avLst/>
-          </a:prstGeom>
-          <a:effectLst>
-            <a:outerShdw sx="100000" sy="100000" kx="0" ky="0" algn="bl" rotWithShape="0" blurRad="101600" dist="38100" dir="5400000">
-              <a:srgbClr val="000000">
-                <a:alpha val="25000"/>
-              </a:srgbClr>
-            </a:outerShdw>
-          </a:effectLst>
+            <a:off x="3108093" y="1463040"/>
+            <a:ext cx="4754880" cy="3146843"/>
+          </a:xfrm>
+          <a:prstGeom prst="rect">
+            <a:avLst/>
+          </a:prstGeom>
         </p:spPr>
       </p:pic>
       <p:sp>
@@ -11124,8 +12479,8 @@
         </p:nvSpPr>
         <p:spPr>
           <a:xfrm>
-            <a:off x="548640" y="4069080"/>
-            <a:ext cx="7315200" cy="2194560"/>
+            <a:off x="8183880" y="1463040"/>
+            <a:ext cx="3474720" cy="4754880"/>
           </a:xfrm>
           <a:prstGeom prst="rect">
             <a:avLst/>
@@ -11150,7 +12505,7 @@
                   <a:schemeClr val="tx1"/>
                 </a:solidFill>
               </a:rPr>
-              <a:t>风险名单直接拒绝：</a:t>
+              <a:t>两个因素：</a:t>
             </a:r>
             <a:pPr indent="0" marL="0">
               <a:spcAft>
@@ -11164,7 +12519,7 @@
                   <a:schemeClr val="tx1"/>
                 </a:solidFill>
               </a:rPr>
-              <a:t>“客服让我把钱转到安全账户”——在调用模型之前就拦下</a:t>
+              <a:t>交易密码（PBKDF2 存储）+ 绑定手机的模拟短信动态码</a:t>
             </a:r>
             <a:endParaRPr lang="en-US" sz="1500" dirty="0"/>
           </a:p>
@@ -11182,7 +12537,7 @@
                   <a:schemeClr val="tx1"/>
                 </a:solidFill>
               </a:rPr>
-              <a:t>代码打分 0–100：</a:t>
+              <a:t>所见即所签：</a:t>
             </a:r>
             <a:pPr indent="0" marL="0">
               <a:spcAft>
@@ -11196,7 +12551,7 @@
                   <a:schemeClr val="tx1"/>
                 </a:solidFill>
               </a:rPr>
-              <a:t>首次收款人、金额异常、诈骗话术、催促用语、凌晨、短时多笔</a:t>
+              <a:t>短信写明“向 刘芳 转账 2,000.00 元”</a:t>
             </a:r>
             <a:endParaRPr lang="en-US" sz="1500" dirty="0"/>
           </a:p>
@@ -11214,7 +12569,7 @@
                   <a:schemeClr val="tx1"/>
                 </a:solidFill>
               </a:rPr>
-              <a:t>≥ 60 分：</a:t>
+              <a:t>动态码只在模拟手机里，</a:t>
             </a:r>
             <a:pPr indent="0" marL="0">
               <a:spcAft>
@@ -11228,7 +12583,39 @@
                   <a:schemeClr val="tx1"/>
                 </a:solidFill>
               </a:rPr>
-              <a:t>强制红档 + 30 秒冷静期 + 默认 24 小时后到账，到账前可撤回</a:t>
+              <a:t>不进聊天、不给模型、不进日志</a:t>
+            </a:r>
+            <a:endParaRPr lang="en-US" sz="1500" dirty="0"/>
+          </a:p>
+          <a:p>
+            <a:pPr marL="228600" indent="-228600">
+              <a:spcAft>
+                <a:spcPts val="800"/>
+              </a:spcAft>
+              <a:buSzPct val="100000"/>
+              <a:buChar char="•"/>
+            </a:pPr>
+            <a:r>
+              <a:rPr lang="en-US" sz="1500" b="1" dirty="0">
+                <a:solidFill>
+                  <a:schemeClr val="tx1"/>
+                </a:solidFill>
+              </a:rPr>
+              <a:t>3 次失败锁 10 分钟，</a:t>
+            </a:r>
+            <a:pPr indent="0" marL="0">
+              <a:spcAft>
+                <a:spcPts val="800"/>
+              </a:spcAft>
+              <a:buNone/>
+            </a:pPr>
+            <a:r>
+              <a:rPr lang="en-US" sz="1500" dirty="0">
+                <a:solidFill>
+                  <a:schemeClr val="tx1"/>
+                </a:solidFill>
+              </a:rPr>
+              <a:t>锁状态写在库里，重启不清零</a:t>
             </a:r>
             <a:endParaRPr lang="en-US" sz="1500" dirty="0"/>
           </a:p>
@@ -11334,7 +12721,7 @@
                   <a:schemeClr val="tx2"/>
                 </a:solidFill>
               </a:rPr>
-              <a:t>注入、套取、越权：五层防线</a:t>
+              <a:t>反诈守护：评分升档 + 冷静期 + 延时到账可撤回</a:t>
             </a:r>
             <a:endParaRPr lang="en-US" sz="3000" dirty="0"/>
           </a:p>
@@ -11370,690 +12757,15 @@
                   <a:schemeClr val="accent6"/>
                 </a:solidFill>
               </a:rPr>
-              <a:t>单靠提示词挡不住注入；我们让每一层都由代码兜底</a:t>
+              <a:t>诱导转账是赛题点名的第一类风险</a:t>
             </a:r>
             <a:endParaRPr lang="en-US" sz="1500" dirty="0"/>
-          </a:p>
-        </p:txBody>
-      </p:sp>
-      <p:sp>
-        <p:nvSpPr>
-          <p:cNvPr id="4" name="防线1"/>
-          <p:cNvSpPr/>
-          <p:nvPr/>
-        </p:nvSpPr>
-        <p:spPr>
-          <a:xfrm>
-            <a:off x="548640" y="1508760"/>
-            <a:ext cx="6949440" cy="804672"/>
-          </a:xfrm>
-          <a:prstGeom prst="roundRect">
-            <a:avLst>
-              <a:gd name="adj" fmla="val 11364"/>
-            </a:avLst>
-          </a:prstGeom>
-          <a:solidFill>
-            <a:schemeClr val="bg2"/>
-          </a:solidFill>
-          <a:ln w="12700">
-            <a:solidFill>
-              <a:schemeClr val="bg2"/>
-            </a:solidFill>
-            <a:prstDash val="solid"/>
-          </a:ln>
-        </p:spPr>
-      </p:sp>
-      <p:sp>
-        <p:nvSpPr>
-          <p:cNvPr id="5" name="圆标-1"/>
-          <p:cNvSpPr/>
-          <p:nvPr/>
-        </p:nvSpPr>
-        <p:spPr>
-          <a:xfrm>
-            <a:off x="685800" y="1645920"/>
-            <a:ext cx="530352" cy="530352"/>
-          </a:xfrm>
-          <a:prstGeom prst="ellipse">
-            <a:avLst/>
-          </a:prstGeom>
-          <a:solidFill>
-            <a:schemeClr val="accent1"/>
-          </a:solidFill>
-          <a:ln w="12700">
-            <a:solidFill>
-              <a:schemeClr val="accent1"/>
-            </a:solidFill>
-            <a:prstDash val="solid"/>
-          </a:ln>
-        </p:spPr>
-      </p:sp>
-      <p:sp>
-        <p:nvSpPr>
-          <p:cNvPr id="6" name="Text 4"/>
-          <p:cNvSpPr txBox="1"/>
-          <p:nvPr/>
-        </p:nvSpPr>
-        <p:spPr>
-          <a:xfrm>
-            <a:off x="685800" y="1645920"/>
-            <a:ext cx="530352" cy="530352"/>
-          </a:xfrm>
-          <a:prstGeom prst="rect">
-            <a:avLst/>
-          </a:prstGeom>
-          <a:noFill/>
-          <a:ln/>
-        </p:spPr>
-        <p:txBody>
-          <a:bodyPr wrap="square" lIns="0" tIns="0" rIns="0" bIns="0" rtlCol="0" anchor="ctr"/>
-          <a:lstStyle/>
-          <a:p>
-            <a:pPr algn="ctr" indent="0" marL="0">
-              <a:buNone/>
-            </a:pPr>
-            <a:r>
-              <a:rPr lang="en-US" sz="1700" b="1" dirty="0">
-                <a:solidFill>
-                  <a:schemeClr val="bg1"/>
-                </a:solidFill>
-              </a:rPr>
-              <a:t>1</a:t>
-            </a:r>
-            <a:endParaRPr lang="en-US" sz="1700" dirty="0"/>
-          </a:p>
-        </p:txBody>
-      </p:sp>
-      <p:sp>
-        <p:nvSpPr>
-          <p:cNvPr id="7" name="Text 5"/>
-          <p:cNvSpPr txBox="1"/>
-          <p:nvPr/>
-        </p:nvSpPr>
-        <p:spPr>
-          <a:xfrm>
-            <a:off x="1371600" y="1563624"/>
-            <a:ext cx="5989320" cy="694944"/>
-          </a:xfrm>
-          <a:prstGeom prst="rect">
-            <a:avLst/>
-          </a:prstGeom>
-          <a:noFill/>
-          <a:ln/>
-        </p:spPr>
-        <p:txBody>
-          <a:bodyPr wrap="square" lIns="0" tIns="0" rIns="0" bIns="0" rtlCol="0" anchor="ctr"/>
-          <a:lstStyle/>
-          <a:p>
-            <a:pPr indent="0" marL="0">
-              <a:buNone/>
-            </a:pPr>
-            <a:r>
-              <a:rPr lang="en-US" sz="1350" b="1" dirty="0">
-                <a:solidFill>
-                  <a:schemeClr val="tx2"/>
-                </a:solidFill>
-              </a:rPr>
-              <a:t>输入守卫　</a:t>
-            </a:r>
-            <a:pPr indent="0" marL="0">
-              <a:buNone/>
-            </a:pPr>
-            <a:r>
-              <a:rPr lang="en-US" sz="1350" dirty="0">
-                <a:solidFill>
-                  <a:schemeClr val="tx1"/>
-                </a:solidFill>
-              </a:rPr>
-              <a:t>中英文注入与信息套取规则，命中不调用模型；10 分钟 3 次 → 会话只读</a:t>
-            </a:r>
-            <a:endParaRPr lang="en-US" sz="1350" dirty="0"/>
-          </a:p>
-        </p:txBody>
-      </p:sp>
-      <p:sp>
-        <p:nvSpPr>
-          <p:cNvPr id="8" name="防线2"/>
-          <p:cNvSpPr/>
-          <p:nvPr/>
-        </p:nvSpPr>
-        <p:spPr>
-          <a:xfrm>
-            <a:off x="749808" y="2441448"/>
-            <a:ext cx="6748272" cy="804672"/>
-          </a:xfrm>
-          <a:prstGeom prst="roundRect">
-            <a:avLst>
-              <a:gd name="adj" fmla="val 11364"/>
-            </a:avLst>
-          </a:prstGeom>
-          <a:solidFill>
-            <a:schemeClr val="bg2"/>
-          </a:solidFill>
-          <a:ln w="12700">
-            <a:solidFill>
-              <a:schemeClr val="bg2"/>
-            </a:solidFill>
-            <a:prstDash val="solid"/>
-          </a:ln>
-        </p:spPr>
-      </p:sp>
-      <p:sp>
-        <p:nvSpPr>
-          <p:cNvPr id="9" name="圆标-2"/>
-          <p:cNvSpPr/>
-          <p:nvPr/>
-        </p:nvSpPr>
-        <p:spPr>
-          <a:xfrm>
-            <a:off x="886968" y="2578608"/>
-            <a:ext cx="530352" cy="530352"/>
-          </a:xfrm>
-          <a:prstGeom prst="ellipse">
-            <a:avLst/>
-          </a:prstGeom>
-          <a:solidFill>
-            <a:schemeClr val="accent5"/>
-          </a:solidFill>
-          <a:ln w="12700">
-            <a:solidFill>
-              <a:schemeClr val="accent5"/>
-            </a:solidFill>
-            <a:prstDash val="solid"/>
-          </a:ln>
-        </p:spPr>
-      </p:sp>
-      <p:sp>
-        <p:nvSpPr>
-          <p:cNvPr id="10" name="Text 8"/>
-          <p:cNvSpPr txBox="1"/>
-          <p:nvPr/>
-        </p:nvSpPr>
-        <p:spPr>
-          <a:xfrm>
-            <a:off x="886968" y="2578608"/>
-            <a:ext cx="530352" cy="530352"/>
-          </a:xfrm>
-          <a:prstGeom prst="rect">
-            <a:avLst/>
-          </a:prstGeom>
-          <a:noFill/>
-          <a:ln/>
-        </p:spPr>
-        <p:txBody>
-          <a:bodyPr wrap="square" lIns="0" tIns="0" rIns="0" bIns="0" rtlCol="0" anchor="ctr"/>
-          <a:lstStyle/>
-          <a:p>
-            <a:pPr algn="ctr" indent="0" marL="0">
-              <a:buNone/>
-            </a:pPr>
-            <a:r>
-              <a:rPr lang="en-US" sz="1700" b="1" dirty="0">
-                <a:solidFill>
-                  <a:schemeClr val="bg1"/>
-                </a:solidFill>
-              </a:rPr>
-              <a:t>2</a:t>
-            </a:r>
-            <a:endParaRPr lang="en-US" sz="1700" dirty="0"/>
-          </a:p>
-        </p:txBody>
-      </p:sp>
-      <p:sp>
-        <p:nvSpPr>
-          <p:cNvPr id="11" name="Text 9"/>
-          <p:cNvSpPr txBox="1"/>
-          <p:nvPr/>
-        </p:nvSpPr>
-        <p:spPr>
-          <a:xfrm>
-            <a:off x="1572768" y="2496312"/>
-            <a:ext cx="5788152" cy="694944"/>
-          </a:xfrm>
-          <a:prstGeom prst="rect">
-            <a:avLst/>
-          </a:prstGeom>
-          <a:noFill/>
-          <a:ln/>
-        </p:spPr>
-        <p:txBody>
-          <a:bodyPr wrap="square" lIns="0" tIns="0" rIns="0" bIns="0" rtlCol="0" anchor="ctr"/>
-          <a:lstStyle/>
-          <a:p>
-            <a:pPr indent="0" marL="0">
-              <a:buNone/>
-            </a:pPr>
-            <a:r>
-              <a:rPr lang="en-US" sz="1350" b="1" dirty="0">
-                <a:solidFill>
-                  <a:schemeClr val="tx2"/>
-                </a:solidFill>
-              </a:rPr>
-              <a:t>外部文本隔离　</a:t>
-            </a:r>
-            <a:pPr indent="0" marL="0">
-              <a:buNone/>
-            </a:pPr>
-            <a:r>
-              <a:rPr lang="en-US" sz="1350" dirty="0">
-                <a:solidFill>
-                  <a:schemeClr val="tx1"/>
-                </a:solidFill>
-              </a:rPr>
-              <a:t>交易备注、商户名、产品说明包进 &lt;external_data&gt;，界面标“外部备注”</a:t>
-            </a:r>
-            <a:endParaRPr lang="en-US" sz="1350" dirty="0"/>
-          </a:p>
-        </p:txBody>
-      </p:sp>
-      <p:sp>
-        <p:nvSpPr>
-          <p:cNvPr id="12" name="防线3"/>
-          <p:cNvSpPr/>
-          <p:nvPr/>
-        </p:nvSpPr>
-        <p:spPr>
-          <a:xfrm>
-            <a:off x="950976" y="3374136"/>
-            <a:ext cx="6547104" cy="804672"/>
-          </a:xfrm>
-          <a:prstGeom prst="roundRect">
-            <a:avLst>
-              <a:gd name="adj" fmla="val 11364"/>
-            </a:avLst>
-          </a:prstGeom>
-          <a:solidFill>
-            <a:schemeClr val="bg2"/>
-          </a:solidFill>
-          <a:ln w="12700">
-            <a:solidFill>
-              <a:schemeClr val="bg2"/>
-            </a:solidFill>
-            <a:prstDash val="solid"/>
-          </a:ln>
-        </p:spPr>
-      </p:sp>
-      <p:sp>
-        <p:nvSpPr>
-          <p:cNvPr id="13" name="圆标-3"/>
-          <p:cNvSpPr/>
-          <p:nvPr/>
-        </p:nvSpPr>
-        <p:spPr>
-          <a:xfrm>
-            <a:off x="1088136" y="3511296"/>
-            <a:ext cx="530352" cy="530352"/>
-          </a:xfrm>
-          <a:prstGeom prst="ellipse">
-            <a:avLst/>
-          </a:prstGeom>
-          <a:solidFill>
-            <a:schemeClr val="accent2"/>
-          </a:solidFill>
-          <a:ln w="12700">
-            <a:solidFill>
-              <a:schemeClr val="accent2"/>
-            </a:solidFill>
-            <a:prstDash val="solid"/>
-          </a:ln>
-        </p:spPr>
-      </p:sp>
-      <p:sp>
-        <p:nvSpPr>
-          <p:cNvPr id="14" name="Text 12"/>
-          <p:cNvSpPr txBox="1"/>
-          <p:nvPr/>
-        </p:nvSpPr>
-        <p:spPr>
-          <a:xfrm>
-            <a:off x="1088136" y="3511296"/>
-            <a:ext cx="530352" cy="530352"/>
-          </a:xfrm>
-          <a:prstGeom prst="rect">
-            <a:avLst/>
-          </a:prstGeom>
-          <a:noFill/>
-          <a:ln/>
-        </p:spPr>
-        <p:txBody>
-          <a:bodyPr wrap="square" lIns="0" tIns="0" rIns="0" bIns="0" rtlCol="0" anchor="ctr"/>
-          <a:lstStyle/>
-          <a:p>
-            <a:pPr algn="ctr" indent="0" marL="0">
-              <a:buNone/>
-            </a:pPr>
-            <a:r>
-              <a:rPr lang="en-US" sz="1700" b="1" dirty="0">
-                <a:solidFill>
-                  <a:schemeClr val="bg1"/>
-                </a:solidFill>
-              </a:rPr>
-              <a:t>3</a:t>
-            </a:r>
-            <a:endParaRPr lang="en-US" sz="1700" dirty="0"/>
-          </a:p>
-        </p:txBody>
-      </p:sp>
-      <p:sp>
-        <p:nvSpPr>
-          <p:cNvPr id="15" name="Text 13"/>
-          <p:cNvSpPr txBox="1"/>
-          <p:nvPr/>
-        </p:nvSpPr>
-        <p:spPr>
-          <a:xfrm>
-            <a:off x="1773936" y="3429000"/>
-            <a:ext cx="5586984" cy="694944"/>
-          </a:xfrm>
-          <a:prstGeom prst="rect">
-            <a:avLst/>
-          </a:prstGeom>
-          <a:noFill/>
-          <a:ln/>
-        </p:spPr>
-        <p:txBody>
-          <a:bodyPr wrap="square" lIns="0" tIns="0" rIns="0" bIns="0" rtlCol="0" anchor="ctr"/>
-          <a:lstStyle/>
-          <a:p>
-            <a:pPr indent="0" marL="0">
-              <a:buNone/>
-            </a:pPr>
-            <a:r>
-              <a:rPr lang="en-US" sz="1350" b="1" dirty="0">
-                <a:solidFill>
-                  <a:schemeClr val="tx2"/>
-                </a:solidFill>
-              </a:rPr>
-              <a:t>参数溯源　</a:t>
-            </a:r>
-            <a:pPr indent="0" marL="0">
-              <a:buNone/>
-            </a:pPr>
-            <a:r>
-              <a:rPr lang="en-US" sz="1350" dirty="0">
-                <a:solidFill>
-                  <a:schemeClr val="tx1"/>
-                </a:solidFill>
-              </a:rPr>
-              <a:t>金额、收款人、日期必须来自用户原话；备注里的号码无效</a:t>
-            </a:r>
-            <a:endParaRPr lang="en-US" sz="1350" dirty="0"/>
-          </a:p>
-        </p:txBody>
-      </p:sp>
-      <p:sp>
-        <p:nvSpPr>
-          <p:cNvPr id="16" name="防线4"/>
-          <p:cNvSpPr/>
-          <p:nvPr/>
-        </p:nvSpPr>
-        <p:spPr>
-          <a:xfrm>
-            <a:off x="1152144" y="4306824"/>
-            <a:ext cx="6345936" cy="804672"/>
-          </a:xfrm>
-          <a:prstGeom prst="roundRect">
-            <a:avLst>
-              <a:gd name="adj" fmla="val 11364"/>
-            </a:avLst>
-          </a:prstGeom>
-          <a:solidFill>
-            <a:schemeClr val="bg2"/>
-          </a:solidFill>
-          <a:ln w="12700">
-            <a:solidFill>
-              <a:schemeClr val="bg2"/>
-            </a:solidFill>
-            <a:prstDash val="solid"/>
-          </a:ln>
-        </p:spPr>
-      </p:sp>
-      <p:sp>
-        <p:nvSpPr>
-          <p:cNvPr id="17" name="圆标-4"/>
-          <p:cNvSpPr/>
-          <p:nvPr/>
-        </p:nvSpPr>
-        <p:spPr>
-          <a:xfrm>
-            <a:off x="1289304" y="4443984"/>
-            <a:ext cx="530352" cy="530352"/>
-          </a:xfrm>
-          <a:prstGeom prst="ellipse">
-            <a:avLst/>
-          </a:prstGeom>
-          <a:solidFill>
-            <a:schemeClr val="accent3"/>
-          </a:solidFill>
-          <a:ln w="12700">
-            <a:solidFill>
-              <a:schemeClr val="accent3"/>
-            </a:solidFill>
-            <a:prstDash val="solid"/>
-          </a:ln>
-        </p:spPr>
-      </p:sp>
-      <p:sp>
-        <p:nvSpPr>
-          <p:cNvPr id="18" name="Text 16"/>
-          <p:cNvSpPr txBox="1"/>
-          <p:nvPr/>
-        </p:nvSpPr>
-        <p:spPr>
-          <a:xfrm>
-            <a:off x="1289304" y="4443984"/>
-            <a:ext cx="530352" cy="530352"/>
-          </a:xfrm>
-          <a:prstGeom prst="rect">
-            <a:avLst/>
-          </a:prstGeom>
-          <a:noFill/>
-          <a:ln/>
-        </p:spPr>
-        <p:txBody>
-          <a:bodyPr wrap="square" lIns="0" tIns="0" rIns="0" bIns="0" rtlCol="0" anchor="ctr"/>
-          <a:lstStyle/>
-          <a:p>
-            <a:pPr algn="ctr" indent="0" marL="0">
-              <a:buNone/>
-            </a:pPr>
-            <a:r>
-              <a:rPr lang="en-US" sz="1700" b="1" dirty="0">
-                <a:solidFill>
-                  <a:schemeClr val="bg1"/>
-                </a:solidFill>
-              </a:rPr>
-              <a:t>4</a:t>
-            </a:r>
-            <a:endParaRPr lang="en-US" sz="1700" dirty="0"/>
-          </a:p>
-        </p:txBody>
-      </p:sp>
-      <p:sp>
-        <p:nvSpPr>
-          <p:cNvPr id="19" name="Text 17"/>
-          <p:cNvSpPr txBox="1"/>
-          <p:nvPr/>
-        </p:nvSpPr>
-        <p:spPr>
-          <a:xfrm>
-            <a:off x="1975104" y="4361688"/>
-            <a:ext cx="5385816" cy="694944"/>
-          </a:xfrm>
-          <a:prstGeom prst="rect">
-            <a:avLst/>
-          </a:prstGeom>
-          <a:noFill/>
-          <a:ln/>
-        </p:spPr>
-        <p:txBody>
-          <a:bodyPr wrap="square" lIns="0" tIns="0" rIns="0" bIns="0" rtlCol="0" anchor="ctr"/>
-          <a:lstStyle/>
-          <a:p>
-            <a:pPr indent="0" marL="0">
-              <a:buNone/>
-            </a:pPr>
-            <a:r>
-              <a:rPr lang="en-US" sz="1350" b="1" dirty="0">
-                <a:solidFill>
-                  <a:schemeClr val="tx2"/>
-                </a:solidFill>
-              </a:rPr>
-              <a:t>代码判档 + 工具白名单　</a:t>
-            </a:r>
-            <a:pPr indent="0" marL="0">
-              <a:buNone/>
-            </a:pPr>
-            <a:r>
-              <a:rPr lang="en-US" sz="1350" dirty="0">
-                <a:solidFill>
-                  <a:schemeClr val="tx1"/>
-                </a:solidFill>
-              </a:rPr>
-              <a:t>模型无法自降档位、无法调用未登记的工具</a:t>
-            </a:r>
-            <a:endParaRPr lang="en-US" sz="1350" dirty="0"/>
-          </a:p>
-        </p:txBody>
-      </p:sp>
-      <p:sp>
-        <p:nvSpPr>
-          <p:cNvPr id="20" name="防线5"/>
-          <p:cNvSpPr/>
-          <p:nvPr/>
-        </p:nvSpPr>
-        <p:spPr>
-          <a:xfrm>
-            <a:off x="1353312" y="5239512"/>
-            <a:ext cx="6144768" cy="804672"/>
-          </a:xfrm>
-          <a:prstGeom prst="roundRect">
-            <a:avLst>
-              <a:gd name="adj" fmla="val 11364"/>
-            </a:avLst>
-          </a:prstGeom>
-          <a:solidFill>
-            <a:schemeClr val="bg2"/>
-          </a:solidFill>
-          <a:ln w="12700">
-            <a:solidFill>
-              <a:schemeClr val="bg2"/>
-            </a:solidFill>
-            <a:prstDash val="solid"/>
-          </a:ln>
-        </p:spPr>
-      </p:sp>
-      <p:sp>
-        <p:nvSpPr>
-          <p:cNvPr id="21" name="圆标-5"/>
-          <p:cNvSpPr/>
-          <p:nvPr/>
-        </p:nvSpPr>
-        <p:spPr>
-          <a:xfrm>
-            <a:off x="1490472" y="5376672"/>
-            <a:ext cx="530352" cy="530352"/>
-          </a:xfrm>
-          <a:prstGeom prst="ellipse">
-            <a:avLst/>
-          </a:prstGeom>
-          <a:solidFill>
-            <a:schemeClr val="accent4"/>
-          </a:solidFill>
-          <a:ln w="12700">
-            <a:solidFill>
-              <a:schemeClr val="accent4"/>
-            </a:solidFill>
-            <a:prstDash val="solid"/>
-          </a:ln>
-        </p:spPr>
-      </p:sp>
-      <p:sp>
-        <p:nvSpPr>
-          <p:cNvPr id="22" name="Text 20"/>
-          <p:cNvSpPr txBox="1"/>
-          <p:nvPr/>
-        </p:nvSpPr>
-        <p:spPr>
-          <a:xfrm>
-            <a:off x="1490472" y="5376672"/>
-            <a:ext cx="530352" cy="530352"/>
-          </a:xfrm>
-          <a:prstGeom prst="rect">
-            <a:avLst/>
-          </a:prstGeom>
-          <a:noFill/>
-          <a:ln/>
-        </p:spPr>
-        <p:txBody>
-          <a:bodyPr wrap="square" lIns="0" tIns="0" rIns="0" bIns="0" rtlCol="0" anchor="ctr"/>
-          <a:lstStyle/>
-          <a:p>
-            <a:pPr algn="ctr" indent="0" marL="0">
-              <a:buNone/>
-            </a:pPr>
-            <a:r>
-              <a:rPr lang="en-US" sz="1700" b="1" dirty="0">
-                <a:solidFill>
-                  <a:schemeClr val="bg1"/>
-                </a:solidFill>
-              </a:rPr>
-              <a:t>5</a:t>
-            </a:r>
-            <a:endParaRPr lang="en-US" sz="1700" dirty="0"/>
-          </a:p>
-        </p:txBody>
-      </p:sp>
-      <p:sp>
-        <p:nvSpPr>
-          <p:cNvPr id="23" name="Text 21"/>
-          <p:cNvSpPr txBox="1"/>
-          <p:nvPr/>
-        </p:nvSpPr>
-        <p:spPr>
-          <a:xfrm>
-            <a:off x="2176272" y="5294376"/>
-            <a:ext cx="5184648" cy="694944"/>
-          </a:xfrm>
-          <a:prstGeom prst="rect">
-            <a:avLst/>
-          </a:prstGeom>
-          <a:noFill/>
-          <a:ln/>
-        </p:spPr>
-        <p:txBody>
-          <a:bodyPr wrap="square" lIns="0" tIns="0" rIns="0" bIns="0" rtlCol="0" anchor="ctr"/>
-          <a:lstStyle/>
-          <a:p>
-            <a:pPr indent="0" marL="0">
-              <a:buNone/>
-            </a:pPr>
-            <a:r>
-              <a:rPr lang="en-US" sz="1350" b="1" dirty="0">
-                <a:solidFill>
-                  <a:schemeClr val="tx2"/>
-                </a:solidFill>
-              </a:rPr>
-              <a:t>代码渲染确认单　</a:t>
-            </a:r>
-            <a:pPr indent="0" marL="0">
-              <a:buNone/>
-            </a:pPr>
-            <a:r>
-              <a:rPr lang="en-US" sz="1350" dirty="0">
-                <a:solidFill>
-                  <a:schemeClr val="tx1"/>
-                </a:solidFill>
-              </a:rPr>
-              <a:t>用户看到的收款人和金额由代码生成，模型改不了</a:t>
-            </a:r>
-            <a:endParaRPr lang="en-US" sz="1350" dirty="0"/>
           </a:p>
         </p:txBody>
       </p:sp>
       <p:pic>
         <p:nvPicPr>
-          <p:cNvPr id="24" name="Image 0" descr="界面截图：07-indirect-injection.png">    </p:cNvPr>
+          <p:cNvPr id="4" name="Image 0" descr="反诈评分流程">    </p:cNvPr>
           <p:cNvPicPr>
             <a:picLocks noChangeAspect="1"/>
           </p:cNvPicPr>
@@ -12067,7 +12779,31 @@
         </p:blipFill>
         <p:spPr>
           <a:xfrm>
-            <a:off x="8595360" y="1417320"/>
+            <a:off x="548640" y="1508760"/>
+            <a:ext cx="7223760" cy="2335519"/>
+          </a:xfrm>
+          <a:prstGeom prst="rect">
+            <a:avLst/>
+          </a:prstGeom>
+        </p:spPr>
+      </p:pic>
+      <p:pic>
+        <p:nvPicPr>
+          <p:cNvPr id="5" name="Image 1" descr="界面截图：05-fraud.png">    </p:cNvPr>
+          <p:cNvPicPr>
+            <a:picLocks noChangeAspect="1"/>
+          </p:cNvPicPr>
+          <p:nvPr/>
+        </p:nvPicPr>
+        <p:blipFill>
+          <a:blip r:embed="rId2"/>
+          <a:stretch>
+            <a:fillRect/>
+          </a:stretch>
+        </p:blipFill>
+        <p:spPr>
+          <a:xfrm>
+            <a:off x="8275320" y="1417320"/>
             <a:ext cx="2239413" cy="4846320"/>
           </a:xfrm>
           <a:prstGeom prst="rect">
@@ -12082,6 +12818,124 @@
           </a:effectLst>
         </p:spPr>
       </p:pic>
+      <p:sp>
+        <p:nvSpPr>
+          <p:cNvPr id="6" name="Text 2"/>
+          <p:cNvSpPr txBox="1"/>
+          <p:nvPr/>
+        </p:nvSpPr>
+        <p:spPr>
+          <a:xfrm>
+            <a:off x="548640" y="4069080"/>
+            <a:ext cx="7315200" cy="2194560"/>
+          </a:xfrm>
+          <a:prstGeom prst="rect">
+            <a:avLst/>
+          </a:prstGeom>
+          <a:noFill/>
+          <a:ln/>
+        </p:spPr>
+        <p:txBody>
+          <a:bodyPr wrap="square" lIns="0" tIns="0" rIns="0" bIns="0" rtlCol="0" anchor="t"/>
+          <a:lstStyle/>
+          <a:p>
+            <a:pPr marL="228600" indent="-228600">
+              <a:spcAft>
+                <a:spcPts val="800"/>
+              </a:spcAft>
+              <a:buSzPct val="100000"/>
+              <a:buChar char="•"/>
+            </a:pPr>
+            <a:r>
+              <a:rPr lang="en-US" sz="1500" b="1" dirty="0">
+                <a:solidFill>
+                  <a:schemeClr val="tx1"/>
+                </a:solidFill>
+              </a:rPr>
+              <a:t>风险名单直接拒绝：</a:t>
+            </a:r>
+            <a:pPr indent="0" marL="0">
+              <a:spcAft>
+                <a:spcPts val="800"/>
+              </a:spcAft>
+              <a:buNone/>
+            </a:pPr>
+            <a:r>
+              <a:rPr lang="en-US" sz="1500" dirty="0">
+                <a:solidFill>
+                  <a:schemeClr val="tx1"/>
+                </a:solidFill>
+              </a:rPr>
+              <a:t>“客服让我把钱转到安全账户”——在调用模型之前就拦下</a:t>
+            </a:r>
+            <a:endParaRPr lang="en-US" sz="1500" dirty="0"/>
+          </a:p>
+          <a:p>
+            <a:pPr marL="228600" indent="-228600">
+              <a:spcAft>
+                <a:spcPts val="800"/>
+              </a:spcAft>
+              <a:buSzPct val="100000"/>
+              <a:buChar char="•"/>
+            </a:pPr>
+            <a:r>
+              <a:rPr lang="en-US" sz="1500" b="1" dirty="0">
+                <a:solidFill>
+                  <a:schemeClr val="tx1"/>
+                </a:solidFill>
+              </a:rPr>
+              <a:t>代码打分 0–100：</a:t>
+            </a:r>
+            <a:pPr indent="0" marL="0">
+              <a:spcAft>
+                <a:spcPts val="800"/>
+              </a:spcAft>
+              <a:buNone/>
+            </a:pPr>
+            <a:r>
+              <a:rPr lang="en-US" sz="1500" dirty="0">
+                <a:solidFill>
+                  <a:schemeClr val="tx1"/>
+                </a:solidFill>
+              </a:rPr>
+              <a:t>首次收款人、金额异常、诈骗话术、催促用语、凌晨、短时多笔</a:t>
+            </a:r>
+            <a:endParaRPr lang="en-US" sz="1500" dirty="0"/>
+          </a:p>
+          <a:p>
+            <a:pPr marL="228600" indent="-228600">
+              <a:spcAft>
+                <a:spcPts val="800"/>
+              </a:spcAft>
+              <a:buSzPct val="100000"/>
+              <a:buChar char="•"/>
+            </a:pPr>
+            <a:r>
+              <a:rPr lang="en-US" sz="1500" b="1" dirty="0">
+                <a:solidFill>
+                  <a:schemeClr val="tx1"/>
+                </a:solidFill>
+              </a:rPr>
+              <a:t>≥ 60 分：</a:t>
+            </a:r>
+            <a:pPr indent="0" marL="0">
+              <a:spcAft>
+                <a:spcPts val="800"/>
+              </a:spcAft>
+              <a:buNone/>
+            </a:pPr>
+            <a:r>
+              <a:rPr lang="en-US" sz="1500" dirty="0">
+                <a:solidFill>
+                  <a:schemeClr val="tx1"/>
+                </a:solidFill>
+              </a:rPr>
+              <a:t>强制红档 + 30 秒冷静期 + 默认 24 小时后到账，到账前可撤回</a:t>
+            </a:r>
+            <a:endParaRPr lang="en-US" sz="1500" dirty="0"/>
+          </a:p>
+        </p:txBody>
+      </p:sp>
       <p:sp>
         <p:nvSpPr>
           <p:cNvPr id="25" name="Slide Number Placeholder 0"/>
